--- a/Pong_Embedded/PongPresentation.pptx
+++ b/Pong_Embedded/PongPresentation.pptx
@@ -1,34 +1,34 @@
 
 <file path=ppt/presentation.xml><?xml version="1.0" encoding="utf-8"?>
-<p:presentation xmlns:a="http://schemas.openxmlformats.org/drawingml/2006/main" xmlns:r="http://schemas.openxmlformats.org/officeDocument/2006/relationships" xmlns:mc="http://schemas.openxmlformats.org/markup-compatibility/2006" xmlns:mv="urn:schemas-microsoft-com:mac:vml" xmlns:p="http://schemas.openxmlformats.org/presentationml/2006/main" xmlns:c="http://schemas.openxmlformats.org/drawingml/2006/chart" xmlns:dgm="http://schemas.openxmlformats.org/drawingml/2006/diagram" xmlns:o="urn:schemas-microsoft-com:office:office" xmlns:v="urn:schemas-microsoft-com:vml" xmlns:pvml="urn:schemas-microsoft-com:office:powerpoint" xmlns:com="http://schemas.openxmlformats.org/drawingml/2006/compatibility" xmlns:p14="http://schemas.microsoft.com/office/powerpoint/2010/main" xmlns:p15="http://schemas.microsoft.com/office/powerpoint/2012/main" xmlns:ahyp="http://schemas.microsoft.com/office/drawing/2018/hyperlinkcolor" autoCompressPictures="0" embedTrueTypeFonts="1" strictFirstAndLastChars="0" saveSubsetFonts="1">
+<p:presentation xmlns:a="http://schemas.openxmlformats.org/drawingml/2006/main" xmlns:r="http://schemas.openxmlformats.org/officeDocument/2006/relationships" xmlns:p="http://schemas.openxmlformats.org/presentationml/2006/main" strictFirstAndLastChars="0" embedTrueTypeFonts="1" saveSubsetFonts="1" autoCompressPictures="0">
   <p:sldMasterIdLst>
-    <p:sldMasterId id="2147483659" r:id="rId4"/>
+    <p:sldMasterId id="2147483659" r:id="rId1"/>
   </p:sldMasterIdLst>
   <p:notesMasterIdLst>
-    <p:notesMasterId r:id="rId5"/>
+    <p:notesMasterId r:id="rId10"/>
   </p:notesMasterIdLst>
   <p:sldIdLst>
-    <p:sldId id="256" r:id="rId6"/>
-    <p:sldId id="257" r:id="rId7"/>
-    <p:sldId id="258" r:id="rId8"/>
-    <p:sldId id="259" r:id="rId9"/>
-    <p:sldId id="260" r:id="rId10"/>
-    <p:sldId id="261" r:id="rId11"/>
-    <p:sldId id="262" r:id="rId12"/>
-    <p:sldId id="263" r:id="rId13"/>
+    <p:sldId id="256" r:id="rId2"/>
+    <p:sldId id="257" r:id="rId3"/>
+    <p:sldId id="258" r:id="rId4"/>
+    <p:sldId id="259" r:id="rId5"/>
+    <p:sldId id="260" r:id="rId6"/>
+    <p:sldId id="261" r:id="rId7"/>
+    <p:sldId id="262" r:id="rId8"/>
+    <p:sldId id="263" r:id="rId9"/>
   </p:sldIdLst>
-  <p:sldSz cy="5143500" cx="9144000"/>
+  <p:sldSz cx="9144000" cy="5143500" type="screen16x9"/>
   <p:notesSz cx="6858000" cy="9144000"/>
   <p:embeddedFontLst>
     <p:embeddedFont>
-      <p:font typeface="Old Standard TT"/>
-      <p:regular r:id="rId14"/>
-      <p:bold r:id="rId15"/>
-      <p:italic r:id="rId16"/>
+      <p:font typeface="Old Standard TT" panose="020B0604020202020204" charset="0"/>
+      <p:regular r:id="rId11"/>
+      <p:bold r:id="rId12"/>
+      <p:italic r:id="rId13"/>
     </p:embeddedFont>
   </p:embeddedFontLst>
   <p:defaultTextStyle>
-    <a:defPPr lvl="0" marR="0" rtl="0" algn="l">
+    <a:defPPr marR="0" lvl="0" algn="l" rtl="0">
       <a:lnSpc>
         <a:spcPct val="100000"/>
       </a:lnSpc>
@@ -39,7 +39,7 @@
         <a:spcPts val="0"/>
       </a:spcAft>
     </a:defPPr>
-    <a:lvl1pPr lvl="0" marR="0" rtl="0" algn="l">
+    <a:lvl1pPr marR="0" lvl="0" algn="l" rtl="0">
       <a:lnSpc>
         <a:spcPct val="100000"/>
       </a:lnSpc>
@@ -53,7 +53,7 @@
         <a:srgbClr val="000000"/>
       </a:buClr>
       <a:buFont typeface="Arial"/>
-      <a:defRPr b="0" i="0" sz="1400" u="none" cap="none" strike="noStrike">
+      <a:defRPr sz="1400" b="0" i="0" u="none" strike="noStrike" cap="none">
         <a:solidFill>
           <a:srgbClr val="000000"/>
         </a:solidFill>
@@ -63,7 +63,7 @@
         <a:sym typeface="Arial"/>
       </a:defRPr>
     </a:lvl1pPr>
-    <a:lvl2pPr lvl="1" marR="0" rtl="0" algn="l">
+    <a:lvl2pPr marR="0" lvl="1" algn="l" rtl="0">
       <a:lnSpc>
         <a:spcPct val="100000"/>
       </a:lnSpc>
@@ -77,7 +77,7 @@
         <a:srgbClr val="000000"/>
       </a:buClr>
       <a:buFont typeface="Arial"/>
-      <a:defRPr b="0" i="0" sz="1400" u="none" cap="none" strike="noStrike">
+      <a:defRPr sz="1400" b="0" i="0" u="none" strike="noStrike" cap="none">
         <a:solidFill>
           <a:srgbClr val="000000"/>
         </a:solidFill>
@@ -87,7 +87,7 @@
         <a:sym typeface="Arial"/>
       </a:defRPr>
     </a:lvl2pPr>
-    <a:lvl3pPr lvl="2" marR="0" rtl="0" algn="l">
+    <a:lvl3pPr marR="0" lvl="2" algn="l" rtl="0">
       <a:lnSpc>
         <a:spcPct val="100000"/>
       </a:lnSpc>
@@ -101,7 +101,7 @@
         <a:srgbClr val="000000"/>
       </a:buClr>
       <a:buFont typeface="Arial"/>
-      <a:defRPr b="0" i="0" sz="1400" u="none" cap="none" strike="noStrike">
+      <a:defRPr sz="1400" b="0" i="0" u="none" strike="noStrike" cap="none">
         <a:solidFill>
           <a:srgbClr val="000000"/>
         </a:solidFill>
@@ -111,7 +111,7 @@
         <a:sym typeface="Arial"/>
       </a:defRPr>
     </a:lvl3pPr>
-    <a:lvl4pPr lvl="3" marR="0" rtl="0" algn="l">
+    <a:lvl4pPr marR="0" lvl="3" algn="l" rtl="0">
       <a:lnSpc>
         <a:spcPct val="100000"/>
       </a:lnSpc>
@@ -125,7 +125,7 @@
         <a:srgbClr val="000000"/>
       </a:buClr>
       <a:buFont typeface="Arial"/>
-      <a:defRPr b="0" i="0" sz="1400" u="none" cap="none" strike="noStrike">
+      <a:defRPr sz="1400" b="0" i="0" u="none" strike="noStrike" cap="none">
         <a:solidFill>
           <a:srgbClr val="000000"/>
         </a:solidFill>
@@ -135,7 +135,7 @@
         <a:sym typeface="Arial"/>
       </a:defRPr>
     </a:lvl4pPr>
-    <a:lvl5pPr lvl="4" marR="0" rtl="0" algn="l">
+    <a:lvl5pPr marR="0" lvl="4" algn="l" rtl="0">
       <a:lnSpc>
         <a:spcPct val="100000"/>
       </a:lnSpc>
@@ -149,7 +149,7 @@
         <a:srgbClr val="000000"/>
       </a:buClr>
       <a:buFont typeface="Arial"/>
-      <a:defRPr b="0" i="0" sz="1400" u="none" cap="none" strike="noStrike">
+      <a:defRPr sz="1400" b="0" i="0" u="none" strike="noStrike" cap="none">
         <a:solidFill>
           <a:srgbClr val="000000"/>
         </a:solidFill>
@@ -159,7 +159,7 @@
         <a:sym typeface="Arial"/>
       </a:defRPr>
     </a:lvl5pPr>
-    <a:lvl6pPr lvl="5" marR="0" rtl="0" algn="l">
+    <a:lvl6pPr marR="0" lvl="5" algn="l" rtl="0">
       <a:lnSpc>
         <a:spcPct val="100000"/>
       </a:lnSpc>
@@ -173,7 +173,7 @@
         <a:srgbClr val="000000"/>
       </a:buClr>
       <a:buFont typeface="Arial"/>
-      <a:defRPr b="0" i="0" sz="1400" u="none" cap="none" strike="noStrike">
+      <a:defRPr sz="1400" b="0" i="0" u="none" strike="noStrike" cap="none">
         <a:solidFill>
           <a:srgbClr val="000000"/>
         </a:solidFill>
@@ -183,7 +183,7 @@
         <a:sym typeface="Arial"/>
       </a:defRPr>
     </a:lvl6pPr>
-    <a:lvl7pPr lvl="6" marR="0" rtl="0" algn="l">
+    <a:lvl7pPr marR="0" lvl="6" algn="l" rtl="0">
       <a:lnSpc>
         <a:spcPct val="100000"/>
       </a:lnSpc>
@@ -197,7 +197,7 @@
         <a:srgbClr val="000000"/>
       </a:buClr>
       <a:buFont typeface="Arial"/>
-      <a:defRPr b="0" i="0" sz="1400" u="none" cap="none" strike="noStrike">
+      <a:defRPr sz="1400" b="0" i="0" u="none" strike="noStrike" cap="none">
         <a:solidFill>
           <a:srgbClr val="000000"/>
         </a:solidFill>
@@ -207,7 +207,7 @@
         <a:sym typeface="Arial"/>
       </a:defRPr>
     </a:lvl7pPr>
-    <a:lvl8pPr lvl="7" marR="0" rtl="0" algn="l">
+    <a:lvl8pPr marR="0" lvl="7" algn="l" rtl="0">
       <a:lnSpc>
         <a:spcPct val="100000"/>
       </a:lnSpc>
@@ -221,7 +221,7 @@
         <a:srgbClr val="000000"/>
       </a:buClr>
       <a:buFont typeface="Arial"/>
-      <a:defRPr b="0" i="0" sz="1400" u="none" cap="none" strike="noStrike">
+      <a:defRPr sz="1400" b="0" i="0" u="none" strike="noStrike" cap="none">
         <a:solidFill>
           <a:srgbClr val="000000"/>
         </a:solidFill>
@@ -231,7 +231,7 @@
         <a:sym typeface="Arial"/>
       </a:defRPr>
     </a:lvl8pPr>
-    <a:lvl9pPr lvl="8" marR="0" rtl="0" algn="l">
+    <a:lvl9pPr marR="0" lvl="8" algn="l" rtl="0">
       <a:lnSpc>
         <a:spcPct val="100000"/>
       </a:lnSpc>
@@ -245,7 +245,7 @@
         <a:srgbClr val="000000"/>
       </a:buClr>
       <a:buFont typeface="Arial"/>
-      <a:defRPr b="0" i="0" sz="1400" u="none" cap="none" strike="noStrike">
+      <a:defRPr sz="1400" b="0" i="0" u="none" strike="noStrike" cap="none">
         <a:solidFill>
           <a:srgbClr val="000000"/>
         </a:solidFill>
@@ -258,7 +258,7 @@
   </p:defaultTextStyle>
   <p:extLst>
     <p:ext uri="{EFAFB233-063F-42B5-8137-9DF3F51BA10A}">
-      <p15:sldGuideLst>
+      <p15:sldGuideLst xmlns:p15="http://schemas.microsoft.com/office/powerpoint/2012/main">
         <p15:guide id="1" orient="horz" pos="1620">
           <p15:clr>
             <a:srgbClr val="747775"/>
@@ -276,11 +276,16 @@
 </file>
 
 <file path=ppt/notesMasters/notesMaster1.xml><?xml version="1.0" encoding="utf-8"?>
-<p:notesMaster xmlns:a="http://schemas.openxmlformats.org/drawingml/2006/main" xmlns:r="http://schemas.openxmlformats.org/officeDocument/2006/relationships" xmlns:mc="http://schemas.openxmlformats.org/markup-compatibility/2006" xmlns:mv="urn:schemas-microsoft-com:mac:vml" xmlns:p="http://schemas.openxmlformats.org/presentationml/2006/main" xmlns:c="http://schemas.openxmlformats.org/drawingml/2006/chart" xmlns:dgm="http://schemas.openxmlformats.org/drawingml/2006/diagram" xmlns:o="urn:schemas-microsoft-com:office:office" xmlns:v="urn:schemas-microsoft-com:vml" xmlns:pvml="urn:schemas-microsoft-com:office:powerpoint" xmlns:com="http://schemas.openxmlformats.org/drawingml/2006/compatibility" xmlns:p14="http://schemas.microsoft.com/office/powerpoint/2010/main" xmlns:p15="http://schemas.microsoft.com/office/powerpoint/2012/main" xmlns:ahyp="http://schemas.microsoft.com/office/drawing/2018/hyperlinkcolor">
+<p:notesMaster xmlns:a="http://schemas.openxmlformats.org/drawingml/2006/main" xmlns:r="http://schemas.openxmlformats.org/officeDocument/2006/relationships" xmlns:p="http://schemas.openxmlformats.org/presentationml/2006/main">
   <p:cSld>
+    <p:bg>
+      <p:bgRef idx="1001">
+        <a:schemeClr val="bg1"/>
+      </p:bgRef>
+    </p:bg>
     <p:spTree>
       <p:nvGrpSpPr>
-        <p:cNvPr id="2" name="Shape 2"/>
+        <p:cNvPr id="1" name="Shape 2"/>
         <p:cNvGrpSpPr/>
         <p:nvPr/>
       </p:nvGrpSpPr>
@@ -295,9 +300,11 @@
       <p:sp>
         <p:nvSpPr>
           <p:cNvPr id="3" name="Google Shape;3;n"/>
-          <p:cNvSpPr/>
+          <p:cNvSpPr>
+            <a:spLocks noGrp="1" noRot="1" noChangeAspect="1"/>
+          </p:cNvSpPr>
           <p:nvPr>
-            <p:ph idx="2" type="sldImg"/>
+            <p:ph type="sldImg" idx="2"/>
           </p:nvPr>
         </p:nvSpPr>
         <p:spPr>
@@ -306,9 +313,13 @@
             <a:ext cx="6096075" cy="3429000"/>
           </a:xfrm>
           <a:custGeom>
-            <a:rect b="b" l="l" r="r" t="t"/>
+            <a:avLst/>
+            <a:gdLst/>
+            <a:ahLst/>
+            <a:cxnLst/>
+            <a:rect l="l" t="t" r="r" b="b"/>
             <a:pathLst>
-              <a:path extrusionOk="0" h="120000" w="120000">
+              <a:path w="120000" h="120000" extrusionOk="0">
                 <a:moveTo>
                   <a:pt x="0" y="0"/>
                 </a:moveTo>
@@ -326,23 +337,25 @@
             </a:pathLst>
           </a:custGeom>
           <a:noFill/>
-          <a:ln cap="flat" cmpd="sng" w="9525">
+          <a:ln w="9525" cap="flat" cmpd="sng">
             <a:solidFill>
               <a:srgbClr val="000000"/>
             </a:solidFill>
             <a:prstDash val="solid"/>
             <a:round/>
-            <a:headEnd len="sm" w="sm" type="none"/>
-            <a:tailEnd len="sm" w="sm" type="none"/>
+            <a:headEnd type="none" w="sm" len="sm"/>
+            <a:tailEnd type="none" w="sm" len="sm"/>
           </a:ln>
         </p:spPr>
       </p:sp>
       <p:sp>
         <p:nvSpPr>
           <p:cNvPr id="4" name="Google Shape;4;n"/>
-          <p:cNvSpPr txBox="1"/>
+          <p:cNvSpPr txBox="1">
+            <a:spLocks noGrp="1"/>
+          </p:cNvSpPr>
           <p:nvPr>
-            <p:ph idx="1" type="body"/>
+            <p:ph type="body" idx="1"/>
           </p:nvPr>
         </p:nvSpPr>
         <p:spPr>
@@ -359,11 +372,11 @@
           </a:ln>
         </p:spPr>
         <p:txBody>
-          <a:bodyPr anchorCtr="0" anchor="t" bIns="91425" lIns="91425" spcFirstLastPara="1" rIns="91425" wrap="square" tIns="91425">
+          <a:bodyPr spcFirstLastPara="1" wrap="square" lIns="91425" tIns="91425" rIns="91425" bIns="91425" anchor="t" anchorCtr="0">
             <a:noAutofit/>
           </a:bodyPr>
           <a:lstStyle>
-            <a:lvl1pPr indent="-298450" lvl="0" marL="457200">
+            <a:lvl1pPr marL="457200" lvl="0" indent="-298450">
               <a:spcBef>
                 <a:spcPts val="0"/>
               </a:spcBef>
@@ -374,7 +387,7 @@
               <a:buChar char="●"/>
               <a:defRPr sz="1100"/>
             </a:lvl1pPr>
-            <a:lvl2pPr indent="-298450" lvl="1" marL="914400">
+            <a:lvl2pPr marL="914400" lvl="1" indent="-298450">
               <a:spcBef>
                 <a:spcPts val="0"/>
               </a:spcBef>
@@ -385,7 +398,7 @@
               <a:buChar char="○"/>
               <a:defRPr sz="1100"/>
             </a:lvl2pPr>
-            <a:lvl3pPr indent="-298450" lvl="2" marL="1371600">
+            <a:lvl3pPr marL="1371600" lvl="2" indent="-298450">
               <a:spcBef>
                 <a:spcPts val="0"/>
               </a:spcBef>
@@ -396,7 +409,7 @@
               <a:buChar char="■"/>
               <a:defRPr sz="1100"/>
             </a:lvl3pPr>
-            <a:lvl4pPr indent="-298450" lvl="3" marL="1828800">
+            <a:lvl4pPr marL="1828800" lvl="3" indent="-298450">
               <a:spcBef>
                 <a:spcPts val="0"/>
               </a:spcBef>
@@ -407,7 +420,7 @@
               <a:buChar char="●"/>
               <a:defRPr sz="1100"/>
             </a:lvl4pPr>
-            <a:lvl5pPr indent="-298450" lvl="4" marL="2286000">
+            <a:lvl5pPr marL="2286000" lvl="4" indent="-298450">
               <a:spcBef>
                 <a:spcPts val="0"/>
               </a:spcBef>
@@ -418,7 +431,7 @@
               <a:buChar char="○"/>
               <a:defRPr sz="1100"/>
             </a:lvl5pPr>
-            <a:lvl6pPr indent="-298450" lvl="5" marL="2743200">
+            <a:lvl6pPr marL="2743200" lvl="5" indent="-298450">
               <a:spcBef>
                 <a:spcPts val="0"/>
               </a:spcBef>
@@ -429,7 +442,7 @@
               <a:buChar char="■"/>
               <a:defRPr sz="1100"/>
             </a:lvl6pPr>
-            <a:lvl7pPr indent="-298450" lvl="6" marL="3200400">
+            <a:lvl7pPr marL="3200400" lvl="6" indent="-298450">
               <a:spcBef>
                 <a:spcPts val="0"/>
               </a:spcBef>
@@ -440,7 +453,7 @@
               <a:buChar char="●"/>
               <a:defRPr sz="1100"/>
             </a:lvl7pPr>
-            <a:lvl8pPr indent="-298450" lvl="7" marL="3657600">
+            <a:lvl8pPr marL="3657600" lvl="7" indent="-298450">
               <a:spcBef>
                 <a:spcPts val="0"/>
               </a:spcBef>
@@ -451,7 +464,7 @@
               <a:buChar char="○"/>
               <a:defRPr sz="1100"/>
             </a:lvl8pPr>
-            <a:lvl9pPr indent="-298450" lvl="8" marL="4114800">
+            <a:lvl9pPr marL="4114800" lvl="8" indent="-298450">
               <a:spcBef>
                 <a:spcPts val="0"/>
               </a:spcBef>
@@ -463,14 +476,16 @@
               <a:defRPr sz="1100"/>
             </a:lvl9pPr>
           </a:lstStyle>
-          <a:p/>
+          <a:p>
+            <a:endParaRPr/>
+          </a:p>
         </p:txBody>
       </p:sp>
     </p:spTree>
   </p:cSld>
-  <p:clrMap accent1="accent1" accent2="accent2" accent3="accent3" accent4="accent4" accent5="accent5" accent6="accent6" bg1="lt1" bg2="dk2" tx1="dk1" tx2="lt2" folHlink="folHlink" hlink="hlink"/>
+  <p:clrMap bg1="lt1" tx1="dk1" bg2="dk2" tx2="lt2" accent1="accent1" accent2="accent2" accent3="accent3" accent4="accent4" accent5="accent5" accent6="accent6" hlink="hlink" folHlink="folHlink"/>
   <p:notesStyle>
-    <a:defPPr lvl="0" marR="0" rtl="0" algn="l">
+    <a:defPPr marR="0" lvl="0" algn="l" rtl="0">
       <a:lnSpc>
         <a:spcPct val="100000"/>
       </a:lnSpc>
@@ -481,7 +496,7 @@
         <a:spcPts val="0"/>
       </a:spcAft>
     </a:defPPr>
-    <a:lvl1pPr lvl="0" marR="0" rtl="0" algn="l">
+    <a:lvl1pPr marR="0" lvl="0" algn="l" rtl="0">
       <a:lnSpc>
         <a:spcPct val="100000"/>
       </a:lnSpc>
@@ -495,7 +510,7 @@
         <a:srgbClr val="000000"/>
       </a:buClr>
       <a:buFont typeface="Arial"/>
-      <a:defRPr b="0" i="0" sz="1400" u="none" cap="none" strike="noStrike">
+      <a:defRPr sz="1400" b="0" i="0" u="none" strike="noStrike" cap="none">
         <a:solidFill>
           <a:srgbClr val="000000"/>
         </a:solidFill>
@@ -505,7 +520,7 @@
         <a:sym typeface="Arial"/>
       </a:defRPr>
     </a:lvl1pPr>
-    <a:lvl2pPr lvl="1" marR="0" rtl="0" algn="l">
+    <a:lvl2pPr marR="0" lvl="1" algn="l" rtl="0">
       <a:lnSpc>
         <a:spcPct val="100000"/>
       </a:lnSpc>
@@ -519,7 +534,7 @@
         <a:srgbClr val="000000"/>
       </a:buClr>
       <a:buFont typeface="Arial"/>
-      <a:defRPr b="0" i="0" sz="1400" u="none" cap="none" strike="noStrike">
+      <a:defRPr sz="1400" b="0" i="0" u="none" strike="noStrike" cap="none">
         <a:solidFill>
           <a:srgbClr val="000000"/>
         </a:solidFill>
@@ -529,7 +544,7 @@
         <a:sym typeface="Arial"/>
       </a:defRPr>
     </a:lvl2pPr>
-    <a:lvl3pPr lvl="2" marR="0" rtl="0" algn="l">
+    <a:lvl3pPr marR="0" lvl="2" algn="l" rtl="0">
       <a:lnSpc>
         <a:spcPct val="100000"/>
       </a:lnSpc>
@@ -543,7 +558,7 @@
         <a:srgbClr val="000000"/>
       </a:buClr>
       <a:buFont typeface="Arial"/>
-      <a:defRPr b="0" i="0" sz="1400" u="none" cap="none" strike="noStrike">
+      <a:defRPr sz="1400" b="0" i="0" u="none" strike="noStrike" cap="none">
         <a:solidFill>
           <a:srgbClr val="000000"/>
         </a:solidFill>
@@ -553,7 +568,7 @@
         <a:sym typeface="Arial"/>
       </a:defRPr>
     </a:lvl3pPr>
-    <a:lvl4pPr lvl="3" marR="0" rtl="0" algn="l">
+    <a:lvl4pPr marR="0" lvl="3" algn="l" rtl="0">
       <a:lnSpc>
         <a:spcPct val="100000"/>
       </a:lnSpc>
@@ -567,7 +582,7 @@
         <a:srgbClr val="000000"/>
       </a:buClr>
       <a:buFont typeface="Arial"/>
-      <a:defRPr b="0" i="0" sz="1400" u="none" cap="none" strike="noStrike">
+      <a:defRPr sz="1400" b="0" i="0" u="none" strike="noStrike" cap="none">
         <a:solidFill>
           <a:srgbClr val="000000"/>
         </a:solidFill>
@@ -577,7 +592,7 @@
         <a:sym typeface="Arial"/>
       </a:defRPr>
     </a:lvl4pPr>
-    <a:lvl5pPr lvl="4" marR="0" rtl="0" algn="l">
+    <a:lvl5pPr marR="0" lvl="4" algn="l" rtl="0">
       <a:lnSpc>
         <a:spcPct val="100000"/>
       </a:lnSpc>
@@ -591,7 +606,7 @@
         <a:srgbClr val="000000"/>
       </a:buClr>
       <a:buFont typeface="Arial"/>
-      <a:defRPr b="0" i="0" sz="1400" u="none" cap="none" strike="noStrike">
+      <a:defRPr sz="1400" b="0" i="0" u="none" strike="noStrike" cap="none">
         <a:solidFill>
           <a:srgbClr val="000000"/>
         </a:solidFill>
@@ -601,7 +616,7 @@
         <a:sym typeface="Arial"/>
       </a:defRPr>
     </a:lvl5pPr>
-    <a:lvl6pPr lvl="5" marR="0" rtl="0" algn="l">
+    <a:lvl6pPr marR="0" lvl="5" algn="l" rtl="0">
       <a:lnSpc>
         <a:spcPct val="100000"/>
       </a:lnSpc>
@@ -615,7 +630,7 @@
         <a:srgbClr val="000000"/>
       </a:buClr>
       <a:buFont typeface="Arial"/>
-      <a:defRPr b="0" i="0" sz="1400" u="none" cap="none" strike="noStrike">
+      <a:defRPr sz="1400" b="0" i="0" u="none" strike="noStrike" cap="none">
         <a:solidFill>
           <a:srgbClr val="000000"/>
         </a:solidFill>
@@ -625,7 +640,7 @@
         <a:sym typeface="Arial"/>
       </a:defRPr>
     </a:lvl6pPr>
-    <a:lvl7pPr lvl="6" marR="0" rtl="0" algn="l">
+    <a:lvl7pPr marR="0" lvl="6" algn="l" rtl="0">
       <a:lnSpc>
         <a:spcPct val="100000"/>
       </a:lnSpc>
@@ -639,7 +654,7 @@
         <a:srgbClr val="000000"/>
       </a:buClr>
       <a:buFont typeface="Arial"/>
-      <a:defRPr b="0" i="0" sz="1400" u="none" cap="none" strike="noStrike">
+      <a:defRPr sz="1400" b="0" i="0" u="none" strike="noStrike" cap="none">
         <a:solidFill>
           <a:srgbClr val="000000"/>
         </a:solidFill>
@@ -649,7 +664,7 @@
         <a:sym typeface="Arial"/>
       </a:defRPr>
     </a:lvl7pPr>
-    <a:lvl8pPr lvl="7" marR="0" rtl="0" algn="l">
+    <a:lvl8pPr marR="0" lvl="7" algn="l" rtl="0">
       <a:lnSpc>
         <a:spcPct val="100000"/>
       </a:lnSpc>
@@ -663,7 +678,7 @@
         <a:srgbClr val="000000"/>
       </a:buClr>
       <a:buFont typeface="Arial"/>
-      <a:defRPr b="0" i="0" sz="1400" u="none" cap="none" strike="noStrike">
+      <a:defRPr sz="1400" b="0" i="0" u="none" strike="noStrike" cap="none">
         <a:solidFill>
           <a:srgbClr val="000000"/>
         </a:solidFill>
@@ -673,7 +688,7 @@
         <a:sym typeface="Arial"/>
       </a:defRPr>
     </a:lvl8pPr>
-    <a:lvl9pPr lvl="8" marR="0" rtl="0" algn="l">
+    <a:lvl9pPr marR="0" lvl="8" algn="l" rtl="0">
       <a:lnSpc>
         <a:spcPct val="100000"/>
       </a:lnSpc>
@@ -687,7 +702,7 @@
         <a:srgbClr val="000000"/>
       </a:buClr>
       <a:buFont typeface="Arial"/>
-      <a:defRPr b="0" i="0" sz="1400" u="none" cap="none" strike="noStrike">
+      <a:defRPr sz="1400" b="0" i="0" u="none" strike="noStrike" cap="none">
         <a:solidFill>
           <a:srgbClr val="000000"/>
         </a:solidFill>
@@ -702,11 +717,11 @@
 </file>
 
 <file path=ppt/notesSlides/notesSlide1.xml><?xml version="1.0" encoding="utf-8"?>
-<p:notes xmlns:a="http://schemas.openxmlformats.org/drawingml/2006/main" xmlns:r="http://schemas.openxmlformats.org/officeDocument/2006/relationships" xmlns:mc="http://schemas.openxmlformats.org/markup-compatibility/2006" xmlns:mv="urn:schemas-microsoft-com:mac:vml" xmlns:p="http://schemas.openxmlformats.org/presentationml/2006/main" xmlns:c="http://schemas.openxmlformats.org/drawingml/2006/chart" xmlns:dgm="http://schemas.openxmlformats.org/drawingml/2006/diagram" xmlns:o="urn:schemas-microsoft-com:office:office" xmlns:v="urn:schemas-microsoft-com:vml" xmlns:pvml="urn:schemas-microsoft-com:office:powerpoint" xmlns:com="http://schemas.openxmlformats.org/drawingml/2006/compatibility" xmlns:p14="http://schemas.microsoft.com/office/powerpoint/2010/main" xmlns:p15="http://schemas.microsoft.com/office/powerpoint/2012/main" xmlns:ahyp="http://schemas.microsoft.com/office/drawing/2018/hyperlinkcolor" showMasterPhAnim="0" showMasterSp="0">
+<p:notes xmlns:a="http://schemas.openxmlformats.org/drawingml/2006/main" xmlns:r="http://schemas.openxmlformats.org/officeDocument/2006/relationships" xmlns:p="http://schemas.openxmlformats.org/presentationml/2006/main" showMasterSp="0" showMasterPhAnim="0">
   <p:cSld>
     <p:spTree>
       <p:nvGrpSpPr>
-        <p:cNvPr id="55" name="Shape 55"/>
+        <p:cNvPr id="1" name="Shape 55"/>
         <p:cNvGrpSpPr/>
         <p:nvPr/>
       </p:nvGrpSpPr>
@@ -721,9 +736,11 @@
       <p:sp>
         <p:nvSpPr>
           <p:cNvPr id="56" name="Google Shape;56;p:notes"/>
-          <p:cNvSpPr/>
+          <p:cNvSpPr>
+            <a:spLocks noGrp="1" noRot="1" noChangeAspect="1"/>
+          </p:cNvSpPr>
           <p:nvPr>
-            <p:ph idx="2" type="sldImg"/>
+            <p:ph type="sldImg" idx="2"/>
           </p:nvPr>
         </p:nvSpPr>
         <p:spPr>
@@ -732,9 +749,13 @@
             <a:ext cx="6096075" cy="3429000"/>
           </a:xfrm>
           <a:custGeom>
-            <a:rect b="b" l="l" r="r" t="t"/>
+            <a:avLst/>
+            <a:gdLst/>
+            <a:ahLst/>
+            <a:cxnLst/>
+            <a:rect l="l" t="t" r="r" b="b"/>
             <a:pathLst>
-              <a:path extrusionOk="0" h="120000" w="120000">
+              <a:path w="120000" h="120000" extrusionOk="0">
                 <a:moveTo>
                   <a:pt x="0" y="0"/>
                 </a:moveTo>
@@ -756,9 +777,11 @@
       <p:sp>
         <p:nvSpPr>
           <p:cNvPr id="57" name="Google Shape;57;p:notes"/>
-          <p:cNvSpPr txBox="1"/>
+          <p:cNvSpPr txBox="1">
+            <a:spLocks noGrp="1"/>
+          </p:cNvSpPr>
           <p:nvPr>
-            <p:ph idx="1" type="body"/>
+            <p:ph type="body" idx="1"/>
           </p:nvPr>
         </p:nvSpPr>
         <p:spPr>
@@ -771,12 +794,12 @@
           </a:prstGeom>
         </p:spPr>
         <p:txBody>
-          <a:bodyPr anchorCtr="0" anchor="t" bIns="91425" lIns="91425" spcFirstLastPara="1" rIns="91425" wrap="square" tIns="91425">
+          <a:bodyPr spcFirstLastPara="1" wrap="square" lIns="91425" tIns="91425" rIns="91425" bIns="91425" anchor="t" anchorCtr="0">
             <a:noAutofit/>
           </a:bodyPr>
           <a:lstStyle/>
           <a:p>
-            <a:pPr indent="0" lvl="0" marL="0" rtl="0" algn="l">
+            <a:pPr marL="0" lvl="0" indent="0" algn="l" rtl="0">
               <a:spcBef>
                 <a:spcPts val="0"/>
               </a:spcBef>
@@ -785,9 +808,6 @@
               </a:spcAft>
               <a:buNone/>
             </a:pPr>
-            <a:r>
-              <a:t/>
-            </a:r>
             <a:endParaRPr/>
           </a:p>
         </p:txBody>
@@ -801,11 +821,11 @@
 </file>
 
 <file path=ppt/notesSlides/notesSlide2.xml><?xml version="1.0" encoding="utf-8"?>
-<p:notes xmlns:a="http://schemas.openxmlformats.org/drawingml/2006/main" xmlns:r="http://schemas.openxmlformats.org/officeDocument/2006/relationships" xmlns:mc="http://schemas.openxmlformats.org/markup-compatibility/2006" xmlns:mv="urn:schemas-microsoft-com:mac:vml" xmlns:p="http://schemas.openxmlformats.org/presentationml/2006/main" xmlns:c="http://schemas.openxmlformats.org/drawingml/2006/chart" xmlns:dgm="http://schemas.openxmlformats.org/drawingml/2006/diagram" xmlns:o="urn:schemas-microsoft-com:office:office" xmlns:v="urn:schemas-microsoft-com:vml" xmlns:pvml="urn:schemas-microsoft-com:office:powerpoint" xmlns:com="http://schemas.openxmlformats.org/drawingml/2006/compatibility" xmlns:p14="http://schemas.microsoft.com/office/powerpoint/2010/main" xmlns:p15="http://schemas.microsoft.com/office/powerpoint/2012/main" xmlns:ahyp="http://schemas.microsoft.com/office/drawing/2018/hyperlinkcolor" showMasterPhAnim="0" showMasterSp="0">
+<p:notes xmlns:a="http://schemas.openxmlformats.org/drawingml/2006/main" xmlns:r="http://schemas.openxmlformats.org/officeDocument/2006/relationships" xmlns:p="http://schemas.openxmlformats.org/presentationml/2006/main" showMasterSp="0" showMasterPhAnim="0">
   <p:cSld>
     <p:spTree>
       <p:nvGrpSpPr>
-        <p:cNvPr id="61" name="Shape 61"/>
+        <p:cNvPr id="1" name="Shape 61"/>
         <p:cNvGrpSpPr/>
         <p:nvPr/>
       </p:nvGrpSpPr>
@@ -820,9 +840,11 @@
       <p:sp>
         <p:nvSpPr>
           <p:cNvPr id="62" name="Google Shape;62;g351f8963aa7_0_344:notes"/>
-          <p:cNvSpPr/>
+          <p:cNvSpPr>
+            <a:spLocks noGrp="1" noRot="1" noChangeAspect="1"/>
+          </p:cNvSpPr>
           <p:nvPr>
-            <p:ph idx="2" type="sldImg"/>
+            <p:ph type="sldImg" idx="2"/>
           </p:nvPr>
         </p:nvSpPr>
         <p:spPr>
@@ -831,9 +853,13 @@
             <a:ext cx="6096000" cy="3429000"/>
           </a:xfrm>
           <a:custGeom>
-            <a:rect b="b" l="l" r="r" t="t"/>
+            <a:avLst/>
+            <a:gdLst/>
+            <a:ahLst/>
+            <a:cxnLst/>
+            <a:rect l="l" t="t" r="r" b="b"/>
             <a:pathLst>
-              <a:path extrusionOk="0" h="120000" w="120000">
+              <a:path w="120000" h="120000" extrusionOk="0">
                 <a:moveTo>
                   <a:pt x="0" y="0"/>
                 </a:moveTo>
@@ -855,9 +881,11 @@
       <p:sp>
         <p:nvSpPr>
           <p:cNvPr id="63" name="Google Shape;63;g351f8963aa7_0_344:notes"/>
-          <p:cNvSpPr txBox="1"/>
+          <p:cNvSpPr txBox="1">
+            <a:spLocks noGrp="1"/>
+          </p:cNvSpPr>
           <p:nvPr>
-            <p:ph idx="1" type="body"/>
+            <p:ph type="body" idx="1"/>
           </p:nvPr>
         </p:nvSpPr>
         <p:spPr>
@@ -870,12 +898,12 @@
           </a:prstGeom>
         </p:spPr>
         <p:txBody>
-          <a:bodyPr anchorCtr="0" anchor="t" bIns="91425" lIns="91425" spcFirstLastPara="1" rIns="91425" wrap="square" tIns="91425">
+          <a:bodyPr spcFirstLastPara="1" wrap="square" lIns="91425" tIns="91425" rIns="91425" bIns="91425" anchor="t" anchorCtr="0">
             <a:noAutofit/>
           </a:bodyPr>
           <a:lstStyle/>
           <a:p>
-            <a:pPr indent="0" lvl="0" marL="0" rtl="0" algn="l">
+            <a:pPr marL="0" lvl="0" indent="0" algn="l" rtl="0">
               <a:spcBef>
                 <a:spcPts val="0"/>
               </a:spcBef>
@@ -884,9 +912,6 @@
               </a:spcAft>
               <a:buNone/>
             </a:pPr>
-            <a:r>
-              <a:t/>
-            </a:r>
             <a:endParaRPr/>
           </a:p>
         </p:txBody>
@@ -900,11 +925,11 @@
 </file>
 
 <file path=ppt/notesSlides/notesSlide3.xml><?xml version="1.0" encoding="utf-8"?>
-<p:notes xmlns:a="http://schemas.openxmlformats.org/drawingml/2006/main" xmlns:r="http://schemas.openxmlformats.org/officeDocument/2006/relationships" xmlns:mc="http://schemas.openxmlformats.org/markup-compatibility/2006" xmlns:mv="urn:schemas-microsoft-com:mac:vml" xmlns:p="http://schemas.openxmlformats.org/presentationml/2006/main" xmlns:c="http://schemas.openxmlformats.org/drawingml/2006/chart" xmlns:dgm="http://schemas.openxmlformats.org/drawingml/2006/diagram" xmlns:o="urn:schemas-microsoft-com:office:office" xmlns:v="urn:schemas-microsoft-com:vml" xmlns:pvml="urn:schemas-microsoft-com:office:powerpoint" xmlns:com="http://schemas.openxmlformats.org/drawingml/2006/compatibility" xmlns:p14="http://schemas.microsoft.com/office/powerpoint/2010/main" xmlns:p15="http://schemas.microsoft.com/office/powerpoint/2012/main" xmlns:ahyp="http://schemas.microsoft.com/office/drawing/2018/hyperlinkcolor" showMasterPhAnim="0" showMasterSp="0">
+<p:notes xmlns:a="http://schemas.openxmlformats.org/drawingml/2006/main" xmlns:r="http://schemas.openxmlformats.org/officeDocument/2006/relationships" xmlns:p="http://schemas.openxmlformats.org/presentationml/2006/main" showMasterSp="0" showMasterPhAnim="0">
   <p:cSld>
     <p:spTree>
       <p:nvGrpSpPr>
-        <p:cNvPr id="68" name="Shape 68"/>
+        <p:cNvPr id="1" name="Shape 68"/>
         <p:cNvGrpSpPr/>
         <p:nvPr/>
       </p:nvGrpSpPr>
@@ -919,9 +944,11 @@
       <p:sp>
         <p:nvSpPr>
           <p:cNvPr id="69" name="Google Shape;69;g351f8963aa7_0_349:notes"/>
-          <p:cNvSpPr/>
+          <p:cNvSpPr>
+            <a:spLocks noGrp="1" noRot="1" noChangeAspect="1"/>
+          </p:cNvSpPr>
           <p:nvPr>
-            <p:ph idx="2" type="sldImg"/>
+            <p:ph type="sldImg" idx="2"/>
           </p:nvPr>
         </p:nvSpPr>
         <p:spPr>
@@ -930,9 +957,13 @@
             <a:ext cx="6096000" cy="3429000"/>
           </a:xfrm>
           <a:custGeom>
-            <a:rect b="b" l="l" r="r" t="t"/>
+            <a:avLst/>
+            <a:gdLst/>
+            <a:ahLst/>
+            <a:cxnLst/>
+            <a:rect l="l" t="t" r="r" b="b"/>
             <a:pathLst>
-              <a:path extrusionOk="0" h="120000" w="120000">
+              <a:path w="120000" h="120000" extrusionOk="0">
                 <a:moveTo>
                   <a:pt x="0" y="0"/>
                 </a:moveTo>
@@ -954,9 +985,11 @@
       <p:sp>
         <p:nvSpPr>
           <p:cNvPr id="70" name="Google Shape;70;g351f8963aa7_0_349:notes"/>
-          <p:cNvSpPr txBox="1"/>
+          <p:cNvSpPr txBox="1">
+            <a:spLocks noGrp="1"/>
+          </p:cNvSpPr>
           <p:nvPr>
-            <p:ph idx="1" type="body"/>
+            <p:ph type="body" idx="1"/>
           </p:nvPr>
         </p:nvSpPr>
         <p:spPr>
@@ -969,12 +1002,12 @@
           </a:prstGeom>
         </p:spPr>
         <p:txBody>
-          <a:bodyPr anchorCtr="0" anchor="t" bIns="91425" lIns="91425" spcFirstLastPara="1" rIns="91425" wrap="square" tIns="91425">
+          <a:bodyPr spcFirstLastPara="1" wrap="square" lIns="91425" tIns="91425" rIns="91425" bIns="91425" anchor="t" anchorCtr="0">
             <a:noAutofit/>
           </a:bodyPr>
           <a:lstStyle/>
           <a:p>
-            <a:pPr indent="0" lvl="0" marL="0" rtl="0" algn="l">
+            <a:pPr marL="0" lvl="0" indent="0" algn="l" rtl="0">
               <a:spcBef>
                 <a:spcPts val="0"/>
               </a:spcBef>
@@ -983,9 +1016,6 @@
               </a:spcAft>
               <a:buNone/>
             </a:pPr>
-            <a:r>
-              <a:t/>
-            </a:r>
             <a:endParaRPr/>
           </a:p>
         </p:txBody>
@@ -999,11 +1029,11 @@
 </file>
 
 <file path=ppt/notesSlides/notesSlide4.xml><?xml version="1.0" encoding="utf-8"?>
-<p:notes xmlns:a="http://schemas.openxmlformats.org/drawingml/2006/main" xmlns:r="http://schemas.openxmlformats.org/officeDocument/2006/relationships" xmlns:mc="http://schemas.openxmlformats.org/markup-compatibility/2006" xmlns:mv="urn:schemas-microsoft-com:mac:vml" xmlns:p="http://schemas.openxmlformats.org/presentationml/2006/main" xmlns:c="http://schemas.openxmlformats.org/drawingml/2006/chart" xmlns:dgm="http://schemas.openxmlformats.org/drawingml/2006/diagram" xmlns:o="urn:schemas-microsoft-com:office:office" xmlns:v="urn:schemas-microsoft-com:vml" xmlns:pvml="urn:schemas-microsoft-com:office:powerpoint" xmlns:com="http://schemas.openxmlformats.org/drawingml/2006/compatibility" xmlns:p14="http://schemas.microsoft.com/office/powerpoint/2010/main" xmlns:p15="http://schemas.microsoft.com/office/powerpoint/2012/main" xmlns:ahyp="http://schemas.microsoft.com/office/drawing/2018/hyperlinkcolor" showMasterPhAnim="0" showMasterSp="0">
+<p:notes xmlns:a="http://schemas.openxmlformats.org/drawingml/2006/main" xmlns:r="http://schemas.openxmlformats.org/officeDocument/2006/relationships" xmlns:p="http://schemas.openxmlformats.org/presentationml/2006/main" showMasterSp="0" showMasterPhAnim="0">
   <p:cSld>
     <p:spTree>
       <p:nvGrpSpPr>
-        <p:cNvPr id="74" name="Shape 74"/>
+        <p:cNvPr id="1" name="Shape 74"/>
         <p:cNvGrpSpPr/>
         <p:nvPr/>
       </p:nvGrpSpPr>
@@ -1018,20 +1048,26 @@
       <p:sp>
         <p:nvSpPr>
           <p:cNvPr id="75" name="Google Shape;75;g351f8963aa7_0_380:notes"/>
-          <p:cNvSpPr/>
+          <p:cNvSpPr>
+            <a:spLocks noGrp="1" noRot="1" noChangeAspect="1"/>
+          </p:cNvSpPr>
           <p:nvPr>
-            <p:ph idx="2" type="sldImg"/>
+            <p:ph type="sldImg" idx="2"/>
           </p:nvPr>
         </p:nvSpPr>
         <p:spPr>
           <a:xfrm>
-            <a:off x="381300" y="685800"/>
+            <a:off x="381000" y="685800"/>
             <a:ext cx="6096000" cy="3429000"/>
           </a:xfrm>
           <a:custGeom>
-            <a:rect b="b" l="l" r="r" t="t"/>
+            <a:avLst/>
+            <a:gdLst/>
+            <a:ahLst/>
+            <a:cxnLst/>
+            <a:rect l="l" t="t" r="r" b="b"/>
             <a:pathLst>
-              <a:path extrusionOk="0" h="120000" w="120000">
+              <a:path w="120000" h="120000" extrusionOk="0">
                 <a:moveTo>
                   <a:pt x="0" y="0"/>
                 </a:moveTo>
@@ -1053,9 +1089,11 @@
       <p:sp>
         <p:nvSpPr>
           <p:cNvPr id="76" name="Google Shape;76;g351f8963aa7_0_380:notes"/>
-          <p:cNvSpPr txBox="1"/>
+          <p:cNvSpPr txBox="1">
+            <a:spLocks noGrp="1"/>
+          </p:cNvSpPr>
           <p:nvPr>
-            <p:ph idx="1" type="body"/>
+            <p:ph type="body" idx="1"/>
           </p:nvPr>
         </p:nvSpPr>
         <p:spPr>
@@ -1068,12 +1106,12 @@
           </a:prstGeom>
         </p:spPr>
         <p:txBody>
-          <a:bodyPr anchorCtr="0" anchor="t" bIns="91425" lIns="91425" spcFirstLastPara="1" rIns="91425" wrap="square" tIns="91425">
+          <a:bodyPr spcFirstLastPara="1" wrap="square" lIns="91425" tIns="91425" rIns="91425" bIns="91425" anchor="t" anchorCtr="0">
             <a:noAutofit/>
           </a:bodyPr>
           <a:lstStyle/>
           <a:p>
-            <a:pPr indent="0" lvl="0" marL="0" rtl="0" algn="l">
+            <a:pPr marL="0" lvl="0" indent="0" algn="l" rtl="0">
               <a:spcBef>
                 <a:spcPts val="0"/>
               </a:spcBef>
@@ -1082,9 +1120,6 @@
               </a:spcAft>
               <a:buNone/>
             </a:pPr>
-            <a:r>
-              <a:t/>
-            </a:r>
             <a:endParaRPr/>
           </a:p>
         </p:txBody>
@@ -1098,11 +1133,11 @@
 </file>
 
 <file path=ppt/notesSlides/notesSlide5.xml><?xml version="1.0" encoding="utf-8"?>
-<p:notes xmlns:a="http://schemas.openxmlformats.org/drawingml/2006/main" xmlns:r="http://schemas.openxmlformats.org/officeDocument/2006/relationships" xmlns:mc="http://schemas.openxmlformats.org/markup-compatibility/2006" xmlns:mv="urn:schemas-microsoft-com:mac:vml" xmlns:p="http://schemas.openxmlformats.org/presentationml/2006/main" xmlns:c="http://schemas.openxmlformats.org/drawingml/2006/chart" xmlns:dgm="http://schemas.openxmlformats.org/drawingml/2006/diagram" xmlns:o="urn:schemas-microsoft-com:office:office" xmlns:v="urn:schemas-microsoft-com:vml" xmlns:pvml="urn:schemas-microsoft-com:office:powerpoint" xmlns:com="http://schemas.openxmlformats.org/drawingml/2006/compatibility" xmlns:p14="http://schemas.microsoft.com/office/powerpoint/2010/main" xmlns:p15="http://schemas.microsoft.com/office/powerpoint/2012/main" xmlns:ahyp="http://schemas.microsoft.com/office/drawing/2018/hyperlinkcolor" showMasterPhAnim="0" showMasterSp="0">
+<p:notes xmlns:a="http://schemas.openxmlformats.org/drawingml/2006/main" xmlns:r="http://schemas.openxmlformats.org/officeDocument/2006/relationships" xmlns:p="http://schemas.openxmlformats.org/presentationml/2006/main" showMasterSp="0" showMasterPhAnim="0">
   <p:cSld>
     <p:spTree>
       <p:nvGrpSpPr>
-        <p:cNvPr id="80" name="Shape 80"/>
+        <p:cNvPr id="1" name="Shape 80"/>
         <p:cNvGrpSpPr/>
         <p:nvPr/>
       </p:nvGrpSpPr>
@@ -1117,9 +1152,11 @@
       <p:sp>
         <p:nvSpPr>
           <p:cNvPr id="81" name="Google Shape;81;g351f8963aa7_0_354:notes"/>
-          <p:cNvSpPr/>
+          <p:cNvSpPr>
+            <a:spLocks noGrp="1" noRot="1" noChangeAspect="1"/>
+          </p:cNvSpPr>
           <p:nvPr>
-            <p:ph idx="2" type="sldImg"/>
+            <p:ph type="sldImg" idx="2"/>
           </p:nvPr>
         </p:nvSpPr>
         <p:spPr>
@@ -1128,9 +1165,13 @@
             <a:ext cx="6096000" cy="3429000"/>
           </a:xfrm>
           <a:custGeom>
-            <a:rect b="b" l="l" r="r" t="t"/>
+            <a:avLst/>
+            <a:gdLst/>
+            <a:ahLst/>
+            <a:cxnLst/>
+            <a:rect l="l" t="t" r="r" b="b"/>
             <a:pathLst>
-              <a:path extrusionOk="0" h="120000" w="120000">
+              <a:path w="120000" h="120000" extrusionOk="0">
                 <a:moveTo>
                   <a:pt x="0" y="0"/>
                 </a:moveTo>
@@ -1152,9 +1193,11 @@
       <p:sp>
         <p:nvSpPr>
           <p:cNvPr id="82" name="Google Shape;82;g351f8963aa7_0_354:notes"/>
-          <p:cNvSpPr txBox="1"/>
+          <p:cNvSpPr txBox="1">
+            <a:spLocks noGrp="1"/>
+          </p:cNvSpPr>
           <p:nvPr>
-            <p:ph idx="1" type="body"/>
+            <p:ph type="body" idx="1"/>
           </p:nvPr>
         </p:nvSpPr>
         <p:spPr>
@@ -1167,12 +1210,12 @@
           </a:prstGeom>
         </p:spPr>
         <p:txBody>
-          <a:bodyPr anchorCtr="0" anchor="t" bIns="91425" lIns="91425" spcFirstLastPara="1" rIns="91425" wrap="square" tIns="91425">
+          <a:bodyPr spcFirstLastPara="1" wrap="square" lIns="91425" tIns="91425" rIns="91425" bIns="91425" anchor="t" anchorCtr="0">
             <a:noAutofit/>
           </a:bodyPr>
           <a:lstStyle/>
           <a:p>
-            <a:pPr indent="0" lvl="0" marL="0" rtl="0" algn="l">
+            <a:pPr marL="0" lvl="0" indent="0" algn="l" rtl="0">
               <a:spcBef>
                 <a:spcPts val="0"/>
               </a:spcBef>
@@ -1181,9 +1224,6 @@
               </a:spcAft>
               <a:buNone/>
             </a:pPr>
-            <a:r>
-              <a:t/>
-            </a:r>
             <a:endParaRPr/>
           </a:p>
         </p:txBody>
@@ -1197,11 +1237,11 @@
 </file>
 
 <file path=ppt/notesSlides/notesSlide6.xml><?xml version="1.0" encoding="utf-8"?>
-<p:notes xmlns:a="http://schemas.openxmlformats.org/drawingml/2006/main" xmlns:r="http://schemas.openxmlformats.org/officeDocument/2006/relationships" xmlns:mc="http://schemas.openxmlformats.org/markup-compatibility/2006" xmlns:mv="urn:schemas-microsoft-com:mac:vml" xmlns:p="http://schemas.openxmlformats.org/presentationml/2006/main" xmlns:c="http://schemas.openxmlformats.org/drawingml/2006/chart" xmlns:dgm="http://schemas.openxmlformats.org/drawingml/2006/diagram" xmlns:o="urn:schemas-microsoft-com:office:office" xmlns:v="urn:schemas-microsoft-com:vml" xmlns:pvml="urn:schemas-microsoft-com:office:powerpoint" xmlns:com="http://schemas.openxmlformats.org/drawingml/2006/compatibility" xmlns:p14="http://schemas.microsoft.com/office/powerpoint/2010/main" xmlns:p15="http://schemas.microsoft.com/office/powerpoint/2012/main" xmlns:ahyp="http://schemas.microsoft.com/office/drawing/2018/hyperlinkcolor" showMasterPhAnim="0" showMasterSp="0">
+<p:notes xmlns:a="http://schemas.openxmlformats.org/drawingml/2006/main" xmlns:r="http://schemas.openxmlformats.org/officeDocument/2006/relationships" xmlns:p="http://schemas.openxmlformats.org/presentationml/2006/main" showMasterSp="0" showMasterPhAnim="0">
   <p:cSld>
     <p:spTree>
       <p:nvGrpSpPr>
-        <p:cNvPr id="86" name="Shape 86"/>
+        <p:cNvPr id="1" name="Shape 86"/>
         <p:cNvGrpSpPr/>
         <p:nvPr/>
       </p:nvGrpSpPr>
@@ -1216,9 +1256,11 @@
       <p:sp>
         <p:nvSpPr>
           <p:cNvPr id="87" name="Google Shape;87;g351f8963aa7_0_359:notes"/>
-          <p:cNvSpPr/>
+          <p:cNvSpPr>
+            <a:spLocks noGrp="1" noRot="1" noChangeAspect="1"/>
+          </p:cNvSpPr>
           <p:nvPr>
-            <p:ph idx="2" type="sldImg"/>
+            <p:ph type="sldImg" idx="2"/>
           </p:nvPr>
         </p:nvSpPr>
         <p:spPr>
@@ -1227,9 +1269,13 @@
             <a:ext cx="6096000" cy="3429000"/>
           </a:xfrm>
           <a:custGeom>
-            <a:rect b="b" l="l" r="r" t="t"/>
+            <a:avLst/>
+            <a:gdLst/>
+            <a:ahLst/>
+            <a:cxnLst/>
+            <a:rect l="l" t="t" r="r" b="b"/>
             <a:pathLst>
-              <a:path extrusionOk="0" h="120000" w="120000">
+              <a:path w="120000" h="120000" extrusionOk="0">
                 <a:moveTo>
                   <a:pt x="0" y="0"/>
                 </a:moveTo>
@@ -1251,9 +1297,11 @@
       <p:sp>
         <p:nvSpPr>
           <p:cNvPr id="88" name="Google Shape;88;g351f8963aa7_0_359:notes"/>
-          <p:cNvSpPr txBox="1"/>
+          <p:cNvSpPr txBox="1">
+            <a:spLocks noGrp="1"/>
+          </p:cNvSpPr>
           <p:nvPr>
-            <p:ph idx="1" type="body"/>
+            <p:ph type="body" idx="1"/>
           </p:nvPr>
         </p:nvSpPr>
         <p:spPr>
@@ -1266,12 +1314,12 @@
           </a:prstGeom>
         </p:spPr>
         <p:txBody>
-          <a:bodyPr anchorCtr="0" anchor="t" bIns="91425" lIns="91425" spcFirstLastPara="1" rIns="91425" wrap="square" tIns="91425">
+          <a:bodyPr spcFirstLastPara="1" wrap="square" lIns="91425" tIns="91425" rIns="91425" bIns="91425" anchor="t" anchorCtr="0">
             <a:noAutofit/>
           </a:bodyPr>
           <a:lstStyle/>
           <a:p>
-            <a:pPr indent="0" lvl="0" marL="0" rtl="0" algn="l">
+            <a:pPr marL="0" lvl="0" indent="0" algn="l" rtl="0">
               <a:spcBef>
                 <a:spcPts val="0"/>
               </a:spcBef>
@@ -1280,9 +1328,6 @@
               </a:spcAft>
               <a:buNone/>
             </a:pPr>
-            <a:r>
-              <a:t/>
-            </a:r>
             <a:endParaRPr/>
           </a:p>
         </p:txBody>
@@ -1296,11 +1341,11 @@
 </file>
 
 <file path=ppt/notesSlides/notesSlide7.xml><?xml version="1.0" encoding="utf-8"?>
-<p:notes xmlns:a="http://schemas.openxmlformats.org/drawingml/2006/main" xmlns:r="http://schemas.openxmlformats.org/officeDocument/2006/relationships" xmlns:mc="http://schemas.openxmlformats.org/markup-compatibility/2006" xmlns:mv="urn:schemas-microsoft-com:mac:vml" xmlns:p="http://schemas.openxmlformats.org/presentationml/2006/main" xmlns:c="http://schemas.openxmlformats.org/drawingml/2006/chart" xmlns:dgm="http://schemas.openxmlformats.org/drawingml/2006/diagram" xmlns:o="urn:schemas-microsoft-com:office:office" xmlns:v="urn:schemas-microsoft-com:vml" xmlns:pvml="urn:schemas-microsoft-com:office:powerpoint" xmlns:com="http://schemas.openxmlformats.org/drawingml/2006/compatibility" xmlns:p14="http://schemas.microsoft.com/office/powerpoint/2010/main" xmlns:p15="http://schemas.microsoft.com/office/powerpoint/2012/main" xmlns:ahyp="http://schemas.microsoft.com/office/drawing/2018/hyperlinkcolor" showMasterPhAnim="0" showMasterSp="0">
+<p:notes xmlns:a="http://schemas.openxmlformats.org/drawingml/2006/main" xmlns:r="http://schemas.openxmlformats.org/officeDocument/2006/relationships" xmlns:p="http://schemas.openxmlformats.org/presentationml/2006/main" showMasterSp="0" showMasterPhAnim="0">
   <p:cSld>
     <p:spTree>
       <p:nvGrpSpPr>
-        <p:cNvPr id="92" name="Shape 92"/>
+        <p:cNvPr id="1" name="Shape 92"/>
         <p:cNvGrpSpPr/>
         <p:nvPr/>
       </p:nvGrpSpPr>
@@ -1315,9 +1360,11 @@
       <p:sp>
         <p:nvSpPr>
           <p:cNvPr id="93" name="Google Shape;93;g351f8963aa7_0_385:notes"/>
-          <p:cNvSpPr/>
+          <p:cNvSpPr>
+            <a:spLocks noGrp="1" noRot="1" noChangeAspect="1"/>
+          </p:cNvSpPr>
           <p:nvPr>
-            <p:ph idx="2" type="sldImg"/>
+            <p:ph type="sldImg" idx="2"/>
           </p:nvPr>
         </p:nvSpPr>
         <p:spPr>
@@ -1326,9 +1373,13 @@
             <a:ext cx="6096000" cy="3429000"/>
           </a:xfrm>
           <a:custGeom>
-            <a:rect b="b" l="l" r="r" t="t"/>
+            <a:avLst/>
+            <a:gdLst/>
+            <a:ahLst/>
+            <a:cxnLst/>
+            <a:rect l="l" t="t" r="r" b="b"/>
             <a:pathLst>
-              <a:path extrusionOk="0" h="120000" w="120000">
+              <a:path w="120000" h="120000" extrusionOk="0">
                 <a:moveTo>
                   <a:pt x="0" y="0"/>
                 </a:moveTo>
@@ -1350,9 +1401,11 @@
       <p:sp>
         <p:nvSpPr>
           <p:cNvPr id="94" name="Google Shape;94;g351f8963aa7_0_385:notes"/>
-          <p:cNvSpPr txBox="1"/>
+          <p:cNvSpPr txBox="1">
+            <a:spLocks noGrp="1"/>
+          </p:cNvSpPr>
           <p:nvPr>
-            <p:ph idx="1" type="body"/>
+            <p:ph type="body" idx="1"/>
           </p:nvPr>
         </p:nvSpPr>
         <p:spPr>
@@ -1365,12 +1418,12 @@
           </a:prstGeom>
         </p:spPr>
         <p:txBody>
-          <a:bodyPr anchorCtr="0" anchor="t" bIns="91425" lIns="91425" spcFirstLastPara="1" rIns="91425" wrap="square" tIns="91425">
+          <a:bodyPr spcFirstLastPara="1" wrap="square" lIns="91425" tIns="91425" rIns="91425" bIns="91425" anchor="t" anchorCtr="0">
             <a:noAutofit/>
           </a:bodyPr>
           <a:lstStyle/>
           <a:p>
-            <a:pPr indent="0" lvl="0" marL="0" rtl="0" algn="l">
+            <a:pPr marL="0" lvl="0" indent="0" algn="l" rtl="0">
               <a:spcBef>
                 <a:spcPts val="0"/>
               </a:spcBef>
@@ -1379,9 +1432,6 @@
               </a:spcAft>
               <a:buNone/>
             </a:pPr>
-            <a:r>
-              <a:t/>
-            </a:r>
             <a:endParaRPr/>
           </a:p>
         </p:txBody>
@@ -1395,11 +1445,11 @@
 </file>
 
 <file path=ppt/notesSlides/notesSlide8.xml><?xml version="1.0" encoding="utf-8"?>
-<p:notes xmlns:a="http://schemas.openxmlformats.org/drawingml/2006/main" xmlns:r="http://schemas.openxmlformats.org/officeDocument/2006/relationships" xmlns:mc="http://schemas.openxmlformats.org/markup-compatibility/2006" xmlns:mv="urn:schemas-microsoft-com:mac:vml" xmlns:p="http://schemas.openxmlformats.org/presentationml/2006/main" xmlns:c="http://schemas.openxmlformats.org/drawingml/2006/chart" xmlns:dgm="http://schemas.openxmlformats.org/drawingml/2006/diagram" xmlns:o="urn:schemas-microsoft-com:office:office" xmlns:v="urn:schemas-microsoft-com:vml" xmlns:pvml="urn:schemas-microsoft-com:office:powerpoint" xmlns:com="http://schemas.openxmlformats.org/drawingml/2006/compatibility" xmlns:p14="http://schemas.microsoft.com/office/powerpoint/2010/main" xmlns:p15="http://schemas.microsoft.com/office/powerpoint/2012/main" xmlns:ahyp="http://schemas.microsoft.com/office/drawing/2018/hyperlinkcolor" showMasterPhAnim="0" showMasterSp="0">
+<p:notes xmlns:a="http://schemas.openxmlformats.org/drawingml/2006/main" xmlns:r="http://schemas.openxmlformats.org/officeDocument/2006/relationships" xmlns:p="http://schemas.openxmlformats.org/presentationml/2006/main" showMasterSp="0" showMasterPhAnim="0">
   <p:cSld>
     <p:spTree>
       <p:nvGrpSpPr>
-        <p:cNvPr id="98" name="Shape 98"/>
+        <p:cNvPr id="1" name="Shape 98"/>
         <p:cNvGrpSpPr/>
         <p:nvPr/>
       </p:nvGrpSpPr>
@@ -1414,9 +1464,11 @@
       <p:sp>
         <p:nvSpPr>
           <p:cNvPr id="99" name="Google Shape;99;g351f8963aa7_0_364:notes"/>
-          <p:cNvSpPr/>
+          <p:cNvSpPr>
+            <a:spLocks noGrp="1" noRot="1" noChangeAspect="1"/>
+          </p:cNvSpPr>
           <p:nvPr>
-            <p:ph idx="2" type="sldImg"/>
+            <p:ph type="sldImg" idx="2"/>
           </p:nvPr>
         </p:nvSpPr>
         <p:spPr>
@@ -1425,9 +1477,13 @@
             <a:ext cx="6096000" cy="3429000"/>
           </a:xfrm>
           <a:custGeom>
-            <a:rect b="b" l="l" r="r" t="t"/>
+            <a:avLst/>
+            <a:gdLst/>
+            <a:ahLst/>
+            <a:cxnLst/>
+            <a:rect l="l" t="t" r="r" b="b"/>
             <a:pathLst>
-              <a:path extrusionOk="0" h="120000" w="120000">
+              <a:path w="120000" h="120000" extrusionOk="0">
                 <a:moveTo>
                   <a:pt x="0" y="0"/>
                 </a:moveTo>
@@ -1449,9 +1505,11 @@
       <p:sp>
         <p:nvSpPr>
           <p:cNvPr id="100" name="Google Shape;100;g351f8963aa7_0_364:notes"/>
-          <p:cNvSpPr txBox="1"/>
+          <p:cNvSpPr txBox="1">
+            <a:spLocks noGrp="1"/>
+          </p:cNvSpPr>
           <p:nvPr>
-            <p:ph idx="1" type="body"/>
+            <p:ph type="body" idx="1"/>
           </p:nvPr>
         </p:nvSpPr>
         <p:spPr>
@@ -1464,12 +1522,12 @@
           </a:prstGeom>
         </p:spPr>
         <p:txBody>
-          <a:bodyPr anchorCtr="0" anchor="t" bIns="91425" lIns="91425" spcFirstLastPara="1" rIns="91425" wrap="square" tIns="91425">
+          <a:bodyPr spcFirstLastPara="1" wrap="square" lIns="91425" tIns="91425" rIns="91425" bIns="91425" anchor="t" anchorCtr="0">
             <a:noAutofit/>
           </a:bodyPr>
           <a:lstStyle/>
           <a:p>
-            <a:pPr indent="0" lvl="0" marL="0" rtl="0" algn="l">
+            <a:pPr marL="0" lvl="0" indent="0" algn="l" rtl="0">
               <a:spcBef>
                 <a:spcPts val="0"/>
               </a:spcBef>
@@ -1478,9 +1536,6 @@
               </a:spcAft>
               <a:buNone/>
             </a:pPr>
-            <a:r>
-              <a:t/>
-            </a:r>
             <a:endParaRPr/>
           </a:p>
         </p:txBody>
@@ -1494,18 +1549,19 @@
 </file>
 
 <file path=ppt/slideLayouts/slideLayout1.xml><?xml version="1.0" encoding="utf-8"?>
-<p:sldLayout xmlns:a="http://schemas.openxmlformats.org/drawingml/2006/main" xmlns:r="http://schemas.openxmlformats.org/officeDocument/2006/relationships" xmlns:mc="http://schemas.openxmlformats.org/markup-compatibility/2006" xmlns:mv="urn:schemas-microsoft-com:mac:vml" xmlns:p="http://schemas.openxmlformats.org/presentationml/2006/main" xmlns:c="http://schemas.openxmlformats.org/drawingml/2006/chart" xmlns:dgm="http://schemas.openxmlformats.org/drawingml/2006/diagram" xmlns:o="urn:schemas-microsoft-com:office:office" xmlns:v="urn:schemas-microsoft-com:vml" xmlns:pvml="urn:schemas-microsoft-com:office:powerpoint" xmlns:com="http://schemas.openxmlformats.org/drawingml/2006/compatibility" xmlns:p14="http://schemas.microsoft.com/office/powerpoint/2010/main" xmlns:p15="http://schemas.microsoft.com/office/powerpoint/2012/main" xmlns:ahyp="http://schemas.microsoft.com/office/drawing/2018/hyperlinkcolor" matchingName="Title slide" type="title">
+<p:sldLayout xmlns:a="http://schemas.openxmlformats.org/drawingml/2006/main" xmlns:r="http://schemas.openxmlformats.org/officeDocument/2006/relationships" xmlns:p="http://schemas.openxmlformats.org/presentationml/2006/main" matchingName="Title slide" type="title">
   <p:cSld name="TITLE">
     <p:bg>
       <p:bgPr>
         <a:solidFill>
           <a:schemeClr val="dk1"/>
         </a:solidFill>
+        <a:effectLst/>
       </p:bgPr>
     </p:bg>
     <p:spTree>
       <p:nvGrpSpPr>
-        <p:cNvPr id="9" name="Shape 9"/>
+        <p:cNvPr id="1" name="Shape 9"/>
         <p:cNvGrpSpPr/>
         <p:nvPr/>
       </p:nvGrpSpPr>
@@ -1539,12 +1595,12 @@
           </a:ln>
         </p:spPr>
         <p:txBody>
-          <a:bodyPr anchorCtr="0" anchor="ctr" bIns="91425" lIns="91425" spcFirstLastPara="1" rIns="91425" wrap="square" tIns="91425">
+          <a:bodyPr spcFirstLastPara="1" wrap="square" lIns="91425" tIns="91425" rIns="91425" bIns="91425" anchor="ctr" anchorCtr="0">
             <a:noAutofit/>
           </a:bodyPr>
           <a:lstStyle/>
           <a:p>
-            <a:pPr indent="0" lvl="0" marL="0" rtl="0" algn="l">
+            <a:pPr marL="0" lvl="0" indent="0" algn="l" rtl="0">
               <a:spcBef>
                 <a:spcPts val="0"/>
               </a:spcBef>
@@ -1553,9 +1609,6 @@
               </a:spcAft>
               <a:buNone/>
             </a:pPr>
-            <a:r>
-              <a:t/>
-            </a:r>
             <a:endParaRPr/>
           </a:p>
         </p:txBody>
@@ -1575,21 +1628,23 @@
             <a:avLst/>
           </a:prstGeom>
           <a:noFill/>
-          <a:ln cap="flat" cmpd="sng" w="28575">
+          <a:ln w="28575" cap="flat" cmpd="sng">
             <a:solidFill>
               <a:schemeClr val="accent1"/>
             </a:solidFill>
             <a:prstDash val="solid"/>
             <a:round/>
-            <a:headEnd len="sm" w="sm" type="none"/>
-            <a:tailEnd len="sm" w="sm" type="none"/>
+            <a:headEnd type="none" w="sm" len="sm"/>
+            <a:tailEnd type="none" w="sm" len="sm"/>
           </a:ln>
         </p:spPr>
       </p:cxnSp>
       <p:sp>
         <p:nvSpPr>
           <p:cNvPr id="12" name="Google Shape;12;p2"/>
-          <p:cNvSpPr txBox="1"/>
+          <p:cNvSpPr txBox="1">
+            <a:spLocks noGrp="1"/>
+          </p:cNvSpPr>
           <p:nvPr>
             <p:ph type="ctrTitle"/>
           </p:nvPr>
@@ -1604,7 +1659,7 @@
           </a:prstGeom>
         </p:spPr>
         <p:txBody>
-          <a:bodyPr anchorCtr="0" anchor="b" bIns="91425" lIns="91425" spcFirstLastPara="1" rIns="91425" wrap="square" tIns="91425">
+          <a:bodyPr spcFirstLastPara="1" wrap="square" lIns="91425" tIns="91425" rIns="91425" bIns="91425" anchor="b" anchorCtr="0">
             <a:normAutofit/>
           </a:bodyPr>
           <a:lstStyle>
@@ -1771,15 +1826,19 @@
               </a:defRPr>
             </a:lvl9pPr>
           </a:lstStyle>
-          <a:p/>
+          <a:p>
+            <a:endParaRPr/>
+          </a:p>
         </p:txBody>
       </p:sp>
       <p:sp>
         <p:nvSpPr>
           <p:cNvPr id="13" name="Google Shape;13;p2"/>
-          <p:cNvSpPr txBox="1"/>
+          <p:cNvSpPr txBox="1">
+            <a:spLocks noGrp="1"/>
+          </p:cNvSpPr>
           <p:nvPr>
-            <p:ph idx="1" type="subTitle"/>
+            <p:ph type="subTitle" idx="1"/>
           </p:nvPr>
         </p:nvSpPr>
         <p:spPr>
@@ -1792,7 +1851,7 @@
           </a:prstGeom>
         </p:spPr>
         <p:txBody>
-          <a:bodyPr anchorCtr="0" anchor="t" bIns="91425" lIns="91425" spcFirstLastPara="1" rIns="91425" wrap="square" tIns="91425">
+          <a:bodyPr spcFirstLastPara="1" wrap="square" lIns="91425" tIns="91425" rIns="91425" bIns="91425" anchor="t" anchorCtr="0">
             <a:normAutofit/>
           </a:bodyPr>
           <a:lstStyle>
@@ -1986,15 +2045,19 @@
               </a:defRPr>
             </a:lvl9pPr>
           </a:lstStyle>
-          <a:p/>
+          <a:p>
+            <a:endParaRPr/>
+          </a:p>
         </p:txBody>
       </p:sp>
       <p:sp>
         <p:nvSpPr>
           <p:cNvPr id="14" name="Google Shape;14;p2"/>
-          <p:cNvSpPr txBox="1"/>
+          <p:cNvSpPr txBox="1">
+            <a:spLocks noGrp="1"/>
+          </p:cNvSpPr>
           <p:nvPr>
-            <p:ph idx="12" type="sldNum"/>
+            <p:ph type="sldNum" idx="12"/>
           </p:nvPr>
         </p:nvSpPr>
         <p:spPr>
@@ -2007,7 +2070,7 @@
           </a:prstGeom>
         </p:spPr>
         <p:txBody>
-          <a:bodyPr anchorCtr="0" anchor="ctr" bIns="91425" lIns="91425" spcFirstLastPara="1" rIns="91425" wrap="square" tIns="91425">
+          <a:bodyPr spcFirstLastPara="1" wrap="square" lIns="91425" tIns="91425" rIns="91425" bIns="91425" anchor="ctr" anchorCtr="0">
             <a:normAutofit/>
           </a:bodyPr>
           <a:lstStyle>
@@ -2085,7 +2148,7 @@
             </a:lvl9pPr>
           </a:lstStyle>
           <a:p>
-            <a:pPr indent="0" lvl="0" marL="0" rtl="0" algn="r">
+            <a:pPr marL="0" lvl="0" indent="0" algn="r" rtl="0">
               <a:spcBef>
                 <a:spcPts val="0"/>
               </a:spcBef>
@@ -2111,11 +2174,11 @@
 </file>
 
 <file path=ppt/slideLayouts/slideLayout10.xml><?xml version="1.0" encoding="utf-8"?>
-<p:sldLayout xmlns:a="http://schemas.openxmlformats.org/drawingml/2006/main" xmlns:r="http://schemas.openxmlformats.org/officeDocument/2006/relationships" xmlns:mc="http://schemas.openxmlformats.org/markup-compatibility/2006" xmlns:mv="urn:schemas-microsoft-com:mac:vml" xmlns:p="http://schemas.openxmlformats.org/presentationml/2006/main" xmlns:c="http://schemas.openxmlformats.org/drawingml/2006/chart" xmlns:dgm="http://schemas.openxmlformats.org/drawingml/2006/diagram" xmlns:o="urn:schemas-microsoft-com:office:office" xmlns:v="urn:schemas-microsoft-com:vml" xmlns:pvml="urn:schemas-microsoft-com:office:powerpoint" xmlns:com="http://schemas.openxmlformats.org/drawingml/2006/compatibility" xmlns:p14="http://schemas.microsoft.com/office/powerpoint/2010/main" xmlns:p15="http://schemas.microsoft.com/office/powerpoint/2012/main" xmlns:ahyp="http://schemas.microsoft.com/office/drawing/2018/hyperlinkcolor" matchingName="Big number">
+<p:sldLayout xmlns:a="http://schemas.openxmlformats.org/drawingml/2006/main" xmlns:r="http://schemas.openxmlformats.org/officeDocument/2006/relationships" xmlns:p="http://schemas.openxmlformats.org/presentationml/2006/main" matchingName="Big number">
   <p:cSld name="BIG_NUMBER">
     <p:spTree>
       <p:nvGrpSpPr>
-        <p:cNvPr id="49" name="Shape 49"/>
+        <p:cNvPr id="1" name="Shape 49"/>
         <p:cNvGrpSpPr/>
         <p:nvPr/>
       </p:nvGrpSpPr>
@@ -2130,9 +2193,11 @@
       <p:sp>
         <p:nvSpPr>
           <p:cNvPr id="50" name="Google Shape;50;p11"/>
-          <p:cNvSpPr txBox="1"/>
+          <p:cNvSpPr txBox="1">
+            <a:spLocks noGrp="1"/>
+          </p:cNvSpPr>
           <p:nvPr>
-            <p:ph hasCustomPrompt="1" type="title"/>
+            <p:ph type="title" hasCustomPrompt="1"/>
           </p:nvPr>
         </p:nvSpPr>
         <p:spPr>
@@ -2145,7 +2210,7 @@
           </a:prstGeom>
         </p:spPr>
         <p:txBody>
-          <a:bodyPr anchorCtr="0" anchor="b" bIns="91425" lIns="91425" spcFirstLastPara="1" rIns="91425" wrap="square" tIns="91425">
+          <a:bodyPr spcFirstLastPara="1" wrap="square" lIns="91425" tIns="91425" rIns="91425" bIns="91425" anchor="b" anchorCtr="0">
             <a:normAutofit/>
           </a:bodyPr>
           <a:lstStyle>
@@ -2158,7 +2223,7 @@
               </a:spcAft>
               <a:buSzPts val="14000"/>
               <a:buNone/>
-              <a:defRPr b="1" sz="14000"/>
+              <a:defRPr sz="14000" b="1"/>
             </a:lvl1pPr>
             <a:lvl2pPr lvl="1" algn="ctr">
               <a:spcBef>
@@ -2169,7 +2234,7 @@
               </a:spcAft>
               <a:buSzPts val="14000"/>
               <a:buNone/>
-              <a:defRPr b="1" sz="14000"/>
+              <a:defRPr sz="14000" b="1"/>
             </a:lvl2pPr>
             <a:lvl3pPr lvl="2" algn="ctr">
               <a:spcBef>
@@ -2180,7 +2245,7 @@
               </a:spcAft>
               <a:buSzPts val="14000"/>
               <a:buNone/>
-              <a:defRPr b="1" sz="14000"/>
+              <a:defRPr sz="14000" b="1"/>
             </a:lvl3pPr>
             <a:lvl4pPr lvl="3" algn="ctr">
               <a:spcBef>
@@ -2191,7 +2256,7 @@
               </a:spcAft>
               <a:buSzPts val="14000"/>
               <a:buNone/>
-              <a:defRPr b="1" sz="14000"/>
+              <a:defRPr sz="14000" b="1"/>
             </a:lvl4pPr>
             <a:lvl5pPr lvl="4" algn="ctr">
               <a:spcBef>
@@ -2202,7 +2267,7 @@
               </a:spcAft>
               <a:buSzPts val="14000"/>
               <a:buNone/>
-              <a:defRPr b="1" sz="14000"/>
+              <a:defRPr sz="14000" b="1"/>
             </a:lvl5pPr>
             <a:lvl6pPr lvl="5" algn="ctr">
               <a:spcBef>
@@ -2213,7 +2278,7 @@
               </a:spcAft>
               <a:buSzPts val="14000"/>
               <a:buNone/>
-              <a:defRPr b="1" sz="14000"/>
+              <a:defRPr sz="14000" b="1"/>
             </a:lvl6pPr>
             <a:lvl7pPr lvl="6" algn="ctr">
               <a:spcBef>
@@ -2224,7 +2289,7 @@
               </a:spcAft>
               <a:buSzPts val="14000"/>
               <a:buNone/>
-              <a:defRPr b="1" sz="14000"/>
+              <a:defRPr sz="14000" b="1"/>
             </a:lvl7pPr>
             <a:lvl8pPr lvl="7" algn="ctr">
               <a:spcBef>
@@ -2235,7 +2300,7 @@
               </a:spcAft>
               <a:buSzPts val="14000"/>
               <a:buNone/>
-              <a:defRPr b="1" sz="14000"/>
+              <a:defRPr sz="14000" b="1"/>
             </a:lvl8pPr>
             <a:lvl9pPr lvl="8" algn="ctr">
               <a:spcBef>
@@ -2246,7 +2311,7 @@
               </a:spcAft>
               <a:buSzPts val="14000"/>
               <a:buNone/>
-              <a:defRPr b="1" sz="14000"/>
+              <a:defRPr sz="14000" b="1"/>
             </a:lvl9pPr>
           </a:lstStyle>
           <a:p>
@@ -2259,9 +2324,11 @@
       <p:sp>
         <p:nvSpPr>
           <p:cNvPr id="51" name="Google Shape;51;p11"/>
-          <p:cNvSpPr txBox="1"/>
+          <p:cNvSpPr txBox="1">
+            <a:spLocks noGrp="1"/>
+          </p:cNvSpPr>
           <p:nvPr>
-            <p:ph idx="1" type="body"/>
+            <p:ph type="body" idx="1"/>
           </p:nvPr>
         </p:nvSpPr>
         <p:spPr>
@@ -2274,11 +2341,11 @@
           </a:prstGeom>
         </p:spPr>
         <p:txBody>
-          <a:bodyPr anchorCtr="0" anchor="t" bIns="91425" lIns="91425" spcFirstLastPara="1" rIns="91425" wrap="square" tIns="91425">
+          <a:bodyPr spcFirstLastPara="1" wrap="square" lIns="91425" tIns="91425" rIns="91425" bIns="91425" anchor="t" anchorCtr="0">
             <a:normAutofit/>
           </a:bodyPr>
           <a:lstStyle>
-            <a:lvl1pPr indent="-342900" lvl="0" marL="457200" algn="ctr">
+            <a:lvl1pPr marL="457200" lvl="0" indent="-342900" algn="ctr">
               <a:spcBef>
                 <a:spcPts val="0"/>
               </a:spcBef>
@@ -2289,7 +2356,7 @@
               <a:buChar char="●"/>
               <a:defRPr/>
             </a:lvl1pPr>
-            <a:lvl2pPr indent="-317500" lvl="1" marL="914400" algn="ctr">
+            <a:lvl2pPr marL="914400" lvl="1" indent="-317500" algn="ctr">
               <a:spcBef>
                 <a:spcPts val="0"/>
               </a:spcBef>
@@ -2300,7 +2367,7 @@
               <a:buChar char="○"/>
               <a:defRPr/>
             </a:lvl2pPr>
-            <a:lvl3pPr indent="-317500" lvl="2" marL="1371600" algn="ctr">
+            <a:lvl3pPr marL="1371600" lvl="2" indent="-317500" algn="ctr">
               <a:spcBef>
                 <a:spcPts val="0"/>
               </a:spcBef>
@@ -2311,7 +2378,7 @@
               <a:buChar char="■"/>
               <a:defRPr/>
             </a:lvl3pPr>
-            <a:lvl4pPr indent="-317500" lvl="3" marL="1828800" algn="ctr">
+            <a:lvl4pPr marL="1828800" lvl="3" indent="-317500" algn="ctr">
               <a:spcBef>
                 <a:spcPts val="0"/>
               </a:spcBef>
@@ -2322,7 +2389,7 @@
               <a:buChar char="●"/>
               <a:defRPr/>
             </a:lvl4pPr>
-            <a:lvl5pPr indent="-317500" lvl="4" marL="2286000" algn="ctr">
+            <a:lvl5pPr marL="2286000" lvl="4" indent="-317500" algn="ctr">
               <a:spcBef>
                 <a:spcPts val="0"/>
               </a:spcBef>
@@ -2333,7 +2400,7 @@
               <a:buChar char="○"/>
               <a:defRPr/>
             </a:lvl5pPr>
-            <a:lvl6pPr indent="-317500" lvl="5" marL="2743200" algn="ctr">
+            <a:lvl6pPr marL="2743200" lvl="5" indent="-317500" algn="ctr">
               <a:spcBef>
                 <a:spcPts val="0"/>
               </a:spcBef>
@@ -2344,7 +2411,7 @@
               <a:buChar char="■"/>
               <a:defRPr/>
             </a:lvl6pPr>
-            <a:lvl7pPr indent="-317500" lvl="6" marL="3200400" algn="ctr">
+            <a:lvl7pPr marL="3200400" lvl="6" indent="-317500" algn="ctr">
               <a:spcBef>
                 <a:spcPts val="0"/>
               </a:spcBef>
@@ -2355,7 +2422,7 @@
               <a:buChar char="●"/>
               <a:defRPr/>
             </a:lvl7pPr>
-            <a:lvl8pPr indent="-317500" lvl="7" marL="3657600" algn="ctr">
+            <a:lvl8pPr marL="3657600" lvl="7" indent="-317500" algn="ctr">
               <a:spcBef>
                 <a:spcPts val="0"/>
               </a:spcBef>
@@ -2366,7 +2433,7 @@
               <a:buChar char="○"/>
               <a:defRPr/>
             </a:lvl8pPr>
-            <a:lvl9pPr indent="-317500" lvl="8" marL="4114800" algn="ctr">
+            <a:lvl9pPr marL="4114800" lvl="8" indent="-317500" algn="ctr">
               <a:spcBef>
                 <a:spcPts val="0"/>
               </a:spcBef>
@@ -2378,15 +2445,19 @@
               <a:defRPr/>
             </a:lvl9pPr>
           </a:lstStyle>
-          <a:p/>
+          <a:p>
+            <a:endParaRPr/>
+          </a:p>
         </p:txBody>
       </p:sp>
       <p:sp>
         <p:nvSpPr>
           <p:cNvPr id="52" name="Google Shape;52;p11"/>
-          <p:cNvSpPr txBox="1"/>
+          <p:cNvSpPr txBox="1">
+            <a:spLocks noGrp="1"/>
+          </p:cNvSpPr>
           <p:nvPr>
-            <p:ph idx="12" type="sldNum"/>
+            <p:ph type="sldNum" idx="12"/>
           </p:nvPr>
         </p:nvSpPr>
         <p:spPr>
@@ -2399,7 +2470,7 @@
           </a:prstGeom>
         </p:spPr>
         <p:txBody>
-          <a:bodyPr anchorCtr="0" anchor="ctr" bIns="91425" lIns="91425" spcFirstLastPara="1" rIns="91425" wrap="square" tIns="91425">
+          <a:bodyPr spcFirstLastPara="1" wrap="square" lIns="91425" tIns="91425" rIns="91425" bIns="91425" anchor="ctr" anchorCtr="0">
             <a:normAutofit/>
           </a:bodyPr>
           <a:lstStyle>
@@ -2441,7 +2512,7 @@
             </a:lvl9pPr>
           </a:lstStyle>
           <a:p>
-            <a:pPr indent="0" lvl="0" marL="0" rtl="0" algn="r">
+            <a:pPr marL="0" lvl="0" indent="0" algn="r" rtl="0">
               <a:spcBef>
                 <a:spcPts val="0"/>
               </a:spcBef>
@@ -2467,11 +2538,11 @@
 </file>
 
 <file path=ppt/slideLayouts/slideLayout11.xml><?xml version="1.0" encoding="utf-8"?>
-<p:sldLayout xmlns:a="http://schemas.openxmlformats.org/drawingml/2006/main" xmlns:r="http://schemas.openxmlformats.org/officeDocument/2006/relationships" xmlns:mc="http://schemas.openxmlformats.org/markup-compatibility/2006" xmlns:mv="urn:schemas-microsoft-com:mac:vml" xmlns:p="http://schemas.openxmlformats.org/presentationml/2006/main" xmlns:c="http://schemas.openxmlformats.org/drawingml/2006/chart" xmlns:dgm="http://schemas.openxmlformats.org/drawingml/2006/diagram" xmlns:o="urn:schemas-microsoft-com:office:office" xmlns:v="urn:schemas-microsoft-com:vml" xmlns:pvml="urn:schemas-microsoft-com:office:powerpoint" xmlns:com="http://schemas.openxmlformats.org/drawingml/2006/compatibility" xmlns:p14="http://schemas.microsoft.com/office/powerpoint/2010/main" xmlns:p15="http://schemas.microsoft.com/office/powerpoint/2012/main" xmlns:ahyp="http://schemas.microsoft.com/office/drawing/2018/hyperlinkcolor" matchingName="Blank" type="blank">
+<p:sldLayout xmlns:a="http://schemas.openxmlformats.org/drawingml/2006/main" xmlns:r="http://schemas.openxmlformats.org/officeDocument/2006/relationships" xmlns:p="http://schemas.openxmlformats.org/presentationml/2006/main" matchingName="Blank" type="blank">
   <p:cSld name="BLANK">
     <p:spTree>
       <p:nvGrpSpPr>
-        <p:cNvPr id="53" name="Shape 53"/>
+        <p:cNvPr id="1" name="Shape 53"/>
         <p:cNvGrpSpPr/>
         <p:nvPr/>
       </p:nvGrpSpPr>
@@ -2486,9 +2557,11 @@
       <p:sp>
         <p:nvSpPr>
           <p:cNvPr id="54" name="Google Shape;54;p12"/>
-          <p:cNvSpPr txBox="1"/>
+          <p:cNvSpPr txBox="1">
+            <a:spLocks noGrp="1"/>
+          </p:cNvSpPr>
           <p:nvPr>
-            <p:ph idx="12" type="sldNum"/>
+            <p:ph type="sldNum" idx="12"/>
           </p:nvPr>
         </p:nvSpPr>
         <p:spPr>
@@ -2501,7 +2574,7 @@
           </a:prstGeom>
         </p:spPr>
         <p:txBody>
-          <a:bodyPr anchorCtr="0" anchor="ctr" bIns="91425" lIns="91425" spcFirstLastPara="1" rIns="91425" wrap="square" tIns="91425">
+          <a:bodyPr spcFirstLastPara="1" wrap="square" lIns="91425" tIns="91425" rIns="91425" bIns="91425" anchor="ctr" anchorCtr="0">
             <a:normAutofit/>
           </a:bodyPr>
           <a:lstStyle>
@@ -2543,7 +2616,7 @@
             </a:lvl9pPr>
           </a:lstStyle>
           <a:p>
-            <a:pPr indent="0" lvl="0" marL="0" rtl="0" algn="r">
+            <a:pPr marL="0" lvl="0" indent="0" algn="r" rtl="0">
               <a:spcBef>
                 <a:spcPts val="0"/>
               </a:spcBef>
@@ -2569,18 +2642,19 @@
 </file>
 
 <file path=ppt/slideLayouts/slideLayout2.xml><?xml version="1.0" encoding="utf-8"?>
-<p:sldLayout xmlns:a="http://schemas.openxmlformats.org/drawingml/2006/main" xmlns:r="http://schemas.openxmlformats.org/officeDocument/2006/relationships" xmlns:mc="http://schemas.openxmlformats.org/markup-compatibility/2006" xmlns:mv="urn:schemas-microsoft-com:mac:vml" xmlns:p="http://schemas.openxmlformats.org/presentationml/2006/main" xmlns:c="http://schemas.openxmlformats.org/drawingml/2006/chart" xmlns:dgm="http://schemas.openxmlformats.org/drawingml/2006/diagram" xmlns:o="urn:schemas-microsoft-com:office:office" xmlns:v="urn:schemas-microsoft-com:vml" xmlns:pvml="urn:schemas-microsoft-com:office:powerpoint" xmlns:com="http://schemas.openxmlformats.org/drawingml/2006/compatibility" xmlns:p14="http://schemas.microsoft.com/office/powerpoint/2010/main" xmlns:p15="http://schemas.microsoft.com/office/powerpoint/2012/main" xmlns:ahyp="http://schemas.microsoft.com/office/drawing/2018/hyperlinkcolor" matchingName="Section header" type="secHead">
+<p:sldLayout xmlns:a="http://schemas.openxmlformats.org/drawingml/2006/main" xmlns:r="http://schemas.openxmlformats.org/officeDocument/2006/relationships" xmlns:p="http://schemas.openxmlformats.org/presentationml/2006/main" matchingName="Section header" type="secHead">
   <p:cSld name="SECTION_HEADER">
     <p:bg>
       <p:bgPr>
         <a:solidFill>
           <a:schemeClr val="dk1"/>
         </a:solidFill>
+        <a:effectLst/>
       </p:bgPr>
     </p:bg>
     <p:spTree>
       <p:nvGrpSpPr>
-        <p:cNvPr id="15" name="Shape 15"/>
+        <p:cNvPr id="1" name="Shape 15"/>
         <p:cNvGrpSpPr/>
         <p:nvPr/>
       </p:nvGrpSpPr>
@@ -2607,21 +2681,23 @@
             <a:avLst/>
           </a:prstGeom>
           <a:noFill/>
-          <a:ln cap="flat" cmpd="sng" w="28575">
+          <a:ln w="28575" cap="flat" cmpd="sng">
             <a:solidFill>
               <a:schemeClr val="lt2"/>
             </a:solidFill>
             <a:prstDash val="solid"/>
             <a:round/>
-            <a:headEnd len="sm" w="sm" type="none"/>
-            <a:tailEnd len="sm" w="sm" type="none"/>
+            <a:headEnd type="none" w="sm" len="sm"/>
+            <a:tailEnd type="none" w="sm" len="sm"/>
           </a:ln>
         </p:spPr>
       </p:cxnSp>
       <p:sp>
         <p:nvSpPr>
           <p:cNvPr id="17" name="Google Shape;17;p3"/>
-          <p:cNvSpPr txBox="1"/>
+          <p:cNvSpPr txBox="1">
+            <a:spLocks noGrp="1"/>
+          </p:cNvSpPr>
           <p:nvPr>
             <p:ph type="title"/>
           </p:nvPr>
@@ -2636,7 +2712,7 @@
           </a:prstGeom>
         </p:spPr>
         <p:txBody>
-          <a:bodyPr anchorCtr="0" anchor="b" bIns="91425" lIns="91425" spcFirstLastPara="1" rIns="91425" wrap="square" tIns="91425">
+          <a:bodyPr spcFirstLastPara="1" wrap="square" lIns="91425" tIns="91425" rIns="91425" bIns="91425" anchor="b" anchorCtr="0">
             <a:normAutofit/>
           </a:bodyPr>
           <a:lstStyle>
@@ -2803,15 +2879,19 @@
               </a:defRPr>
             </a:lvl9pPr>
           </a:lstStyle>
-          <a:p/>
+          <a:p>
+            <a:endParaRPr/>
+          </a:p>
         </p:txBody>
       </p:sp>
       <p:sp>
         <p:nvSpPr>
           <p:cNvPr id="18" name="Google Shape;18;p3"/>
-          <p:cNvSpPr txBox="1"/>
+          <p:cNvSpPr txBox="1">
+            <a:spLocks noGrp="1"/>
+          </p:cNvSpPr>
           <p:nvPr>
-            <p:ph idx="12" type="sldNum"/>
+            <p:ph type="sldNum" idx="12"/>
           </p:nvPr>
         </p:nvSpPr>
         <p:spPr>
@@ -2824,7 +2904,7 @@
           </a:prstGeom>
         </p:spPr>
         <p:txBody>
-          <a:bodyPr anchorCtr="0" anchor="ctr" bIns="91425" lIns="91425" spcFirstLastPara="1" rIns="91425" wrap="square" tIns="91425">
+          <a:bodyPr spcFirstLastPara="1" wrap="square" lIns="91425" tIns="91425" rIns="91425" bIns="91425" anchor="ctr" anchorCtr="0">
             <a:normAutofit/>
           </a:bodyPr>
           <a:lstStyle>
@@ -2902,7 +2982,7 @@
             </a:lvl9pPr>
           </a:lstStyle>
           <a:p>
-            <a:pPr indent="0" lvl="0" marL="0" rtl="0" algn="r">
+            <a:pPr marL="0" lvl="0" indent="0" algn="r" rtl="0">
               <a:spcBef>
                 <a:spcPts val="0"/>
               </a:spcBef>
@@ -2928,11 +3008,11 @@
 </file>
 
 <file path=ppt/slideLayouts/slideLayout3.xml><?xml version="1.0" encoding="utf-8"?>
-<p:sldLayout xmlns:a="http://schemas.openxmlformats.org/drawingml/2006/main" xmlns:r="http://schemas.openxmlformats.org/officeDocument/2006/relationships" xmlns:mc="http://schemas.openxmlformats.org/markup-compatibility/2006" xmlns:mv="urn:schemas-microsoft-com:mac:vml" xmlns:p="http://schemas.openxmlformats.org/presentationml/2006/main" xmlns:c="http://schemas.openxmlformats.org/drawingml/2006/chart" xmlns:dgm="http://schemas.openxmlformats.org/drawingml/2006/diagram" xmlns:o="urn:schemas-microsoft-com:office:office" xmlns:v="urn:schemas-microsoft-com:vml" xmlns:pvml="urn:schemas-microsoft-com:office:powerpoint" xmlns:com="http://schemas.openxmlformats.org/drawingml/2006/compatibility" xmlns:p14="http://schemas.microsoft.com/office/powerpoint/2010/main" xmlns:p15="http://schemas.microsoft.com/office/powerpoint/2012/main" xmlns:ahyp="http://schemas.microsoft.com/office/drawing/2018/hyperlinkcolor" matchingName="Title and body" type="tx">
+<p:sldLayout xmlns:a="http://schemas.openxmlformats.org/drawingml/2006/main" xmlns:r="http://schemas.openxmlformats.org/officeDocument/2006/relationships" xmlns:p="http://schemas.openxmlformats.org/presentationml/2006/main" matchingName="Title and body" type="tx">
   <p:cSld name="TITLE_AND_BODY">
     <p:spTree>
       <p:nvGrpSpPr>
-        <p:cNvPr id="19" name="Shape 19"/>
+        <p:cNvPr id="1" name="Shape 19"/>
         <p:cNvGrpSpPr/>
         <p:nvPr/>
       </p:nvGrpSpPr>
@@ -2966,12 +3046,12 @@
           </a:ln>
         </p:spPr>
         <p:txBody>
-          <a:bodyPr anchorCtr="0" anchor="ctr" bIns="91425" lIns="91425" spcFirstLastPara="1" rIns="91425" wrap="square" tIns="91425">
+          <a:bodyPr spcFirstLastPara="1" wrap="square" lIns="91425" tIns="91425" rIns="91425" bIns="91425" anchor="ctr" anchorCtr="0">
             <a:noAutofit/>
           </a:bodyPr>
           <a:lstStyle/>
           <a:p>
-            <a:pPr indent="0" lvl="0" marL="0" rtl="0" algn="l">
+            <a:pPr marL="0" lvl="0" indent="0" algn="l" rtl="0">
               <a:spcBef>
                 <a:spcPts val="0"/>
               </a:spcBef>
@@ -2980,9 +3060,6 @@
               </a:spcAft>
               <a:buNone/>
             </a:pPr>
-            <a:r>
-              <a:t/>
-            </a:r>
             <a:endParaRPr/>
           </a:p>
         </p:txBody>
@@ -2990,7 +3067,9 @@
       <p:sp>
         <p:nvSpPr>
           <p:cNvPr id="21" name="Google Shape;21;p4"/>
-          <p:cNvSpPr txBox="1"/>
+          <p:cNvSpPr txBox="1">
+            <a:spLocks noGrp="1"/>
+          </p:cNvSpPr>
           <p:nvPr>
             <p:ph type="title"/>
           </p:nvPr>
@@ -3005,7 +3084,7 @@
           </a:prstGeom>
         </p:spPr>
         <p:txBody>
-          <a:bodyPr anchorCtr="0" anchor="t" bIns="91425" lIns="91425" spcFirstLastPara="1" rIns="91425" wrap="square" tIns="91425">
+          <a:bodyPr spcFirstLastPara="1" wrap="square" lIns="91425" tIns="91425" rIns="91425" bIns="91425" anchor="t" anchorCtr="0">
             <a:normAutofit/>
           </a:bodyPr>
           <a:lstStyle>
@@ -3109,15 +3188,19 @@
               <a:defRPr/>
             </a:lvl9pPr>
           </a:lstStyle>
-          <a:p/>
+          <a:p>
+            <a:endParaRPr/>
+          </a:p>
         </p:txBody>
       </p:sp>
       <p:sp>
         <p:nvSpPr>
           <p:cNvPr id="22" name="Google Shape;22;p4"/>
-          <p:cNvSpPr txBox="1"/>
+          <p:cNvSpPr txBox="1">
+            <a:spLocks noGrp="1"/>
+          </p:cNvSpPr>
           <p:nvPr>
-            <p:ph idx="1" type="body"/>
+            <p:ph type="body" idx="1"/>
           </p:nvPr>
         </p:nvSpPr>
         <p:spPr>
@@ -3130,11 +3213,11 @@
           </a:prstGeom>
         </p:spPr>
         <p:txBody>
-          <a:bodyPr anchorCtr="0" anchor="t" bIns="91425" lIns="91425" spcFirstLastPara="1" rIns="91425" wrap="square" tIns="91425">
+          <a:bodyPr spcFirstLastPara="1" wrap="square" lIns="91425" tIns="91425" rIns="91425" bIns="91425" anchor="t" anchorCtr="0">
             <a:normAutofit/>
           </a:bodyPr>
           <a:lstStyle>
-            <a:lvl1pPr indent="-342900" lvl="0" marL="457200">
+            <a:lvl1pPr marL="457200" lvl="0" indent="-342900">
               <a:spcBef>
                 <a:spcPts val="0"/>
               </a:spcBef>
@@ -3145,7 +3228,7 @@
               <a:buChar char="●"/>
               <a:defRPr/>
             </a:lvl1pPr>
-            <a:lvl2pPr indent="-317500" lvl="1" marL="914400">
+            <a:lvl2pPr marL="914400" lvl="1" indent="-317500">
               <a:spcBef>
                 <a:spcPts val="0"/>
               </a:spcBef>
@@ -3156,7 +3239,7 @@
               <a:buChar char="○"/>
               <a:defRPr/>
             </a:lvl2pPr>
-            <a:lvl3pPr indent="-317500" lvl="2" marL="1371600">
+            <a:lvl3pPr marL="1371600" lvl="2" indent="-317500">
               <a:spcBef>
                 <a:spcPts val="0"/>
               </a:spcBef>
@@ -3167,7 +3250,7 @@
               <a:buChar char="■"/>
               <a:defRPr/>
             </a:lvl3pPr>
-            <a:lvl4pPr indent="-317500" lvl="3" marL="1828800">
+            <a:lvl4pPr marL="1828800" lvl="3" indent="-317500">
               <a:spcBef>
                 <a:spcPts val="0"/>
               </a:spcBef>
@@ -3178,7 +3261,7 @@
               <a:buChar char="●"/>
               <a:defRPr/>
             </a:lvl4pPr>
-            <a:lvl5pPr indent="-317500" lvl="4" marL="2286000">
+            <a:lvl5pPr marL="2286000" lvl="4" indent="-317500">
               <a:spcBef>
                 <a:spcPts val="0"/>
               </a:spcBef>
@@ -3189,7 +3272,7 @@
               <a:buChar char="○"/>
               <a:defRPr/>
             </a:lvl5pPr>
-            <a:lvl6pPr indent="-317500" lvl="5" marL="2743200">
+            <a:lvl6pPr marL="2743200" lvl="5" indent="-317500">
               <a:spcBef>
                 <a:spcPts val="0"/>
               </a:spcBef>
@@ -3200,7 +3283,7 @@
               <a:buChar char="■"/>
               <a:defRPr/>
             </a:lvl6pPr>
-            <a:lvl7pPr indent="-317500" lvl="6" marL="3200400">
+            <a:lvl7pPr marL="3200400" lvl="6" indent="-317500">
               <a:spcBef>
                 <a:spcPts val="0"/>
               </a:spcBef>
@@ -3211,7 +3294,7 @@
               <a:buChar char="●"/>
               <a:defRPr/>
             </a:lvl7pPr>
-            <a:lvl8pPr indent="-317500" lvl="7" marL="3657600">
+            <a:lvl8pPr marL="3657600" lvl="7" indent="-317500">
               <a:spcBef>
                 <a:spcPts val="0"/>
               </a:spcBef>
@@ -3222,7 +3305,7 @@
               <a:buChar char="○"/>
               <a:defRPr/>
             </a:lvl8pPr>
-            <a:lvl9pPr indent="-317500" lvl="8" marL="4114800">
+            <a:lvl9pPr marL="4114800" lvl="8" indent="-317500">
               <a:spcBef>
                 <a:spcPts val="0"/>
               </a:spcBef>
@@ -3234,15 +3317,19 @@
               <a:defRPr/>
             </a:lvl9pPr>
           </a:lstStyle>
-          <a:p/>
+          <a:p>
+            <a:endParaRPr/>
+          </a:p>
         </p:txBody>
       </p:sp>
       <p:sp>
         <p:nvSpPr>
           <p:cNvPr id="23" name="Google Shape;23;p4"/>
-          <p:cNvSpPr txBox="1"/>
+          <p:cNvSpPr txBox="1">
+            <a:spLocks noGrp="1"/>
+          </p:cNvSpPr>
           <p:nvPr>
-            <p:ph idx="12" type="sldNum"/>
+            <p:ph type="sldNum" idx="12"/>
           </p:nvPr>
         </p:nvSpPr>
         <p:spPr>
@@ -3255,7 +3342,7 @@
           </a:prstGeom>
         </p:spPr>
         <p:txBody>
-          <a:bodyPr anchorCtr="0" anchor="ctr" bIns="91425" lIns="91425" spcFirstLastPara="1" rIns="91425" wrap="square" tIns="91425">
+          <a:bodyPr spcFirstLastPara="1" wrap="square" lIns="91425" tIns="91425" rIns="91425" bIns="91425" anchor="ctr" anchorCtr="0">
             <a:normAutofit/>
           </a:bodyPr>
           <a:lstStyle>
@@ -3297,7 +3384,7 @@
             </a:lvl9pPr>
           </a:lstStyle>
           <a:p>
-            <a:pPr indent="0" lvl="0" marL="0" rtl="0" algn="r">
+            <a:pPr marL="0" lvl="0" indent="0" algn="r" rtl="0">
               <a:spcBef>
                 <a:spcPts val="0"/>
               </a:spcBef>
@@ -3323,11 +3410,11 @@
 </file>
 
 <file path=ppt/slideLayouts/slideLayout4.xml><?xml version="1.0" encoding="utf-8"?>
-<p:sldLayout xmlns:a="http://schemas.openxmlformats.org/drawingml/2006/main" xmlns:r="http://schemas.openxmlformats.org/officeDocument/2006/relationships" xmlns:mc="http://schemas.openxmlformats.org/markup-compatibility/2006" xmlns:mv="urn:schemas-microsoft-com:mac:vml" xmlns:p="http://schemas.openxmlformats.org/presentationml/2006/main" xmlns:c="http://schemas.openxmlformats.org/drawingml/2006/chart" xmlns:dgm="http://schemas.openxmlformats.org/drawingml/2006/diagram" xmlns:o="urn:schemas-microsoft-com:office:office" xmlns:v="urn:schemas-microsoft-com:vml" xmlns:pvml="urn:schemas-microsoft-com:office:powerpoint" xmlns:com="http://schemas.openxmlformats.org/drawingml/2006/compatibility" xmlns:p14="http://schemas.microsoft.com/office/powerpoint/2010/main" xmlns:p15="http://schemas.microsoft.com/office/powerpoint/2012/main" xmlns:ahyp="http://schemas.microsoft.com/office/drawing/2018/hyperlinkcolor" matchingName="Title and two columns" type="twoColTx">
+<p:sldLayout xmlns:a="http://schemas.openxmlformats.org/drawingml/2006/main" xmlns:r="http://schemas.openxmlformats.org/officeDocument/2006/relationships" xmlns:p="http://schemas.openxmlformats.org/presentationml/2006/main" matchingName="Title and two columns" type="twoColTx">
   <p:cSld name="TITLE_AND_TWO_COLUMNS">
     <p:spTree>
       <p:nvGrpSpPr>
-        <p:cNvPr id="24" name="Shape 24"/>
+        <p:cNvPr id="1" name="Shape 24"/>
         <p:cNvGrpSpPr/>
         <p:nvPr/>
       </p:nvGrpSpPr>
@@ -3342,7 +3429,9 @@
       <p:sp>
         <p:nvSpPr>
           <p:cNvPr id="25" name="Google Shape;25;p5"/>
-          <p:cNvSpPr txBox="1"/>
+          <p:cNvSpPr txBox="1">
+            <a:spLocks noGrp="1"/>
+          </p:cNvSpPr>
           <p:nvPr>
             <p:ph type="title"/>
           </p:nvPr>
@@ -3357,7 +3446,7 @@
           </a:prstGeom>
         </p:spPr>
         <p:txBody>
-          <a:bodyPr anchorCtr="0" anchor="t" bIns="91425" lIns="91425" spcFirstLastPara="1" rIns="91425" wrap="square" tIns="91425">
+          <a:bodyPr spcFirstLastPara="1" wrap="square" lIns="91425" tIns="91425" rIns="91425" bIns="91425" anchor="t" anchorCtr="0">
             <a:normAutofit/>
           </a:bodyPr>
           <a:lstStyle>
@@ -3461,15 +3550,19 @@
               <a:defRPr/>
             </a:lvl9pPr>
           </a:lstStyle>
-          <a:p/>
+          <a:p>
+            <a:endParaRPr/>
+          </a:p>
         </p:txBody>
       </p:sp>
       <p:sp>
         <p:nvSpPr>
           <p:cNvPr id="26" name="Google Shape;26;p5"/>
-          <p:cNvSpPr txBox="1"/>
+          <p:cNvSpPr txBox="1">
+            <a:spLocks noGrp="1"/>
+          </p:cNvSpPr>
           <p:nvPr>
-            <p:ph idx="1" type="body"/>
+            <p:ph type="body" idx="1"/>
           </p:nvPr>
         </p:nvSpPr>
         <p:spPr>
@@ -3482,11 +3575,11 @@
           </a:prstGeom>
         </p:spPr>
         <p:txBody>
-          <a:bodyPr anchorCtr="0" anchor="t" bIns="91425" lIns="91425" spcFirstLastPara="1" rIns="91425" wrap="square" tIns="91425">
+          <a:bodyPr spcFirstLastPara="1" wrap="square" lIns="91425" tIns="91425" rIns="91425" bIns="91425" anchor="t" anchorCtr="0">
             <a:normAutofit/>
           </a:bodyPr>
           <a:lstStyle>
-            <a:lvl1pPr indent="-317500" lvl="0" marL="457200">
+            <a:lvl1pPr marL="457200" lvl="0" indent="-317500">
               <a:spcBef>
                 <a:spcPts val="0"/>
               </a:spcBef>
@@ -3497,7 +3590,7 @@
               <a:buChar char="●"/>
               <a:defRPr sz="1400"/>
             </a:lvl1pPr>
-            <a:lvl2pPr indent="-304800" lvl="1" marL="914400">
+            <a:lvl2pPr marL="914400" lvl="1" indent="-304800">
               <a:spcBef>
                 <a:spcPts val="0"/>
               </a:spcBef>
@@ -3508,7 +3601,7 @@
               <a:buChar char="○"/>
               <a:defRPr sz="1200"/>
             </a:lvl2pPr>
-            <a:lvl3pPr indent="-304800" lvl="2" marL="1371600">
+            <a:lvl3pPr marL="1371600" lvl="2" indent="-304800">
               <a:spcBef>
                 <a:spcPts val="0"/>
               </a:spcBef>
@@ -3519,7 +3612,7 @@
               <a:buChar char="■"/>
               <a:defRPr sz="1200"/>
             </a:lvl3pPr>
-            <a:lvl4pPr indent="-304800" lvl="3" marL="1828800">
+            <a:lvl4pPr marL="1828800" lvl="3" indent="-304800">
               <a:spcBef>
                 <a:spcPts val="0"/>
               </a:spcBef>
@@ -3530,7 +3623,7 @@
               <a:buChar char="●"/>
               <a:defRPr sz="1200"/>
             </a:lvl4pPr>
-            <a:lvl5pPr indent="-304800" lvl="4" marL="2286000">
+            <a:lvl5pPr marL="2286000" lvl="4" indent="-304800">
               <a:spcBef>
                 <a:spcPts val="0"/>
               </a:spcBef>
@@ -3541,7 +3634,7 @@
               <a:buChar char="○"/>
               <a:defRPr sz="1200"/>
             </a:lvl5pPr>
-            <a:lvl6pPr indent="-304800" lvl="5" marL="2743200">
+            <a:lvl6pPr marL="2743200" lvl="5" indent="-304800">
               <a:spcBef>
                 <a:spcPts val="0"/>
               </a:spcBef>
@@ -3552,7 +3645,7 @@
               <a:buChar char="■"/>
               <a:defRPr sz="1200"/>
             </a:lvl6pPr>
-            <a:lvl7pPr indent="-304800" lvl="6" marL="3200400">
+            <a:lvl7pPr marL="3200400" lvl="6" indent="-304800">
               <a:spcBef>
                 <a:spcPts val="0"/>
               </a:spcBef>
@@ -3563,7 +3656,7 @@
               <a:buChar char="●"/>
               <a:defRPr sz="1200"/>
             </a:lvl7pPr>
-            <a:lvl8pPr indent="-304800" lvl="7" marL="3657600">
+            <a:lvl8pPr marL="3657600" lvl="7" indent="-304800">
               <a:spcBef>
                 <a:spcPts val="0"/>
               </a:spcBef>
@@ -3574,7 +3667,7 @@
               <a:buChar char="○"/>
               <a:defRPr sz="1200"/>
             </a:lvl8pPr>
-            <a:lvl9pPr indent="-304800" lvl="8" marL="4114800">
+            <a:lvl9pPr marL="4114800" lvl="8" indent="-304800">
               <a:spcBef>
                 <a:spcPts val="0"/>
               </a:spcBef>
@@ -3586,15 +3679,19 @@
               <a:defRPr sz="1200"/>
             </a:lvl9pPr>
           </a:lstStyle>
-          <a:p/>
+          <a:p>
+            <a:endParaRPr/>
+          </a:p>
         </p:txBody>
       </p:sp>
       <p:sp>
         <p:nvSpPr>
           <p:cNvPr id="27" name="Google Shape;27;p5"/>
-          <p:cNvSpPr txBox="1"/>
+          <p:cNvSpPr txBox="1">
+            <a:spLocks noGrp="1"/>
+          </p:cNvSpPr>
           <p:nvPr>
-            <p:ph idx="2" type="body"/>
+            <p:ph type="body" idx="2"/>
           </p:nvPr>
         </p:nvSpPr>
         <p:spPr>
@@ -3607,11 +3704,11 @@
           </a:prstGeom>
         </p:spPr>
         <p:txBody>
-          <a:bodyPr anchorCtr="0" anchor="t" bIns="91425" lIns="91425" spcFirstLastPara="1" rIns="91425" wrap="square" tIns="91425">
+          <a:bodyPr spcFirstLastPara="1" wrap="square" lIns="91425" tIns="91425" rIns="91425" bIns="91425" anchor="t" anchorCtr="0">
             <a:normAutofit/>
           </a:bodyPr>
           <a:lstStyle>
-            <a:lvl1pPr indent="-317500" lvl="0" marL="457200">
+            <a:lvl1pPr marL="457200" lvl="0" indent="-317500">
               <a:spcBef>
                 <a:spcPts val="0"/>
               </a:spcBef>
@@ -3622,7 +3719,7 @@
               <a:buChar char="●"/>
               <a:defRPr sz="1400"/>
             </a:lvl1pPr>
-            <a:lvl2pPr indent="-304800" lvl="1" marL="914400">
+            <a:lvl2pPr marL="914400" lvl="1" indent="-304800">
               <a:spcBef>
                 <a:spcPts val="0"/>
               </a:spcBef>
@@ -3633,7 +3730,7 @@
               <a:buChar char="○"/>
               <a:defRPr sz="1200"/>
             </a:lvl2pPr>
-            <a:lvl3pPr indent="-304800" lvl="2" marL="1371600">
+            <a:lvl3pPr marL="1371600" lvl="2" indent="-304800">
               <a:spcBef>
                 <a:spcPts val="0"/>
               </a:spcBef>
@@ -3644,7 +3741,7 @@
               <a:buChar char="■"/>
               <a:defRPr sz="1200"/>
             </a:lvl3pPr>
-            <a:lvl4pPr indent="-304800" lvl="3" marL="1828800">
+            <a:lvl4pPr marL="1828800" lvl="3" indent="-304800">
               <a:spcBef>
                 <a:spcPts val="0"/>
               </a:spcBef>
@@ -3655,7 +3752,7 @@
               <a:buChar char="●"/>
               <a:defRPr sz="1200"/>
             </a:lvl4pPr>
-            <a:lvl5pPr indent="-304800" lvl="4" marL="2286000">
+            <a:lvl5pPr marL="2286000" lvl="4" indent="-304800">
               <a:spcBef>
                 <a:spcPts val="0"/>
               </a:spcBef>
@@ -3666,7 +3763,7 @@
               <a:buChar char="○"/>
               <a:defRPr sz="1200"/>
             </a:lvl5pPr>
-            <a:lvl6pPr indent="-304800" lvl="5" marL="2743200">
+            <a:lvl6pPr marL="2743200" lvl="5" indent="-304800">
               <a:spcBef>
                 <a:spcPts val="0"/>
               </a:spcBef>
@@ -3677,7 +3774,7 @@
               <a:buChar char="■"/>
               <a:defRPr sz="1200"/>
             </a:lvl6pPr>
-            <a:lvl7pPr indent="-304800" lvl="6" marL="3200400">
+            <a:lvl7pPr marL="3200400" lvl="6" indent="-304800">
               <a:spcBef>
                 <a:spcPts val="0"/>
               </a:spcBef>
@@ -3688,7 +3785,7 @@
               <a:buChar char="●"/>
               <a:defRPr sz="1200"/>
             </a:lvl7pPr>
-            <a:lvl8pPr indent="-304800" lvl="7" marL="3657600">
+            <a:lvl8pPr marL="3657600" lvl="7" indent="-304800">
               <a:spcBef>
                 <a:spcPts val="0"/>
               </a:spcBef>
@@ -3699,7 +3796,7 @@
               <a:buChar char="○"/>
               <a:defRPr sz="1200"/>
             </a:lvl8pPr>
-            <a:lvl9pPr indent="-304800" lvl="8" marL="4114800">
+            <a:lvl9pPr marL="4114800" lvl="8" indent="-304800">
               <a:spcBef>
                 <a:spcPts val="0"/>
               </a:spcBef>
@@ -3711,15 +3808,19 @@
               <a:defRPr sz="1200"/>
             </a:lvl9pPr>
           </a:lstStyle>
-          <a:p/>
+          <a:p>
+            <a:endParaRPr/>
+          </a:p>
         </p:txBody>
       </p:sp>
       <p:sp>
         <p:nvSpPr>
           <p:cNvPr id="28" name="Google Shape;28;p5"/>
-          <p:cNvSpPr txBox="1"/>
+          <p:cNvSpPr txBox="1">
+            <a:spLocks noGrp="1"/>
+          </p:cNvSpPr>
           <p:nvPr>
-            <p:ph idx="12" type="sldNum"/>
+            <p:ph type="sldNum" idx="12"/>
           </p:nvPr>
         </p:nvSpPr>
         <p:spPr>
@@ -3732,7 +3833,7 @@
           </a:prstGeom>
         </p:spPr>
         <p:txBody>
-          <a:bodyPr anchorCtr="0" anchor="ctr" bIns="91425" lIns="91425" spcFirstLastPara="1" rIns="91425" wrap="square" tIns="91425">
+          <a:bodyPr spcFirstLastPara="1" wrap="square" lIns="91425" tIns="91425" rIns="91425" bIns="91425" anchor="ctr" anchorCtr="0">
             <a:normAutofit/>
           </a:bodyPr>
           <a:lstStyle>
@@ -3774,7 +3875,7 @@
             </a:lvl9pPr>
           </a:lstStyle>
           <a:p>
-            <a:pPr indent="0" lvl="0" marL="0" rtl="0" algn="r">
+            <a:pPr marL="0" lvl="0" indent="0" algn="r" rtl="0">
               <a:spcBef>
                 <a:spcPts val="0"/>
               </a:spcBef>
@@ -3800,11 +3901,11 @@
 </file>
 
 <file path=ppt/slideLayouts/slideLayout5.xml><?xml version="1.0" encoding="utf-8"?>
-<p:sldLayout xmlns:a="http://schemas.openxmlformats.org/drawingml/2006/main" xmlns:r="http://schemas.openxmlformats.org/officeDocument/2006/relationships" xmlns:mc="http://schemas.openxmlformats.org/markup-compatibility/2006" xmlns:mv="urn:schemas-microsoft-com:mac:vml" xmlns:p="http://schemas.openxmlformats.org/presentationml/2006/main" xmlns:c="http://schemas.openxmlformats.org/drawingml/2006/chart" xmlns:dgm="http://schemas.openxmlformats.org/drawingml/2006/diagram" xmlns:o="urn:schemas-microsoft-com:office:office" xmlns:v="urn:schemas-microsoft-com:vml" xmlns:pvml="urn:schemas-microsoft-com:office:powerpoint" xmlns:com="http://schemas.openxmlformats.org/drawingml/2006/compatibility" xmlns:p14="http://schemas.microsoft.com/office/powerpoint/2010/main" xmlns:p15="http://schemas.microsoft.com/office/powerpoint/2012/main" xmlns:ahyp="http://schemas.microsoft.com/office/drawing/2018/hyperlinkcolor" matchingName="Title only" type="titleOnly">
+<p:sldLayout xmlns:a="http://schemas.openxmlformats.org/drawingml/2006/main" xmlns:r="http://schemas.openxmlformats.org/officeDocument/2006/relationships" xmlns:p="http://schemas.openxmlformats.org/presentationml/2006/main" matchingName="Title only" type="titleOnly">
   <p:cSld name="TITLE_ONLY">
     <p:spTree>
       <p:nvGrpSpPr>
-        <p:cNvPr id="29" name="Shape 29"/>
+        <p:cNvPr id="1" name="Shape 29"/>
         <p:cNvGrpSpPr/>
         <p:nvPr/>
       </p:nvGrpSpPr>
@@ -3819,7 +3920,9 @@
       <p:sp>
         <p:nvSpPr>
           <p:cNvPr id="30" name="Google Shape;30;p6"/>
-          <p:cNvSpPr txBox="1"/>
+          <p:cNvSpPr txBox="1">
+            <a:spLocks noGrp="1"/>
+          </p:cNvSpPr>
           <p:nvPr>
             <p:ph type="title"/>
           </p:nvPr>
@@ -3834,7 +3937,7 @@
           </a:prstGeom>
         </p:spPr>
         <p:txBody>
-          <a:bodyPr anchorCtr="0" anchor="t" bIns="91425" lIns="91425" spcFirstLastPara="1" rIns="91425" wrap="square" tIns="91425">
+          <a:bodyPr spcFirstLastPara="1" wrap="square" lIns="91425" tIns="91425" rIns="91425" bIns="91425" anchor="t" anchorCtr="0">
             <a:normAutofit/>
           </a:bodyPr>
           <a:lstStyle>
@@ -3938,15 +4041,19 @@
               <a:defRPr/>
             </a:lvl9pPr>
           </a:lstStyle>
-          <a:p/>
+          <a:p>
+            <a:endParaRPr/>
+          </a:p>
         </p:txBody>
       </p:sp>
       <p:sp>
         <p:nvSpPr>
           <p:cNvPr id="31" name="Google Shape;31;p6"/>
-          <p:cNvSpPr txBox="1"/>
+          <p:cNvSpPr txBox="1">
+            <a:spLocks noGrp="1"/>
+          </p:cNvSpPr>
           <p:nvPr>
-            <p:ph idx="12" type="sldNum"/>
+            <p:ph type="sldNum" idx="12"/>
           </p:nvPr>
         </p:nvSpPr>
         <p:spPr>
@@ -3959,7 +4066,7 @@
           </a:prstGeom>
         </p:spPr>
         <p:txBody>
-          <a:bodyPr anchorCtr="0" anchor="ctr" bIns="91425" lIns="91425" spcFirstLastPara="1" rIns="91425" wrap="square" tIns="91425">
+          <a:bodyPr spcFirstLastPara="1" wrap="square" lIns="91425" tIns="91425" rIns="91425" bIns="91425" anchor="ctr" anchorCtr="0">
             <a:normAutofit/>
           </a:bodyPr>
           <a:lstStyle>
@@ -4001,7 +4108,7 @@
             </a:lvl9pPr>
           </a:lstStyle>
           <a:p>
-            <a:pPr indent="0" lvl="0" marL="0" rtl="0" algn="r">
+            <a:pPr marL="0" lvl="0" indent="0" algn="r" rtl="0">
               <a:spcBef>
                 <a:spcPts val="0"/>
               </a:spcBef>
@@ -4027,11 +4134,11 @@
 </file>
 
 <file path=ppt/slideLayouts/slideLayout6.xml><?xml version="1.0" encoding="utf-8"?>
-<p:sldLayout xmlns:a="http://schemas.openxmlformats.org/drawingml/2006/main" xmlns:r="http://schemas.openxmlformats.org/officeDocument/2006/relationships" xmlns:mc="http://schemas.openxmlformats.org/markup-compatibility/2006" xmlns:mv="urn:schemas-microsoft-com:mac:vml" xmlns:p="http://schemas.openxmlformats.org/presentationml/2006/main" xmlns:c="http://schemas.openxmlformats.org/drawingml/2006/chart" xmlns:dgm="http://schemas.openxmlformats.org/drawingml/2006/diagram" xmlns:o="urn:schemas-microsoft-com:office:office" xmlns:v="urn:schemas-microsoft-com:vml" xmlns:pvml="urn:schemas-microsoft-com:office:powerpoint" xmlns:com="http://schemas.openxmlformats.org/drawingml/2006/compatibility" xmlns:p14="http://schemas.microsoft.com/office/powerpoint/2010/main" xmlns:p15="http://schemas.microsoft.com/office/powerpoint/2012/main" xmlns:ahyp="http://schemas.microsoft.com/office/drawing/2018/hyperlinkcolor" matchingName="One column text">
+<p:sldLayout xmlns:a="http://schemas.openxmlformats.org/drawingml/2006/main" xmlns:r="http://schemas.openxmlformats.org/officeDocument/2006/relationships" xmlns:p="http://schemas.openxmlformats.org/presentationml/2006/main" matchingName="One column text">
   <p:cSld name="ONE_COLUMN_TEXT">
     <p:spTree>
       <p:nvGrpSpPr>
-        <p:cNvPr id="32" name="Shape 32"/>
+        <p:cNvPr id="1" name="Shape 32"/>
         <p:cNvGrpSpPr/>
         <p:nvPr/>
       </p:nvGrpSpPr>
@@ -4046,7 +4153,9 @@
       <p:sp>
         <p:nvSpPr>
           <p:cNvPr id="33" name="Google Shape;33;p7"/>
-          <p:cNvSpPr txBox="1"/>
+          <p:cNvSpPr txBox="1">
+            <a:spLocks noGrp="1"/>
+          </p:cNvSpPr>
           <p:nvPr>
             <p:ph type="title"/>
           </p:nvPr>
@@ -4061,7 +4170,7 @@
           </a:prstGeom>
         </p:spPr>
         <p:txBody>
-          <a:bodyPr anchorCtr="0" anchor="b" bIns="91425" lIns="91425" spcFirstLastPara="1" rIns="91425" wrap="square" tIns="91425">
+          <a:bodyPr spcFirstLastPara="1" wrap="square" lIns="91425" tIns="91425" rIns="91425" bIns="91425" anchor="b" anchorCtr="0">
             <a:normAutofit/>
           </a:bodyPr>
           <a:lstStyle>
@@ -4165,15 +4274,19 @@
               <a:defRPr sz="2400"/>
             </a:lvl9pPr>
           </a:lstStyle>
-          <a:p/>
+          <a:p>
+            <a:endParaRPr/>
+          </a:p>
         </p:txBody>
       </p:sp>
       <p:sp>
         <p:nvSpPr>
           <p:cNvPr id="34" name="Google Shape;34;p7"/>
-          <p:cNvSpPr txBox="1"/>
+          <p:cNvSpPr txBox="1">
+            <a:spLocks noGrp="1"/>
+          </p:cNvSpPr>
           <p:nvPr>
-            <p:ph idx="1" type="body"/>
+            <p:ph type="body" idx="1"/>
           </p:nvPr>
         </p:nvSpPr>
         <p:spPr>
@@ -4186,11 +4299,11 @@
           </a:prstGeom>
         </p:spPr>
         <p:txBody>
-          <a:bodyPr anchorCtr="0" anchor="t" bIns="91425" lIns="91425" spcFirstLastPara="1" rIns="91425" wrap="square" tIns="91425">
+          <a:bodyPr spcFirstLastPara="1" wrap="square" lIns="91425" tIns="91425" rIns="91425" bIns="91425" anchor="t" anchorCtr="0">
             <a:normAutofit/>
           </a:bodyPr>
           <a:lstStyle>
-            <a:lvl1pPr indent="-304800" lvl="0" marL="457200">
+            <a:lvl1pPr marL="457200" lvl="0" indent="-304800">
               <a:spcBef>
                 <a:spcPts val="0"/>
               </a:spcBef>
@@ -4201,7 +4314,7 @@
               <a:buChar char="●"/>
               <a:defRPr sz="1200"/>
             </a:lvl1pPr>
-            <a:lvl2pPr indent="-304800" lvl="1" marL="914400">
+            <a:lvl2pPr marL="914400" lvl="1" indent="-304800">
               <a:spcBef>
                 <a:spcPts val="0"/>
               </a:spcBef>
@@ -4212,7 +4325,7 @@
               <a:buChar char="○"/>
               <a:defRPr sz="1200"/>
             </a:lvl2pPr>
-            <a:lvl3pPr indent="-304800" lvl="2" marL="1371600">
+            <a:lvl3pPr marL="1371600" lvl="2" indent="-304800">
               <a:spcBef>
                 <a:spcPts val="0"/>
               </a:spcBef>
@@ -4223,7 +4336,7 @@
               <a:buChar char="■"/>
               <a:defRPr sz="1200"/>
             </a:lvl3pPr>
-            <a:lvl4pPr indent="-304800" lvl="3" marL="1828800">
+            <a:lvl4pPr marL="1828800" lvl="3" indent="-304800">
               <a:spcBef>
                 <a:spcPts val="0"/>
               </a:spcBef>
@@ -4234,7 +4347,7 @@
               <a:buChar char="●"/>
               <a:defRPr sz="1200"/>
             </a:lvl4pPr>
-            <a:lvl5pPr indent="-304800" lvl="4" marL="2286000">
+            <a:lvl5pPr marL="2286000" lvl="4" indent="-304800">
               <a:spcBef>
                 <a:spcPts val="0"/>
               </a:spcBef>
@@ -4245,7 +4358,7 @@
               <a:buChar char="○"/>
               <a:defRPr sz="1200"/>
             </a:lvl5pPr>
-            <a:lvl6pPr indent="-304800" lvl="5" marL="2743200">
+            <a:lvl6pPr marL="2743200" lvl="5" indent="-304800">
               <a:spcBef>
                 <a:spcPts val="0"/>
               </a:spcBef>
@@ -4256,7 +4369,7 @@
               <a:buChar char="■"/>
               <a:defRPr sz="1200"/>
             </a:lvl6pPr>
-            <a:lvl7pPr indent="-304800" lvl="6" marL="3200400">
+            <a:lvl7pPr marL="3200400" lvl="6" indent="-304800">
               <a:spcBef>
                 <a:spcPts val="0"/>
               </a:spcBef>
@@ -4267,7 +4380,7 @@
               <a:buChar char="●"/>
               <a:defRPr sz="1200"/>
             </a:lvl7pPr>
-            <a:lvl8pPr indent="-304800" lvl="7" marL="3657600">
+            <a:lvl8pPr marL="3657600" lvl="7" indent="-304800">
               <a:spcBef>
                 <a:spcPts val="0"/>
               </a:spcBef>
@@ -4278,7 +4391,7 @@
               <a:buChar char="○"/>
               <a:defRPr sz="1200"/>
             </a:lvl8pPr>
-            <a:lvl9pPr indent="-304800" lvl="8" marL="4114800">
+            <a:lvl9pPr marL="4114800" lvl="8" indent="-304800">
               <a:spcBef>
                 <a:spcPts val="0"/>
               </a:spcBef>
@@ -4290,15 +4403,19 @@
               <a:defRPr sz="1200"/>
             </a:lvl9pPr>
           </a:lstStyle>
-          <a:p/>
+          <a:p>
+            <a:endParaRPr/>
+          </a:p>
         </p:txBody>
       </p:sp>
       <p:sp>
         <p:nvSpPr>
           <p:cNvPr id="35" name="Google Shape;35;p7"/>
-          <p:cNvSpPr txBox="1"/>
+          <p:cNvSpPr txBox="1">
+            <a:spLocks noGrp="1"/>
+          </p:cNvSpPr>
           <p:nvPr>
-            <p:ph idx="12" type="sldNum"/>
+            <p:ph type="sldNum" idx="12"/>
           </p:nvPr>
         </p:nvSpPr>
         <p:spPr>
@@ -4311,7 +4428,7 @@
           </a:prstGeom>
         </p:spPr>
         <p:txBody>
-          <a:bodyPr anchorCtr="0" anchor="ctr" bIns="91425" lIns="91425" spcFirstLastPara="1" rIns="91425" wrap="square" tIns="91425">
+          <a:bodyPr spcFirstLastPara="1" wrap="square" lIns="91425" tIns="91425" rIns="91425" bIns="91425" anchor="ctr" anchorCtr="0">
             <a:normAutofit/>
           </a:bodyPr>
           <a:lstStyle>
@@ -4353,7 +4470,7 @@
             </a:lvl9pPr>
           </a:lstStyle>
           <a:p>
-            <a:pPr indent="0" lvl="0" marL="0" rtl="0" algn="r">
+            <a:pPr marL="0" lvl="0" indent="0" algn="r" rtl="0">
               <a:spcBef>
                 <a:spcPts val="0"/>
               </a:spcBef>
@@ -4379,18 +4496,19 @@
 </file>
 
 <file path=ppt/slideLayouts/slideLayout7.xml><?xml version="1.0" encoding="utf-8"?>
-<p:sldLayout xmlns:a="http://schemas.openxmlformats.org/drawingml/2006/main" xmlns:r="http://schemas.openxmlformats.org/officeDocument/2006/relationships" xmlns:mc="http://schemas.openxmlformats.org/markup-compatibility/2006" xmlns:mv="urn:schemas-microsoft-com:mac:vml" xmlns:p="http://schemas.openxmlformats.org/presentationml/2006/main" xmlns:c="http://schemas.openxmlformats.org/drawingml/2006/chart" xmlns:dgm="http://schemas.openxmlformats.org/drawingml/2006/diagram" xmlns:o="urn:schemas-microsoft-com:office:office" xmlns:v="urn:schemas-microsoft-com:vml" xmlns:pvml="urn:schemas-microsoft-com:office:powerpoint" xmlns:com="http://schemas.openxmlformats.org/drawingml/2006/compatibility" xmlns:p14="http://schemas.microsoft.com/office/powerpoint/2010/main" xmlns:p15="http://schemas.microsoft.com/office/powerpoint/2012/main" xmlns:ahyp="http://schemas.microsoft.com/office/drawing/2018/hyperlinkcolor" matchingName="Main point">
+<p:sldLayout xmlns:a="http://schemas.openxmlformats.org/drawingml/2006/main" xmlns:r="http://schemas.openxmlformats.org/officeDocument/2006/relationships" xmlns:p="http://schemas.openxmlformats.org/presentationml/2006/main" matchingName="Main point">
   <p:cSld name="MAIN_POINT">
     <p:bg>
       <p:bgPr>
         <a:solidFill>
           <a:schemeClr val="lt2"/>
         </a:solidFill>
+        <a:effectLst/>
       </p:bgPr>
     </p:bg>
     <p:spTree>
       <p:nvGrpSpPr>
-        <p:cNvPr id="36" name="Shape 36"/>
+        <p:cNvPr id="1" name="Shape 36"/>
         <p:cNvGrpSpPr/>
         <p:nvPr/>
       </p:nvGrpSpPr>
@@ -4405,7 +4523,9 @@
       <p:sp>
         <p:nvSpPr>
           <p:cNvPr id="37" name="Google Shape;37;p8"/>
-          <p:cNvSpPr txBox="1"/>
+          <p:cNvSpPr txBox="1">
+            <a:spLocks noGrp="1"/>
+          </p:cNvSpPr>
           <p:nvPr>
             <p:ph type="title"/>
           </p:nvPr>
@@ -4420,7 +4540,7 @@
           </a:prstGeom>
         </p:spPr>
         <p:txBody>
-          <a:bodyPr anchorCtr="0" anchor="ctr" bIns="91425" lIns="91425" spcFirstLastPara="1" rIns="91425" wrap="square" tIns="91425">
+          <a:bodyPr spcFirstLastPara="1" wrap="square" lIns="91425" tIns="91425" rIns="91425" bIns="91425" anchor="ctr" anchorCtr="0">
             <a:normAutofit/>
           </a:bodyPr>
           <a:lstStyle>
@@ -4587,15 +4707,19 @@
               </a:defRPr>
             </a:lvl9pPr>
           </a:lstStyle>
-          <a:p/>
+          <a:p>
+            <a:endParaRPr/>
+          </a:p>
         </p:txBody>
       </p:sp>
       <p:sp>
         <p:nvSpPr>
           <p:cNvPr id="38" name="Google Shape;38;p8"/>
-          <p:cNvSpPr txBox="1"/>
+          <p:cNvSpPr txBox="1">
+            <a:spLocks noGrp="1"/>
+          </p:cNvSpPr>
           <p:nvPr>
-            <p:ph idx="12" type="sldNum"/>
+            <p:ph type="sldNum" idx="12"/>
           </p:nvPr>
         </p:nvSpPr>
         <p:spPr>
@@ -4608,7 +4732,7 @@
           </a:prstGeom>
         </p:spPr>
         <p:txBody>
-          <a:bodyPr anchorCtr="0" anchor="ctr" bIns="91425" lIns="91425" spcFirstLastPara="1" rIns="91425" wrap="square" tIns="91425">
+          <a:bodyPr spcFirstLastPara="1" wrap="square" lIns="91425" tIns="91425" rIns="91425" bIns="91425" anchor="ctr" anchorCtr="0">
             <a:normAutofit/>
           </a:bodyPr>
           <a:lstStyle>
@@ -4686,7 +4810,7 @@
             </a:lvl9pPr>
           </a:lstStyle>
           <a:p>
-            <a:pPr indent="0" lvl="0" marL="0" rtl="0" algn="r">
+            <a:pPr marL="0" lvl="0" indent="0" algn="r" rtl="0">
               <a:spcBef>
                 <a:spcPts val="0"/>
               </a:spcBef>
@@ -4712,11 +4836,11 @@
 </file>
 
 <file path=ppt/slideLayouts/slideLayout8.xml><?xml version="1.0" encoding="utf-8"?>
-<p:sldLayout xmlns:a="http://schemas.openxmlformats.org/drawingml/2006/main" xmlns:r="http://schemas.openxmlformats.org/officeDocument/2006/relationships" xmlns:mc="http://schemas.openxmlformats.org/markup-compatibility/2006" xmlns:mv="urn:schemas-microsoft-com:mac:vml" xmlns:p="http://schemas.openxmlformats.org/presentationml/2006/main" xmlns:c="http://schemas.openxmlformats.org/drawingml/2006/chart" xmlns:dgm="http://schemas.openxmlformats.org/drawingml/2006/diagram" xmlns:o="urn:schemas-microsoft-com:office:office" xmlns:v="urn:schemas-microsoft-com:vml" xmlns:pvml="urn:schemas-microsoft-com:office:powerpoint" xmlns:com="http://schemas.openxmlformats.org/drawingml/2006/compatibility" xmlns:p14="http://schemas.microsoft.com/office/powerpoint/2010/main" xmlns:p15="http://schemas.microsoft.com/office/powerpoint/2012/main" xmlns:ahyp="http://schemas.microsoft.com/office/drawing/2018/hyperlinkcolor" matchingName="Section title and description">
+<p:sldLayout xmlns:a="http://schemas.openxmlformats.org/drawingml/2006/main" xmlns:r="http://schemas.openxmlformats.org/officeDocument/2006/relationships" xmlns:p="http://schemas.openxmlformats.org/presentationml/2006/main" matchingName="Section title and description">
   <p:cSld name="SECTION_TITLE_AND_DESCRIPTION">
     <p:spTree>
       <p:nvGrpSpPr>
-        <p:cNvPr id="39" name="Shape 39"/>
+        <p:cNvPr id="1" name="Shape 39"/>
         <p:cNvGrpSpPr/>
         <p:nvPr/>
       </p:nvGrpSpPr>
@@ -4750,12 +4874,12 @@
           </a:ln>
         </p:spPr>
         <p:txBody>
-          <a:bodyPr anchorCtr="0" anchor="ctr" bIns="91425" lIns="91425" spcFirstLastPara="1" rIns="91425" wrap="square" tIns="91425">
+          <a:bodyPr spcFirstLastPara="1" wrap="square" lIns="91425" tIns="91425" rIns="91425" bIns="91425" anchor="ctr" anchorCtr="0">
             <a:noAutofit/>
           </a:bodyPr>
           <a:lstStyle/>
           <a:p>
-            <a:pPr indent="0" lvl="0" marL="0" rtl="0" algn="l">
+            <a:pPr marL="0" lvl="0" indent="0" algn="l" rtl="0">
               <a:spcBef>
                 <a:spcPts val="0"/>
               </a:spcBef>
@@ -4764,9 +4888,6 @@
               </a:spcAft>
               <a:buNone/>
             </a:pPr>
-            <a:r>
-              <a:t/>
-            </a:r>
             <a:endParaRPr/>
           </a:p>
         </p:txBody>
@@ -4786,21 +4907,23 @@
             <a:avLst/>
           </a:prstGeom>
           <a:noFill/>
-          <a:ln cap="flat" cmpd="sng" w="19050">
+          <a:ln w="19050" cap="flat" cmpd="sng">
             <a:solidFill>
               <a:schemeClr val="lt2"/>
             </a:solidFill>
             <a:prstDash val="solid"/>
             <a:round/>
-            <a:headEnd len="sm" w="sm" type="none"/>
-            <a:tailEnd len="sm" w="sm" type="none"/>
+            <a:headEnd type="none" w="sm" len="sm"/>
+            <a:tailEnd type="none" w="sm" len="sm"/>
           </a:ln>
         </p:spPr>
       </p:cxnSp>
       <p:sp>
         <p:nvSpPr>
           <p:cNvPr id="42" name="Google Shape;42;p9"/>
-          <p:cNvSpPr txBox="1"/>
+          <p:cNvSpPr txBox="1">
+            <a:spLocks noGrp="1"/>
+          </p:cNvSpPr>
           <p:nvPr>
             <p:ph type="title"/>
           </p:nvPr>
@@ -4815,7 +4938,7 @@
           </a:prstGeom>
         </p:spPr>
         <p:txBody>
-          <a:bodyPr anchorCtr="0" anchor="b" bIns="91425" lIns="91425" spcFirstLastPara="1" rIns="91425" wrap="square" tIns="91425">
+          <a:bodyPr spcFirstLastPara="1" wrap="square" lIns="91425" tIns="91425" rIns="91425" bIns="91425" anchor="b" anchorCtr="0">
             <a:normAutofit/>
           </a:bodyPr>
           <a:lstStyle>
@@ -4982,15 +5105,19 @@
               </a:defRPr>
             </a:lvl9pPr>
           </a:lstStyle>
-          <a:p/>
+          <a:p>
+            <a:endParaRPr/>
+          </a:p>
         </p:txBody>
       </p:sp>
       <p:sp>
         <p:nvSpPr>
           <p:cNvPr id="43" name="Google Shape;43;p9"/>
-          <p:cNvSpPr txBox="1"/>
+          <p:cNvSpPr txBox="1">
+            <a:spLocks noGrp="1"/>
+          </p:cNvSpPr>
           <p:nvPr>
-            <p:ph idx="1" type="subTitle"/>
+            <p:ph type="subTitle" idx="1"/>
           </p:nvPr>
         </p:nvSpPr>
         <p:spPr>
@@ -5003,7 +5130,7 @@
           </a:prstGeom>
         </p:spPr>
         <p:txBody>
-          <a:bodyPr anchorCtr="0" anchor="t" bIns="91425" lIns="91425" spcFirstLastPara="1" rIns="91425" wrap="square" tIns="91425">
+          <a:bodyPr spcFirstLastPara="1" wrap="square" lIns="91425" tIns="91425" rIns="91425" bIns="91425" anchor="t" anchorCtr="0">
             <a:normAutofit/>
           </a:bodyPr>
           <a:lstStyle>
@@ -5134,15 +5261,19 @@
               <a:defRPr sz="2100"/>
             </a:lvl9pPr>
           </a:lstStyle>
-          <a:p/>
+          <a:p>
+            <a:endParaRPr/>
+          </a:p>
         </p:txBody>
       </p:sp>
       <p:sp>
         <p:nvSpPr>
           <p:cNvPr id="44" name="Google Shape;44;p9"/>
-          <p:cNvSpPr txBox="1"/>
+          <p:cNvSpPr txBox="1">
+            <a:spLocks noGrp="1"/>
+          </p:cNvSpPr>
           <p:nvPr>
-            <p:ph idx="2" type="body"/>
+            <p:ph type="body" idx="2"/>
           </p:nvPr>
         </p:nvSpPr>
         <p:spPr>
@@ -5155,11 +5286,11 @@
           </a:prstGeom>
         </p:spPr>
         <p:txBody>
-          <a:bodyPr anchorCtr="0" anchor="ctr" bIns="91425" lIns="91425" spcFirstLastPara="1" rIns="91425" wrap="square" tIns="91425">
+          <a:bodyPr spcFirstLastPara="1" wrap="square" lIns="91425" tIns="91425" rIns="91425" bIns="91425" anchor="ctr" anchorCtr="0">
             <a:normAutofit/>
           </a:bodyPr>
           <a:lstStyle>
-            <a:lvl1pPr indent="-342900" lvl="0" marL="457200">
+            <a:lvl1pPr marL="457200" lvl="0" indent="-342900">
               <a:spcBef>
                 <a:spcPts val="0"/>
               </a:spcBef>
@@ -5177,7 +5308,7 @@
                 </a:solidFill>
               </a:defRPr>
             </a:lvl1pPr>
-            <a:lvl2pPr indent="-317500" lvl="1" marL="914400">
+            <a:lvl2pPr marL="914400" lvl="1" indent="-317500">
               <a:spcBef>
                 <a:spcPts val="0"/>
               </a:spcBef>
@@ -5195,7 +5326,7 @@
                 </a:solidFill>
               </a:defRPr>
             </a:lvl2pPr>
-            <a:lvl3pPr indent="-317500" lvl="2" marL="1371600">
+            <a:lvl3pPr marL="1371600" lvl="2" indent="-317500">
               <a:spcBef>
                 <a:spcPts val="0"/>
               </a:spcBef>
@@ -5213,7 +5344,7 @@
                 </a:solidFill>
               </a:defRPr>
             </a:lvl3pPr>
-            <a:lvl4pPr indent="-317500" lvl="3" marL="1828800">
+            <a:lvl4pPr marL="1828800" lvl="3" indent="-317500">
               <a:spcBef>
                 <a:spcPts val="0"/>
               </a:spcBef>
@@ -5231,7 +5362,7 @@
                 </a:solidFill>
               </a:defRPr>
             </a:lvl4pPr>
-            <a:lvl5pPr indent="-317500" lvl="4" marL="2286000">
+            <a:lvl5pPr marL="2286000" lvl="4" indent="-317500">
               <a:spcBef>
                 <a:spcPts val="0"/>
               </a:spcBef>
@@ -5249,7 +5380,7 @@
                 </a:solidFill>
               </a:defRPr>
             </a:lvl5pPr>
-            <a:lvl6pPr indent="-317500" lvl="5" marL="2743200">
+            <a:lvl6pPr marL="2743200" lvl="5" indent="-317500">
               <a:spcBef>
                 <a:spcPts val="0"/>
               </a:spcBef>
@@ -5267,7 +5398,7 @@
                 </a:solidFill>
               </a:defRPr>
             </a:lvl6pPr>
-            <a:lvl7pPr indent="-317500" lvl="6" marL="3200400">
+            <a:lvl7pPr marL="3200400" lvl="6" indent="-317500">
               <a:spcBef>
                 <a:spcPts val="0"/>
               </a:spcBef>
@@ -5285,7 +5416,7 @@
                 </a:solidFill>
               </a:defRPr>
             </a:lvl7pPr>
-            <a:lvl8pPr indent="-317500" lvl="7" marL="3657600">
+            <a:lvl8pPr marL="3657600" lvl="7" indent="-317500">
               <a:spcBef>
                 <a:spcPts val="0"/>
               </a:spcBef>
@@ -5303,7 +5434,7 @@
                 </a:solidFill>
               </a:defRPr>
             </a:lvl8pPr>
-            <a:lvl9pPr indent="-317500" lvl="8" marL="4114800">
+            <a:lvl9pPr marL="4114800" lvl="8" indent="-317500">
               <a:spcBef>
                 <a:spcPts val="0"/>
               </a:spcBef>
@@ -5322,15 +5453,19 @@
               </a:defRPr>
             </a:lvl9pPr>
           </a:lstStyle>
-          <a:p/>
+          <a:p>
+            <a:endParaRPr/>
+          </a:p>
         </p:txBody>
       </p:sp>
       <p:sp>
         <p:nvSpPr>
           <p:cNvPr id="45" name="Google Shape;45;p9"/>
-          <p:cNvSpPr txBox="1"/>
+          <p:cNvSpPr txBox="1">
+            <a:spLocks noGrp="1"/>
+          </p:cNvSpPr>
           <p:nvPr>
-            <p:ph idx="12" type="sldNum"/>
+            <p:ph type="sldNum" idx="12"/>
           </p:nvPr>
         </p:nvSpPr>
         <p:spPr>
@@ -5343,7 +5478,7 @@
           </a:prstGeom>
         </p:spPr>
         <p:txBody>
-          <a:bodyPr anchorCtr="0" anchor="ctr" bIns="91425" lIns="91425" spcFirstLastPara="1" rIns="91425" wrap="square" tIns="91425">
+          <a:bodyPr spcFirstLastPara="1" wrap="square" lIns="91425" tIns="91425" rIns="91425" bIns="91425" anchor="ctr" anchorCtr="0">
             <a:normAutofit/>
           </a:bodyPr>
           <a:lstStyle>
@@ -5421,7 +5556,7 @@
             </a:lvl9pPr>
           </a:lstStyle>
           <a:p>
-            <a:pPr indent="0" lvl="0" marL="0" rtl="0" algn="r">
+            <a:pPr marL="0" lvl="0" indent="0" algn="r" rtl="0">
               <a:spcBef>
                 <a:spcPts val="0"/>
               </a:spcBef>
@@ -5447,11 +5582,11 @@
 </file>
 
 <file path=ppt/slideLayouts/slideLayout9.xml><?xml version="1.0" encoding="utf-8"?>
-<p:sldLayout xmlns:a="http://schemas.openxmlformats.org/drawingml/2006/main" xmlns:r="http://schemas.openxmlformats.org/officeDocument/2006/relationships" xmlns:mc="http://schemas.openxmlformats.org/markup-compatibility/2006" xmlns:mv="urn:schemas-microsoft-com:mac:vml" xmlns:p="http://schemas.openxmlformats.org/presentationml/2006/main" xmlns:c="http://schemas.openxmlformats.org/drawingml/2006/chart" xmlns:dgm="http://schemas.openxmlformats.org/drawingml/2006/diagram" xmlns:o="urn:schemas-microsoft-com:office:office" xmlns:v="urn:schemas-microsoft-com:vml" xmlns:pvml="urn:schemas-microsoft-com:office:powerpoint" xmlns:com="http://schemas.openxmlformats.org/drawingml/2006/compatibility" xmlns:p14="http://schemas.microsoft.com/office/powerpoint/2010/main" xmlns:p15="http://schemas.microsoft.com/office/powerpoint/2012/main" xmlns:ahyp="http://schemas.microsoft.com/office/drawing/2018/hyperlinkcolor" matchingName="Caption">
+<p:sldLayout xmlns:a="http://schemas.openxmlformats.org/drawingml/2006/main" xmlns:r="http://schemas.openxmlformats.org/officeDocument/2006/relationships" xmlns:p="http://schemas.openxmlformats.org/presentationml/2006/main" matchingName="Caption">
   <p:cSld name="CAPTION_ONLY">
     <p:spTree>
       <p:nvGrpSpPr>
-        <p:cNvPr id="46" name="Shape 46"/>
+        <p:cNvPr id="1" name="Shape 46"/>
         <p:cNvGrpSpPr/>
         <p:nvPr/>
       </p:nvGrpSpPr>
@@ -5466,9 +5601,11 @@
       <p:sp>
         <p:nvSpPr>
           <p:cNvPr id="47" name="Google Shape;47;p10"/>
-          <p:cNvSpPr txBox="1"/>
+          <p:cNvSpPr txBox="1">
+            <a:spLocks noGrp="1"/>
+          </p:cNvSpPr>
           <p:nvPr>
-            <p:ph idx="1" type="body"/>
+            <p:ph type="body" idx="1"/>
           </p:nvPr>
         </p:nvSpPr>
         <p:spPr>
@@ -5481,11 +5618,11 @@
           </a:prstGeom>
         </p:spPr>
         <p:txBody>
-          <a:bodyPr anchorCtr="0" anchor="ctr" bIns="91425" lIns="91425" spcFirstLastPara="1" rIns="91425" wrap="square" tIns="91425">
+          <a:bodyPr spcFirstLastPara="1" wrap="square" lIns="91425" tIns="91425" rIns="91425" bIns="91425" anchor="ctr" anchorCtr="0">
             <a:normAutofit/>
           </a:bodyPr>
           <a:lstStyle>
-            <a:lvl1pPr indent="-228600" lvl="0" marL="457200">
+            <a:lvl1pPr marL="457200" lvl="0" indent="-228600">
               <a:lnSpc>
                 <a:spcPct val="100000"/>
               </a:lnSpc>
@@ -5500,15 +5637,19 @@
               <a:defRPr/>
             </a:lvl1pPr>
           </a:lstStyle>
-          <a:p/>
+          <a:p>
+            <a:endParaRPr/>
+          </a:p>
         </p:txBody>
       </p:sp>
       <p:sp>
         <p:nvSpPr>
           <p:cNvPr id="48" name="Google Shape;48;p10"/>
-          <p:cNvSpPr txBox="1"/>
+          <p:cNvSpPr txBox="1">
+            <a:spLocks noGrp="1"/>
+          </p:cNvSpPr>
           <p:nvPr>
-            <p:ph idx="12" type="sldNum"/>
+            <p:ph type="sldNum" idx="12"/>
           </p:nvPr>
         </p:nvSpPr>
         <p:spPr>
@@ -5521,7 +5662,7 @@
           </a:prstGeom>
         </p:spPr>
         <p:txBody>
-          <a:bodyPr anchorCtr="0" anchor="ctr" bIns="91425" lIns="91425" spcFirstLastPara="1" rIns="91425" wrap="square" tIns="91425">
+          <a:bodyPr spcFirstLastPara="1" wrap="square" lIns="91425" tIns="91425" rIns="91425" bIns="91425" anchor="ctr" anchorCtr="0">
             <a:normAutofit/>
           </a:bodyPr>
           <a:lstStyle>
@@ -5563,7 +5704,7 @@
             </a:lvl9pPr>
           </a:lstStyle>
           <a:p>
-            <a:pPr indent="0" lvl="0" marL="0" rtl="0" algn="r">
+            <a:pPr marL="0" lvl="0" indent="0" algn="r" rtl="0">
               <a:spcBef>
                 <a:spcPts val="0"/>
               </a:spcBef>
@@ -5589,18 +5730,19 @@
 </file>
 
 <file path=ppt/slideMasters/slideMaster1.xml><?xml version="1.0" encoding="utf-8"?>
-<p:sldMaster xmlns:a="http://schemas.openxmlformats.org/drawingml/2006/main" xmlns:r="http://schemas.openxmlformats.org/officeDocument/2006/relationships" xmlns:mc="http://schemas.openxmlformats.org/markup-compatibility/2006" xmlns:mv="urn:schemas-microsoft-com:mac:vml" xmlns:p="http://schemas.openxmlformats.org/presentationml/2006/main" xmlns:c="http://schemas.openxmlformats.org/drawingml/2006/chart" xmlns:dgm="http://schemas.openxmlformats.org/drawingml/2006/diagram" xmlns:o="urn:schemas-microsoft-com:office:office" xmlns:v="urn:schemas-microsoft-com:vml" xmlns:pvml="urn:schemas-microsoft-com:office:powerpoint" xmlns:com="http://schemas.openxmlformats.org/drawingml/2006/compatibility" xmlns:p14="http://schemas.microsoft.com/office/powerpoint/2010/main" xmlns:p15="http://schemas.microsoft.com/office/powerpoint/2012/main" xmlns:ahyp="http://schemas.microsoft.com/office/drawing/2018/hyperlinkcolor">
+<p:sldMaster xmlns:a="http://schemas.openxmlformats.org/drawingml/2006/main" xmlns:r="http://schemas.openxmlformats.org/officeDocument/2006/relationships" xmlns:p="http://schemas.openxmlformats.org/presentationml/2006/main">
   <p:cSld name="paperback">
     <p:bg>
       <p:bgPr>
         <a:solidFill>
           <a:schemeClr val="accent1"/>
         </a:solidFill>
+        <a:effectLst/>
       </p:bgPr>
     </p:bg>
     <p:spTree>
       <p:nvGrpSpPr>
-        <p:cNvPr id="5" name="Shape 5"/>
+        <p:cNvPr id="1" name="Shape 5"/>
         <p:cNvGrpSpPr/>
         <p:nvPr/>
       </p:nvGrpSpPr>
@@ -5615,7 +5757,9 @@
       <p:sp>
         <p:nvSpPr>
           <p:cNvPr id="6" name="Google Shape;6;p1"/>
-          <p:cNvSpPr txBox="1"/>
+          <p:cNvSpPr txBox="1">
+            <a:spLocks noGrp="1"/>
+          </p:cNvSpPr>
           <p:nvPr>
             <p:ph type="title"/>
           </p:nvPr>
@@ -5634,7 +5778,7 @@
           </a:ln>
         </p:spPr>
         <p:txBody>
-          <a:bodyPr anchorCtr="0" anchor="t" bIns="91425" lIns="91425" spcFirstLastPara="1" rIns="91425" wrap="square" tIns="91425">
+          <a:bodyPr spcFirstLastPara="1" wrap="square" lIns="91425" tIns="91425" rIns="91425" bIns="91425" anchor="t" anchorCtr="0">
             <a:normAutofit/>
           </a:bodyPr>
           <a:lstStyle>
@@ -5846,15 +5990,19 @@
               </a:defRPr>
             </a:lvl9pPr>
           </a:lstStyle>
-          <a:p/>
+          <a:p>
+            <a:endParaRPr/>
+          </a:p>
         </p:txBody>
       </p:sp>
       <p:sp>
         <p:nvSpPr>
           <p:cNvPr id="7" name="Google Shape;7;p1"/>
-          <p:cNvSpPr txBox="1"/>
+          <p:cNvSpPr txBox="1">
+            <a:spLocks noGrp="1"/>
+          </p:cNvSpPr>
           <p:nvPr>
-            <p:ph idx="1" type="body"/>
+            <p:ph type="body" idx="1"/>
           </p:nvPr>
         </p:nvSpPr>
         <p:spPr>
@@ -5871,11 +6019,11 @@
           </a:ln>
         </p:spPr>
         <p:txBody>
-          <a:bodyPr anchorCtr="0" anchor="t" bIns="91425" lIns="91425" spcFirstLastPara="1" rIns="91425" wrap="square" tIns="91425">
+          <a:bodyPr spcFirstLastPara="1" wrap="square" lIns="91425" tIns="91425" rIns="91425" bIns="91425" anchor="t" anchorCtr="0">
             <a:normAutofit/>
           </a:bodyPr>
           <a:lstStyle>
-            <a:lvl1pPr indent="-342900" lvl="0" marL="457200">
+            <a:lvl1pPr marL="457200" lvl="0" indent="-342900">
               <a:lnSpc>
                 <a:spcPct val="115000"/>
               </a:lnSpc>
@@ -5901,7 +6049,7 @@
                 <a:sym typeface="Old Standard TT"/>
               </a:defRPr>
             </a:lvl1pPr>
-            <a:lvl2pPr indent="-317500" lvl="1" marL="914400">
+            <a:lvl2pPr marL="914400" lvl="1" indent="-317500">
               <a:lnSpc>
                 <a:spcPct val="115000"/>
               </a:lnSpc>
@@ -5927,7 +6075,7 @@
                 <a:sym typeface="Old Standard TT"/>
               </a:defRPr>
             </a:lvl2pPr>
-            <a:lvl3pPr indent="-317500" lvl="2" marL="1371600">
+            <a:lvl3pPr marL="1371600" lvl="2" indent="-317500">
               <a:lnSpc>
                 <a:spcPct val="115000"/>
               </a:lnSpc>
@@ -5953,7 +6101,7 @@
                 <a:sym typeface="Old Standard TT"/>
               </a:defRPr>
             </a:lvl3pPr>
-            <a:lvl4pPr indent="-317500" lvl="3" marL="1828800">
+            <a:lvl4pPr marL="1828800" lvl="3" indent="-317500">
               <a:lnSpc>
                 <a:spcPct val="115000"/>
               </a:lnSpc>
@@ -5979,7 +6127,7 @@
                 <a:sym typeface="Old Standard TT"/>
               </a:defRPr>
             </a:lvl4pPr>
-            <a:lvl5pPr indent="-317500" lvl="4" marL="2286000">
+            <a:lvl5pPr marL="2286000" lvl="4" indent="-317500">
               <a:lnSpc>
                 <a:spcPct val="115000"/>
               </a:lnSpc>
@@ -6005,7 +6153,7 @@
                 <a:sym typeface="Old Standard TT"/>
               </a:defRPr>
             </a:lvl5pPr>
-            <a:lvl6pPr indent="-317500" lvl="5" marL="2743200">
+            <a:lvl6pPr marL="2743200" lvl="5" indent="-317500">
               <a:lnSpc>
                 <a:spcPct val="115000"/>
               </a:lnSpc>
@@ -6031,7 +6179,7 @@
                 <a:sym typeface="Old Standard TT"/>
               </a:defRPr>
             </a:lvl6pPr>
-            <a:lvl7pPr indent="-317500" lvl="6" marL="3200400">
+            <a:lvl7pPr marL="3200400" lvl="6" indent="-317500">
               <a:lnSpc>
                 <a:spcPct val="115000"/>
               </a:lnSpc>
@@ -6057,7 +6205,7 @@
                 <a:sym typeface="Old Standard TT"/>
               </a:defRPr>
             </a:lvl7pPr>
-            <a:lvl8pPr indent="-317500" lvl="7" marL="3657600">
+            <a:lvl8pPr marL="3657600" lvl="7" indent="-317500">
               <a:lnSpc>
                 <a:spcPct val="115000"/>
               </a:lnSpc>
@@ -6083,7 +6231,7 @@
                 <a:sym typeface="Old Standard TT"/>
               </a:defRPr>
             </a:lvl8pPr>
-            <a:lvl9pPr indent="-317500" lvl="8" marL="4114800">
+            <a:lvl9pPr marL="4114800" lvl="8" indent="-317500">
               <a:lnSpc>
                 <a:spcPct val="115000"/>
               </a:lnSpc>
@@ -6110,15 +6258,19 @@
               </a:defRPr>
             </a:lvl9pPr>
           </a:lstStyle>
-          <a:p/>
+          <a:p>
+            <a:endParaRPr/>
+          </a:p>
         </p:txBody>
       </p:sp>
       <p:sp>
         <p:nvSpPr>
           <p:cNvPr id="8" name="Google Shape;8;p1"/>
-          <p:cNvSpPr txBox="1"/>
+          <p:cNvSpPr txBox="1">
+            <a:spLocks noGrp="1"/>
+          </p:cNvSpPr>
           <p:nvPr>
-            <p:ph idx="12" type="sldNum"/>
+            <p:ph type="sldNum" idx="12"/>
           </p:nvPr>
         </p:nvSpPr>
         <p:spPr>
@@ -6135,7 +6287,7 @@
           </a:ln>
         </p:spPr>
         <p:txBody>
-          <a:bodyPr anchorCtr="0" anchor="ctr" bIns="91425" lIns="91425" spcFirstLastPara="1" rIns="91425" wrap="square" tIns="91425">
+          <a:bodyPr spcFirstLastPara="1" wrap="square" lIns="91425" tIns="91425" rIns="91425" bIns="91425" anchor="ctr" anchorCtr="0">
             <a:normAutofit/>
           </a:bodyPr>
           <a:lstStyle>
@@ -6249,7 +6401,7 @@
             </a:lvl9pPr>
           </a:lstStyle>
           <a:p>
-            <a:pPr indent="0" lvl="0" marL="0" rtl="0" algn="r">
+            <a:pPr marL="0" lvl="0" indent="0" algn="r" rtl="0">
               <a:spcBef>
                 <a:spcPts val="0"/>
               </a:spcBef>
@@ -6268,7 +6420,7 @@
       </p:sp>
     </p:spTree>
   </p:cSld>
-  <p:clrMap accent1="accent1" accent2="accent2" accent3="accent3" accent4="accent4" accent5="accent5" accent6="accent6" bg1="lt1" bg2="dk2" tx1="dk1" tx2="lt2" folHlink="folHlink" hlink="hlink"/>
+  <p:clrMap bg1="lt1" tx1="dk1" bg2="dk2" tx2="lt2" accent1="accent1" accent2="accent2" accent3="accent3" accent4="accent4" accent5="accent5" accent6="accent6" hlink="hlink" folHlink="folHlink"/>
   <p:sldLayoutIdLst>
     <p:sldLayoutId id="2147483648" r:id="rId1"/>
     <p:sldLayoutId id="2147483649" r:id="rId2"/>
@@ -6282,10 +6434,10 @@
     <p:sldLayoutId id="2147483657" r:id="rId10"/>
     <p:sldLayoutId id="2147483658" r:id="rId11"/>
   </p:sldLayoutIdLst>
-  <p:hf dt="0" ftr="0" hdr="0" sldNum="0"/>
+  <p:hf sldNum="0" hdr="0" ftr="0" dt="0"/>
   <p:txStyles>
     <p:titleStyle>
-      <a:defPPr lvl="0" marR="0" rtl="0" algn="l">
+      <a:defPPr marR="0" lvl="0" algn="l" rtl="0">
         <a:lnSpc>
           <a:spcPct val="100000"/>
         </a:lnSpc>
@@ -6296,7 +6448,7 @@
           <a:spcPts val="0"/>
         </a:spcAft>
       </a:defPPr>
-      <a:lvl1pPr lvl="0" marR="0" rtl="0" algn="l">
+      <a:lvl1pPr marR="0" lvl="0" algn="l" rtl="0">
         <a:lnSpc>
           <a:spcPct val="100000"/>
         </a:lnSpc>
@@ -6310,7 +6462,7 @@
           <a:srgbClr val="000000"/>
         </a:buClr>
         <a:buFont typeface="Arial"/>
-        <a:defRPr b="0" i="0" sz="1400" u="none" cap="none" strike="noStrike">
+        <a:defRPr sz="1400" b="0" i="0" u="none" strike="noStrike" cap="none">
           <a:solidFill>
             <a:srgbClr val="000000"/>
           </a:solidFill>
@@ -6320,7 +6472,7 @@
           <a:sym typeface="Arial"/>
         </a:defRPr>
       </a:lvl1pPr>
-      <a:lvl2pPr lvl="1" marR="0" rtl="0" algn="l">
+      <a:lvl2pPr marR="0" lvl="1" algn="l" rtl="0">
         <a:lnSpc>
           <a:spcPct val="100000"/>
         </a:lnSpc>
@@ -6334,7 +6486,7 @@
           <a:srgbClr val="000000"/>
         </a:buClr>
         <a:buFont typeface="Arial"/>
-        <a:defRPr b="0" i="0" sz="1400" u="none" cap="none" strike="noStrike">
+        <a:defRPr sz="1400" b="0" i="0" u="none" strike="noStrike" cap="none">
           <a:solidFill>
             <a:srgbClr val="000000"/>
           </a:solidFill>
@@ -6344,7 +6496,7 @@
           <a:sym typeface="Arial"/>
         </a:defRPr>
       </a:lvl2pPr>
-      <a:lvl3pPr lvl="2" marR="0" rtl="0" algn="l">
+      <a:lvl3pPr marR="0" lvl="2" algn="l" rtl="0">
         <a:lnSpc>
           <a:spcPct val="100000"/>
         </a:lnSpc>
@@ -6358,7 +6510,7 @@
           <a:srgbClr val="000000"/>
         </a:buClr>
         <a:buFont typeface="Arial"/>
-        <a:defRPr b="0" i="0" sz="1400" u="none" cap="none" strike="noStrike">
+        <a:defRPr sz="1400" b="0" i="0" u="none" strike="noStrike" cap="none">
           <a:solidFill>
             <a:srgbClr val="000000"/>
           </a:solidFill>
@@ -6368,7 +6520,7 @@
           <a:sym typeface="Arial"/>
         </a:defRPr>
       </a:lvl3pPr>
-      <a:lvl4pPr lvl="3" marR="0" rtl="0" algn="l">
+      <a:lvl4pPr marR="0" lvl="3" algn="l" rtl="0">
         <a:lnSpc>
           <a:spcPct val="100000"/>
         </a:lnSpc>
@@ -6382,7 +6534,7 @@
           <a:srgbClr val="000000"/>
         </a:buClr>
         <a:buFont typeface="Arial"/>
-        <a:defRPr b="0" i="0" sz="1400" u="none" cap="none" strike="noStrike">
+        <a:defRPr sz="1400" b="0" i="0" u="none" strike="noStrike" cap="none">
           <a:solidFill>
             <a:srgbClr val="000000"/>
           </a:solidFill>
@@ -6392,7 +6544,7 @@
           <a:sym typeface="Arial"/>
         </a:defRPr>
       </a:lvl4pPr>
-      <a:lvl5pPr lvl="4" marR="0" rtl="0" algn="l">
+      <a:lvl5pPr marR="0" lvl="4" algn="l" rtl="0">
         <a:lnSpc>
           <a:spcPct val="100000"/>
         </a:lnSpc>
@@ -6406,7 +6558,7 @@
           <a:srgbClr val="000000"/>
         </a:buClr>
         <a:buFont typeface="Arial"/>
-        <a:defRPr b="0" i="0" sz="1400" u="none" cap="none" strike="noStrike">
+        <a:defRPr sz="1400" b="0" i="0" u="none" strike="noStrike" cap="none">
           <a:solidFill>
             <a:srgbClr val="000000"/>
           </a:solidFill>
@@ -6416,7 +6568,7 @@
           <a:sym typeface="Arial"/>
         </a:defRPr>
       </a:lvl5pPr>
-      <a:lvl6pPr lvl="5" marR="0" rtl="0" algn="l">
+      <a:lvl6pPr marR="0" lvl="5" algn="l" rtl="0">
         <a:lnSpc>
           <a:spcPct val="100000"/>
         </a:lnSpc>
@@ -6430,7 +6582,7 @@
           <a:srgbClr val="000000"/>
         </a:buClr>
         <a:buFont typeface="Arial"/>
-        <a:defRPr b="0" i="0" sz="1400" u="none" cap="none" strike="noStrike">
+        <a:defRPr sz="1400" b="0" i="0" u="none" strike="noStrike" cap="none">
           <a:solidFill>
             <a:srgbClr val="000000"/>
           </a:solidFill>
@@ -6440,7 +6592,7 @@
           <a:sym typeface="Arial"/>
         </a:defRPr>
       </a:lvl6pPr>
-      <a:lvl7pPr lvl="6" marR="0" rtl="0" algn="l">
+      <a:lvl7pPr marR="0" lvl="6" algn="l" rtl="0">
         <a:lnSpc>
           <a:spcPct val="100000"/>
         </a:lnSpc>
@@ -6454,7 +6606,7 @@
           <a:srgbClr val="000000"/>
         </a:buClr>
         <a:buFont typeface="Arial"/>
-        <a:defRPr b="0" i="0" sz="1400" u="none" cap="none" strike="noStrike">
+        <a:defRPr sz="1400" b="0" i="0" u="none" strike="noStrike" cap="none">
           <a:solidFill>
             <a:srgbClr val="000000"/>
           </a:solidFill>
@@ -6464,7 +6616,7 @@
           <a:sym typeface="Arial"/>
         </a:defRPr>
       </a:lvl7pPr>
-      <a:lvl8pPr lvl="7" marR="0" rtl="0" algn="l">
+      <a:lvl8pPr marR="0" lvl="7" algn="l" rtl="0">
         <a:lnSpc>
           <a:spcPct val="100000"/>
         </a:lnSpc>
@@ -6478,7 +6630,7 @@
           <a:srgbClr val="000000"/>
         </a:buClr>
         <a:buFont typeface="Arial"/>
-        <a:defRPr b="0" i="0" sz="1400" u="none" cap="none" strike="noStrike">
+        <a:defRPr sz="1400" b="0" i="0" u="none" strike="noStrike" cap="none">
           <a:solidFill>
             <a:srgbClr val="000000"/>
           </a:solidFill>
@@ -6488,7 +6640,7 @@
           <a:sym typeface="Arial"/>
         </a:defRPr>
       </a:lvl8pPr>
-      <a:lvl9pPr lvl="8" marR="0" rtl="0" algn="l">
+      <a:lvl9pPr marR="0" lvl="8" algn="l" rtl="0">
         <a:lnSpc>
           <a:spcPct val="100000"/>
         </a:lnSpc>
@@ -6502,7 +6654,7 @@
           <a:srgbClr val="000000"/>
         </a:buClr>
         <a:buFont typeface="Arial"/>
-        <a:defRPr b="0" i="0" sz="1400" u="none" cap="none" strike="noStrike">
+        <a:defRPr sz="1400" b="0" i="0" u="none" strike="noStrike" cap="none">
           <a:solidFill>
             <a:srgbClr val="000000"/>
           </a:solidFill>
@@ -6514,7 +6666,7 @@
       </a:lvl9pPr>
     </p:titleStyle>
     <p:bodyStyle>
-      <a:defPPr lvl="0" marR="0" rtl="0" algn="l">
+      <a:defPPr marR="0" lvl="0" algn="l" rtl="0">
         <a:lnSpc>
           <a:spcPct val="100000"/>
         </a:lnSpc>
@@ -6525,7 +6677,7 @@
           <a:spcPts val="0"/>
         </a:spcAft>
       </a:defPPr>
-      <a:lvl1pPr lvl="0" marR="0" rtl="0" algn="l">
+      <a:lvl1pPr marR="0" lvl="0" algn="l" rtl="0">
         <a:lnSpc>
           <a:spcPct val="100000"/>
         </a:lnSpc>
@@ -6539,7 +6691,7 @@
           <a:srgbClr val="000000"/>
         </a:buClr>
         <a:buFont typeface="Arial"/>
-        <a:defRPr b="0" i="0" sz="1400" u="none" cap="none" strike="noStrike">
+        <a:defRPr sz="1400" b="0" i="0" u="none" strike="noStrike" cap="none">
           <a:solidFill>
             <a:srgbClr val="000000"/>
           </a:solidFill>
@@ -6549,7 +6701,7 @@
           <a:sym typeface="Arial"/>
         </a:defRPr>
       </a:lvl1pPr>
-      <a:lvl2pPr lvl="1" marR="0" rtl="0" algn="l">
+      <a:lvl2pPr marR="0" lvl="1" algn="l" rtl="0">
         <a:lnSpc>
           <a:spcPct val="100000"/>
         </a:lnSpc>
@@ -6563,7 +6715,7 @@
           <a:srgbClr val="000000"/>
         </a:buClr>
         <a:buFont typeface="Arial"/>
-        <a:defRPr b="0" i="0" sz="1400" u="none" cap="none" strike="noStrike">
+        <a:defRPr sz="1400" b="0" i="0" u="none" strike="noStrike" cap="none">
           <a:solidFill>
             <a:srgbClr val="000000"/>
           </a:solidFill>
@@ -6573,7 +6725,7 @@
           <a:sym typeface="Arial"/>
         </a:defRPr>
       </a:lvl2pPr>
-      <a:lvl3pPr lvl="2" marR="0" rtl="0" algn="l">
+      <a:lvl3pPr marR="0" lvl="2" algn="l" rtl="0">
         <a:lnSpc>
           <a:spcPct val="100000"/>
         </a:lnSpc>
@@ -6587,7 +6739,7 @@
           <a:srgbClr val="000000"/>
         </a:buClr>
         <a:buFont typeface="Arial"/>
-        <a:defRPr b="0" i="0" sz="1400" u="none" cap="none" strike="noStrike">
+        <a:defRPr sz="1400" b="0" i="0" u="none" strike="noStrike" cap="none">
           <a:solidFill>
             <a:srgbClr val="000000"/>
           </a:solidFill>
@@ -6597,7 +6749,7 @@
           <a:sym typeface="Arial"/>
         </a:defRPr>
       </a:lvl3pPr>
-      <a:lvl4pPr lvl="3" marR="0" rtl="0" algn="l">
+      <a:lvl4pPr marR="0" lvl="3" algn="l" rtl="0">
         <a:lnSpc>
           <a:spcPct val="100000"/>
         </a:lnSpc>
@@ -6611,7 +6763,7 @@
           <a:srgbClr val="000000"/>
         </a:buClr>
         <a:buFont typeface="Arial"/>
-        <a:defRPr b="0" i="0" sz="1400" u="none" cap="none" strike="noStrike">
+        <a:defRPr sz="1400" b="0" i="0" u="none" strike="noStrike" cap="none">
           <a:solidFill>
             <a:srgbClr val="000000"/>
           </a:solidFill>
@@ -6621,7 +6773,7 @@
           <a:sym typeface="Arial"/>
         </a:defRPr>
       </a:lvl4pPr>
-      <a:lvl5pPr lvl="4" marR="0" rtl="0" algn="l">
+      <a:lvl5pPr marR="0" lvl="4" algn="l" rtl="0">
         <a:lnSpc>
           <a:spcPct val="100000"/>
         </a:lnSpc>
@@ -6635,7 +6787,7 @@
           <a:srgbClr val="000000"/>
         </a:buClr>
         <a:buFont typeface="Arial"/>
-        <a:defRPr b="0" i="0" sz="1400" u="none" cap="none" strike="noStrike">
+        <a:defRPr sz="1400" b="0" i="0" u="none" strike="noStrike" cap="none">
           <a:solidFill>
             <a:srgbClr val="000000"/>
           </a:solidFill>
@@ -6645,7 +6797,7 @@
           <a:sym typeface="Arial"/>
         </a:defRPr>
       </a:lvl5pPr>
-      <a:lvl6pPr lvl="5" marR="0" rtl="0" algn="l">
+      <a:lvl6pPr marR="0" lvl="5" algn="l" rtl="0">
         <a:lnSpc>
           <a:spcPct val="100000"/>
         </a:lnSpc>
@@ -6659,7 +6811,7 @@
           <a:srgbClr val="000000"/>
         </a:buClr>
         <a:buFont typeface="Arial"/>
-        <a:defRPr b="0" i="0" sz="1400" u="none" cap="none" strike="noStrike">
+        <a:defRPr sz="1400" b="0" i="0" u="none" strike="noStrike" cap="none">
           <a:solidFill>
             <a:srgbClr val="000000"/>
           </a:solidFill>
@@ -6669,7 +6821,7 @@
           <a:sym typeface="Arial"/>
         </a:defRPr>
       </a:lvl6pPr>
-      <a:lvl7pPr lvl="6" marR="0" rtl="0" algn="l">
+      <a:lvl7pPr marR="0" lvl="6" algn="l" rtl="0">
         <a:lnSpc>
           <a:spcPct val="100000"/>
         </a:lnSpc>
@@ -6683,7 +6835,7 @@
           <a:srgbClr val="000000"/>
         </a:buClr>
         <a:buFont typeface="Arial"/>
-        <a:defRPr b="0" i="0" sz="1400" u="none" cap="none" strike="noStrike">
+        <a:defRPr sz="1400" b="0" i="0" u="none" strike="noStrike" cap="none">
           <a:solidFill>
             <a:srgbClr val="000000"/>
           </a:solidFill>
@@ -6693,7 +6845,7 @@
           <a:sym typeface="Arial"/>
         </a:defRPr>
       </a:lvl7pPr>
-      <a:lvl8pPr lvl="7" marR="0" rtl="0" algn="l">
+      <a:lvl8pPr marR="0" lvl="7" algn="l" rtl="0">
         <a:lnSpc>
           <a:spcPct val="100000"/>
         </a:lnSpc>
@@ -6707,7 +6859,7 @@
           <a:srgbClr val="000000"/>
         </a:buClr>
         <a:buFont typeface="Arial"/>
-        <a:defRPr b="0" i="0" sz="1400" u="none" cap="none" strike="noStrike">
+        <a:defRPr sz="1400" b="0" i="0" u="none" strike="noStrike" cap="none">
           <a:solidFill>
             <a:srgbClr val="000000"/>
           </a:solidFill>
@@ -6717,7 +6869,7 @@
           <a:sym typeface="Arial"/>
         </a:defRPr>
       </a:lvl8pPr>
-      <a:lvl9pPr lvl="8" marR="0" rtl="0" algn="l">
+      <a:lvl9pPr marR="0" lvl="8" algn="l" rtl="0">
         <a:lnSpc>
           <a:spcPct val="100000"/>
         </a:lnSpc>
@@ -6731,7 +6883,7 @@
           <a:srgbClr val="000000"/>
         </a:buClr>
         <a:buFont typeface="Arial"/>
-        <a:defRPr b="0" i="0" sz="1400" u="none" cap="none" strike="noStrike">
+        <a:defRPr sz="1400" b="0" i="0" u="none" strike="noStrike" cap="none">
           <a:solidFill>
             <a:srgbClr val="000000"/>
           </a:solidFill>
@@ -6743,7 +6895,7 @@
       </a:lvl9pPr>
     </p:bodyStyle>
     <p:otherStyle>
-      <a:defPPr lvl="0" marR="0" rtl="0" algn="l">
+      <a:defPPr marR="0" lvl="0" algn="l" rtl="0">
         <a:lnSpc>
           <a:spcPct val="100000"/>
         </a:lnSpc>
@@ -6754,7 +6906,7 @@
           <a:spcPts val="0"/>
         </a:spcAft>
       </a:defPPr>
-      <a:lvl1pPr lvl="0" marR="0" rtl="0" algn="l">
+      <a:lvl1pPr marR="0" lvl="0" algn="l" rtl="0">
         <a:lnSpc>
           <a:spcPct val="100000"/>
         </a:lnSpc>
@@ -6768,7 +6920,7 @@
           <a:srgbClr val="000000"/>
         </a:buClr>
         <a:buFont typeface="Arial"/>
-        <a:defRPr b="0" i="0" sz="1400" u="none" cap="none" strike="noStrike">
+        <a:defRPr sz="1400" b="0" i="0" u="none" strike="noStrike" cap="none">
           <a:solidFill>
             <a:srgbClr val="000000"/>
           </a:solidFill>
@@ -6778,7 +6930,7 @@
           <a:sym typeface="Arial"/>
         </a:defRPr>
       </a:lvl1pPr>
-      <a:lvl2pPr lvl="1" marR="0" rtl="0" algn="l">
+      <a:lvl2pPr marR="0" lvl="1" algn="l" rtl="0">
         <a:lnSpc>
           <a:spcPct val="100000"/>
         </a:lnSpc>
@@ -6792,7 +6944,7 @@
           <a:srgbClr val="000000"/>
         </a:buClr>
         <a:buFont typeface="Arial"/>
-        <a:defRPr b="0" i="0" sz="1400" u="none" cap="none" strike="noStrike">
+        <a:defRPr sz="1400" b="0" i="0" u="none" strike="noStrike" cap="none">
           <a:solidFill>
             <a:srgbClr val="000000"/>
           </a:solidFill>
@@ -6802,7 +6954,7 @@
           <a:sym typeface="Arial"/>
         </a:defRPr>
       </a:lvl2pPr>
-      <a:lvl3pPr lvl="2" marR="0" rtl="0" algn="l">
+      <a:lvl3pPr marR="0" lvl="2" algn="l" rtl="0">
         <a:lnSpc>
           <a:spcPct val="100000"/>
         </a:lnSpc>
@@ -6816,7 +6968,7 @@
           <a:srgbClr val="000000"/>
         </a:buClr>
         <a:buFont typeface="Arial"/>
-        <a:defRPr b="0" i="0" sz="1400" u="none" cap="none" strike="noStrike">
+        <a:defRPr sz="1400" b="0" i="0" u="none" strike="noStrike" cap="none">
           <a:solidFill>
             <a:srgbClr val="000000"/>
           </a:solidFill>
@@ -6826,7 +6978,7 @@
           <a:sym typeface="Arial"/>
         </a:defRPr>
       </a:lvl3pPr>
-      <a:lvl4pPr lvl="3" marR="0" rtl="0" algn="l">
+      <a:lvl4pPr marR="0" lvl="3" algn="l" rtl="0">
         <a:lnSpc>
           <a:spcPct val="100000"/>
         </a:lnSpc>
@@ -6840,7 +6992,7 @@
           <a:srgbClr val="000000"/>
         </a:buClr>
         <a:buFont typeface="Arial"/>
-        <a:defRPr b="0" i="0" sz="1400" u="none" cap="none" strike="noStrike">
+        <a:defRPr sz="1400" b="0" i="0" u="none" strike="noStrike" cap="none">
           <a:solidFill>
             <a:srgbClr val="000000"/>
           </a:solidFill>
@@ -6850,7 +7002,7 @@
           <a:sym typeface="Arial"/>
         </a:defRPr>
       </a:lvl4pPr>
-      <a:lvl5pPr lvl="4" marR="0" rtl="0" algn="l">
+      <a:lvl5pPr marR="0" lvl="4" algn="l" rtl="0">
         <a:lnSpc>
           <a:spcPct val="100000"/>
         </a:lnSpc>
@@ -6864,7 +7016,7 @@
           <a:srgbClr val="000000"/>
         </a:buClr>
         <a:buFont typeface="Arial"/>
-        <a:defRPr b="0" i="0" sz="1400" u="none" cap="none" strike="noStrike">
+        <a:defRPr sz="1400" b="0" i="0" u="none" strike="noStrike" cap="none">
           <a:solidFill>
             <a:srgbClr val="000000"/>
           </a:solidFill>
@@ -6874,7 +7026,7 @@
           <a:sym typeface="Arial"/>
         </a:defRPr>
       </a:lvl5pPr>
-      <a:lvl6pPr lvl="5" marR="0" rtl="0" algn="l">
+      <a:lvl6pPr marR="0" lvl="5" algn="l" rtl="0">
         <a:lnSpc>
           <a:spcPct val="100000"/>
         </a:lnSpc>
@@ -6888,7 +7040,7 @@
           <a:srgbClr val="000000"/>
         </a:buClr>
         <a:buFont typeface="Arial"/>
-        <a:defRPr b="0" i="0" sz="1400" u="none" cap="none" strike="noStrike">
+        <a:defRPr sz="1400" b="0" i="0" u="none" strike="noStrike" cap="none">
           <a:solidFill>
             <a:srgbClr val="000000"/>
           </a:solidFill>
@@ -6898,7 +7050,7 @@
           <a:sym typeface="Arial"/>
         </a:defRPr>
       </a:lvl6pPr>
-      <a:lvl7pPr lvl="6" marR="0" rtl="0" algn="l">
+      <a:lvl7pPr marR="0" lvl="6" algn="l" rtl="0">
         <a:lnSpc>
           <a:spcPct val="100000"/>
         </a:lnSpc>
@@ -6912,7 +7064,7 @@
           <a:srgbClr val="000000"/>
         </a:buClr>
         <a:buFont typeface="Arial"/>
-        <a:defRPr b="0" i="0" sz="1400" u="none" cap="none" strike="noStrike">
+        <a:defRPr sz="1400" b="0" i="0" u="none" strike="noStrike" cap="none">
           <a:solidFill>
             <a:srgbClr val="000000"/>
           </a:solidFill>
@@ -6922,7 +7074,7 @@
           <a:sym typeface="Arial"/>
         </a:defRPr>
       </a:lvl7pPr>
-      <a:lvl8pPr lvl="7" marR="0" rtl="0" algn="l">
+      <a:lvl8pPr marR="0" lvl="7" algn="l" rtl="0">
         <a:lnSpc>
           <a:spcPct val="100000"/>
         </a:lnSpc>
@@ -6936,7 +7088,7 @@
           <a:srgbClr val="000000"/>
         </a:buClr>
         <a:buFont typeface="Arial"/>
-        <a:defRPr b="0" i="0" sz="1400" u="none" cap="none" strike="noStrike">
+        <a:defRPr sz="1400" b="0" i="0" u="none" strike="noStrike" cap="none">
           <a:solidFill>
             <a:srgbClr val="000000"/>
           </a:solidFill>
@@ -6946,7 +7098,7 @@
           <a:sym typeface="Arial"/>
         </a:defRPr>
       </a:lvl8pPr>
-      <a:lvl9pPr lvl="8" marR="0" rtl="0" algn="l">
+      <a:lvl9pPr marR="0" lvl="8" algn="l" rtl="0">
         <a:lnSpc>
           <a:spcPct val="100000"/>
         </a:lnSpc>
@@ -6960,7 +7112,7 @@
           <a:srgbClr val="000000"/>
         </a:buClr>
         <a:buFont typeface="Arial"/>
-        <a:defRPr b="0" i="0" sz="1400" u="none" cap="none" strike="noStrike">
+        <a:defRPr sz="1400" b="0" i="0" u="none" strike="noStrike" cap="none">
           <a:solidFill>
             <a:srgbClr val="000000"/>
           </a:solidFill>
@@ -6976,11 +7128,11 @@
 </file>
 
 <file path=ppt/slides/slide1.xml><?xml version="1.0" encoding="utf-8"?>
-<p:sld xmlns:a="http://schemas.openxmlformats.org/drawingml/2006/main" xmlns:r="http://schemas.openxmlformats.org/officeDocument/2006/relationships" xmlns:mc="http://schemas.openxmlformats.org/markup-compatibility/2006" xmlns:mv="urn:schemas-microsoft-com:mac:vml" xmlns:p="http://schemas.openxmlformats.org/presentationml/2006/main" xmlns:c="http://schemas.openxmlformats.org/drawingml/2006/chart" xmlns:dgm="http://schemas.openxmlformats.org/drawingml/2006/diagram" xmlns:o="urn:schemas-microsoft-com:office:office" xmlns:v="urn:schemas-microsoft-com:vml" xmlns:pvml="urn:schemas-microsoft-com:office:powerpoint" xmlns:com="http://schemas.openxmlformats.org/drawingml/2006/compatibility" xmlns:p14="http://schemas.microsoft.com/office/powerpoint/2010/main" xmlns:p15="http://schemas.microsoft.com/office/powerpoint/2012/main" xmlns:ahyp="http://schemas.microsoft.com/office/drawing/2018/hyperlinkcolor">
+<p:sld xmlns:a="http://schemas.openxmlformats.org/drawingml/2006/main" xmlns:r="http://schemas.openxmlformats.org/officeDocument/2006/relationships" xmlns:p="http://schemas.openxmlformats.org/presentationml/2006/main">
   <p:cSld>
     <p:spTree>
       <p:nvGrpSpPr>
-        <p:cNvPr id="58" name="Shape 58"/>
+        <p:cNvPr id="1" name="Shape 58"/>
         <p:cNvGrpSpPr/>
         <p:nvPr/>
       </p:nvGrpSpPr>
@@ -6995,7 +7147,9 @@
       <p:sp>
         <p:nvSpPr>
           <p:cNvPr id="59" name="Google Shape;59;p13"/>
-          <p:cNvSpPr txBox="1"/>
+          <p:cNvSpPr txBox="1">
+            <a:spLocks noGrp="1"/>
+          </p:cNvSpPr>
           <p:nvPr>
             <p:ph type="ctrTitle"/>
           </p:nvPr>
@@ -7010,12 +7164,12 @@
           </a:prstGeom>
         </p:spPr>
         <p:txBody>
-          <a:bodyPr anchorCtr="0" anchor="b" bIns="91425" lIns="91425" spcFirstLastPara="1" rIns="91425" wrap="square" tIns="91425">
+          <a:bodyPr spcFirstLastPara="1" wrap="square" lIns="91425" tIns="91425" rIns="91425" bIns="91425" anchor="b" anchorCtr="0">
             <a:normAutofit/>
           </a:bodyPr>
           <a:lstStyle/>
           <a:p>
-            <a:pPr indent="0" lvl="0" marL="0" rtl="0" algn="l">
+            <a:pPr marL="0" lvl="0" indent="0" algn="l" rtl="0">
               <a:spcBef>
                 <a:spcPts val="0"/>
               </a:spcBef>
@@ -7035,9 +7189,11 @@
       <p:sp>
         <p:nvSpPr>
           <p:cNvPr id="60" name="Google Shape;60;p13"/>
-          <p:cNvSpPr txBox="1"/>
+          <p:cNvSpPr txBox="1">
+            <a:spLocks noGrp="1"/>
+          </p:cNvSpPr>
           <p:nvPr>
-            <p:ph idx="1" type="subTitle"/>
+            <p:ph type="subTitle" idx="1"/>
           </p:nvPr>
         </p:nvSpPr>
         <p:spPr>
@@ -7050,12 +7206,12 @@
           </a:prstGeom>
         </p:spPr>
         <p:txBody>
-          <a:bodyPr anchorCtr="0" anchor="t" bIns="91425" lIns="91425" spcFirstLastPara="1" rIns="91425" wrap="square" tIns="91425">
+          <a:bodyPr spcFirstLastPara="1" wrap="square" lIns="91425" tIns="91425" rIns="91425" bIns="91425" anchor="t" anchorCtr="0">
             <a:normAutofit/>
           </a:bodyPr>
           <a:lstStyle/>
           <a:p>
-            <a:pPr indent="0" lvl="0" marL="0" rtl="0" algn="l">
+            <a:pPr marL="0" lvl="0" indent="0" algn="l" rtl="0">
               <a:spcBef>
                 <a:spcPts val="0"/>
               </a:spcBef>
@@ -7081,11 +7237,11 @@
 </file>
 
 <file path=ppt/slides/slide2.xml><?xml version="1.0" encoding="utf-8"?>
-<p:sld xmlns:a="http://schemas.openxmlformats.org/drawingml/2006/main" xmlns:r="http://schemas.openxmlformats.org/officeDocument/2006/relationships" xmlns:mc="http://schemas.openxmlformats.org/markup-compatibility/2006" xmlns:mv="urn:schemas-microsoft-com:mac:vml" xmlns:p="http://schemas.openxmlformats.org/presentationml/2006/main" xmlns:c="http://schemas.openxmlformats.org/drawingml/2006/chart" xmlns:dgm="http://schemas.openxmlformats.org/drawingml/2006/diagram" xmlns:o="urn:schemas-microsoft-com:office:office" xmlns:v="urn:schemas-microsoft-com:vml" xmlns:pvml="urn:schemas-microsoft-com:office:powerpoint" xmlns:com="http://schemas.openxmlformats.org/drawingml/2006/compatibility" xmlns:p14="http://schemas.microsoft.com/office/powerpoint/2010/main" xmlns:p15="http://schemas.microsoft.com/office/powerpoint/2012/main" xmlns:ahyp="http://schemas.microsoft.com/office/drawing/2018/hyperlinkcolor">
+<p:sld xmlns:a="http://schemas.openxmlformats.org/drawingml/2006/main" xmlns:r="http://schemas.openxmlformats.org/officeDocument/2006/relationships" xmlns:p="http://schemas.openxmlformats.org/presentationml/2006/main">
   <p:cSld>
     <p:spTree>
       <p:nvGrpSpPr>
-        <p:cNvPr id="64" name="Shape 64"/>
+        <p:cNvPr id="1" name="Shape 64"/>
         <p:cNvGrpSpPr/>
         <p:nvPr/>
       </p:nvGrpSpPr>
@@ -7100,7 +7256,9 @@
       <p:sp>
         <p:nvSpPr>
           <p:cNvPr id="65" name="Google Shape;65;p14"/>
-          <p:cNvSpPr txBox="1"/>
+          <p:cNvSpPr txBox="1">
+            <a:spLocks noGrp="1"/>
+          </p:cNvSpPr>
           <p:nvPr>
             <p:ph type="title"/>
           </p:nvPr>
@@ -7115,12 +7273,12 @@
           </a:prstGeom>
         </p:spPr>
         <p:txBody>
-          <a:bodyPr anchorCtr="0" anchor="t" bIns="91425" lIns="91425" spcFirstLastPara="1" rIns="91425" wrap="square" tIns="91425">
+          <a:bodyPr spcFirstLastPara="1" wrap="square" lIns="91425" tIns="91425" rIns="91425" bIns="91425" anchor="t" anchorCtr="0">
             <a:normAutofit fontScale="90000"/>
           </a:bodyPr>
           <a:lstStyle/>
           <a:p>
-            <a:pPr indent="0" lvl="0" marL="0" rtl="0" algn="l">
+            <a:pPr marL="0" lvl="0" indent="0" algn="l" rtl="0">
               <a:spcBef>
                 <a:spcPts val="0"/>
               </a:spcBef>
@@ -7140,9 +7298,11 @@
       <p:sp>
         <p:nvSpPr>
           <p:cNvPr id="66" name="Google Shape;66;p14"/>
-          <p:cNvSpPr txBox="1"/>
+          <p:cNvSpPr txBox="1">
+            <a:spLocks noGrp="1"/>
+          </p:cNvSpPr>
           <p:nvPr>
-            <p:ph idx="1" type="body"/>
+            <p:ph type="body" idx="1"/>
           </p:nvPr>
         </p:nvSpPr>
         <p:spPr>
@@ -7155,12 +7315,12 @@
           </a:prstGeom>
         </p:spPr>
         <p:txBody>
-          <a:bodyPr anchorCtr="0" anchor="t" bIns="91425" lIns="91425" spcFirstLastPara="1" rIns="91425" wrap="square" tIns="91425">
+          <a:bodyPr spcFirstLastPara="1" wrap="square" lIns="91425" tIns="91425" rIns="91425" bIns="91425" anchor="t" anchorCtr="0">
             <a:normAutofit fontScale="92500" lnSpcReduction="20000"/>
           </a:bodyPr>
           <a:lstStyle/>
           <a:p>
-            <a:pPr indent="0" lvl="0" marL="0" rtl="0" algn="l">
+            <a:pPr marL="0" lvl="0" indent="0" algn="l" rtl="0">
               <a:spcBef>
                 <a:spcPts val="0"/>
               </a:spcBef>
@@ -7171,16 +7331,12 @@
             </a:pPr>
             <a:r>
               <a:rPr lang="en"/>
-              <a:t>Objective: </a:t>
+              <a:t>Objective: Develop a game device to play Pong.</a:t>
             </a:r>
-            <a:r>
-              <a:rPr lang="en"/>
-              <a:t>Develop a game device to play Pong.</a:t>
-            </a:r>
-            <a:endParaRPr/>
-          </a:p>
-          <a:p>
-            <a:pPr indent="0" lvl="0" marL="0" rtl="0" algn="l">
+            <a:endParaRPr/>
+          </a:p>
+          <a:p>
+            <a:pPr marL="0" lvl="0" indent="0" algn="l" rtl="0">
               <a:spcBef>
                 <a:spcPts val="1200"/>
               </a:spcBef>
@@ -7196,7 +7352,7 @@
             <a:endParaRPr/>
           </a:p>
           <a:p>
-            <a:pPr indent="-334327" lvl="0" marL="457200" rtl="0" algn="l">
+            <a:pPr marL="457200" lvl="0" indent="-334327" algn="l" rtl="0">
               <a:spcBef>
                 <a:spcPts val="1200"/>
               </a:spcBef>
@@ -7213,7 +7369,7 @@
             <a:endParaRPr/>
           </a:p>
           <a:p>
-            <a:pPr indent="-334327" lvl="0" marL="457200" rtl="0" algn="l">
+            <a:pPr marL="457200" lvl="0" indent="-334327" algn="l" rtl="0">
               <a:spcBef>
                 <a:spcPts val="0"/>
               </a:spcBef>
@@ -7230,7 +7386,7 @@
             <a:endParaRPr/>
           </a:p>
           <a:p>
-            <a:pPr indent="-334327" lvl="0" marL="457200" rtl="0" algn="l">
+            <a:pPr marL="457200" lvl="0" indent="-334327" algn="l" rtl="0">
               <a:spcBef>
                 <a:spcPts val="0"/>
               </a:spcBef>
@@ -7247,7 +7403,7 @@
             <a:endParaRPr/>
           </a:p>
           <a:p>
-            <a:pPr indent="-334327" lvl="0" marL="457200" rtl="0" algn="l">
+            <a:pPr marL="457200" lvl="0" indent="-334327" algn="l" rtl="0">
               <a:spcBef>
                 <a:spcPts val="0"/>
               </a:spcBef>
@@ -7264,7 +7420,7 @@
             <a:endParaRPr/>
           </a:p>
           <a:p>
-            <a:pPr indent="0" lvl="0" marL="0" rtl="0" algn="l">
+            <a:pPr marL="0" lvl="0" indent="0" algn="l" rtl="0">
               <a:spcBef>
                 <a:spcPts val="1200"/>
               </a:spcBef>
@@ -7280,7 +7436,7 @@
             <a:endParaRPr/>
           </a:p>
           <a:p>
-            <a:pPr indent="-334327" lvl="0" marL="457200" rtl="0" algn="l">
+            <a:pPr marL="457200" lvl="0" indent="-334327" algn="l" rtl="0">
               <a:spcBef>
                 <a:spcPts val="1200"/>
               </a:spcBef>
@@ -7335,11 +7491,11 @@
 </file>
 
 <file path=ppt/slides/slide3.xml><?xml version="1.0" encoding="utf-8"?>
-<p:sld xmlns:a="http://schemas.openxmlformats.org/drawingml/2006/main" xmlns:r="http://schemas.openxmlformats.org/officeDocument/2006/relationships" xmlns:mc="http://schemas.openxmlformats.org/markup-compatibility/2006" xmlns:mv="urn:schemas-microsoft-com:mac:vml" xmlns:p="http://schemas.openxmlformats.org/presentationml/2006/main" xmlns:c="http://schemas.openxmlformats.org/drawingml/2006/chart" xmlns:dgm="http://schemas.openxmlformats.org/drawingml/2006/diagram" xmlns:o="urn:schemas-microsoft-com:office:office" xmlns:v="urn:schemas-microsoft-com:vml" xmlns:pvml="urn:schemas-microsoft-com:office:powerpoint" xmlns:com="http://schemas.openxmlformats.org/drawingml/2006/compatibility" xmlns:p14="http://schemas.microsoft.com/office/powerpoint/2010/main" xmlns:p15="http://schemas.microsoft.com/office/powerpoint/2012/main" xmlns:ahyp="http://schemas.microsoft.com/office/drawing/2018/hyperlinkcolor">
+<p:sld xmlns:a="http://schemas.openxmlformats.org/drawingml/2006/main" xmlns:r="http://schemas.openxmlformats.org/officeDocument/2006/relationships" xmlns:p="http://schemas.openxmlformats.org/presentationml/2006/main">
   <p:cSld>
     <p:spTree>
       <p:nvGrpSpPr>
-        <p:cNvPr id="71" name="Shape 71"/>
+        <p:cNvPr id="1" name="Shape 71"/>
         <p:cNvGrpSpPr/>
         <p:nvPr/>
       </p:nvGrpSpPr>
@@ -7354,7 +7510,9 @@
       <p:sp>
         <p:nvSpPr>
           <p:cNvPr id="72" name="Google Shape;72;p15"/>
-          <p:cNvSpPr txBox="1"/>
+          <p:cNvSpPr txBox="1">
+            <a:spLocks noGrp="1"/>
+          </p:cNvSpPr>
           <p:nvPr>
             <p:ph type="title"/>
           </p:nvPr>
@@ -7369,12 +7527,12 @@
           </a:prstGeom>
         </p:spPr>
         <p:txBody>
-          <a:bodyPr anchorCtr="0" anchor="t" bIns="91425" lIns="91425" spcFirstLastPara="1" rIns="91425" wrap="square" tIns="91425">
+          <a:bodyPr spcFirstLastPara="1" wrap="square" lIns="91425" tIns="91425" rIns="91425" bIns="91425" anchor="t" anchorCtr="0">
             <a:normAutofit fontScale="90000"/>
           </a:bodyPr>
           <a:lstStyle/>
           <a:p>
-            <a:pPr indent="0" lvl="0" marL="0" rtl="0" algn="l">
+            <a:pPr marL="0" lvl="0" indent="0" algn="l" rtl="0">
               <a:spcBef>
                 <a:spcPts val="0"/>
               </a:spcBef>
@@ -7394,9 +7552,11 @@
       <p:sp>
         <p:nvSpPr>
           <p:cNvPr id="73" name="Google Shape;73;p15"/>
-          <p:cNvSpPr txBox="1"/>
+          <p:cNvSpPr txBox="1">
+            <a:spLocks noGrp="1"/>
+          </p:cNvSpPr>
           <p:nvPr>
-            <p:ph idx="1" type="body"/>
+            <p:ph type="body" idx="1"/>
           </p:nvPr>
         </p:nvSpPr>
         <p:spPr>
@@ -7409,12 +7569,12 @@
           </a:prstGeom>
         </p:spPr>
         <p:txBody>
-          <a:bodyPr anchorCtr="0" anchor="t" bIns="91425" lIns="91425" spcFirstLastPara="1" rIns="91425" wrap="square" tIns="91425">
+          <a:bodyPr spcFirstLastPara="1" wrap="square" lIns="91425" tIns="91425" rIns="91425" bIns="91425" anchor="t" anchorCtr="0">
             <a:normAutofit lnSpcReduction="10000"/>
           </a:bodyPr>
           <a:lstStyle/>
           <a:p>
-            <a:pPr indent="-342900" lvl="0" marL="457200" rtl="0" algn="l">
+            <a:pPr marL="457200" lvl="0" indent="-342900" algn="l" rtl="0">
               <a:spcBef>
                 <a:spcPts val="0"/>
               </a:spcBef>
@@ -7431,7 +7591,7 @@
             <a:endParaRPr/>
           </a:p>
           <a:p>
-            <a:pPr indent="-317500" lvl="1" marL="914400" rtl="0" algn="l">
+            <a:pPr marL="914400" lvl="1" indent="-317500" algn="l" rtl="0">
               <a:spcBef>
                 <a:spcPts val="0"/>
               </a:spcBef>
@@ -7448,7 +7608,7 @@
             <a:endParaRPr/>
           </a:p>
           <a:p>
-            <a:pPr indent="-342900" lvl="0" marL="457200" rtl="0" algn="l">
+            <a:pPr marL="457200" lvl="0" indent="-342900" algn="l" rtl="0">
               <a:spcBef>
                 <a:spcPts val="0"/>
               </a:spcBef>
@@ -7465,7 +7625,7 @@
             <a:endParaRPr/>
           </a:p>
           <a:p>
-            <a:pPr indent="-317500" lvl="1" marL="914400" rtl="0" algn="l">
+            <a:pPr marL="914400" lvl="1" indent="-317500" algn="l" rtl="0">
               <a:spcBef>
                 <a:spcPts val="0"/>
               </a:spcBef>
@@ -7477,16 +7637,12 @@
             </a:pPr>
             <a:r>
               <a:rPr lang="en"/>
-              <a:t>Role: Input devices for player paddle control, </a:t>
+              <a:t>Role: Input devices for player paddle control, providing analog signals for the movement of </a:t>
             </a:r>
-            <a:r>
-              <a:rPr lang="en"/>
-              <a:t>providing analog signals for the movement of </a:t>
-            </a:r>
-            <a:endParaRPr/>
-          </a:p>
-          <a:p>
-            <a:pPr indent="-317500" lvl="1" marL="914400" rtl="0" algn="l">
+            <a:endParaRPr/>
+          </a:p>
+          <a:p>
+            <a:pPr marL="914400" lvl="1" indent="-317500" algn="l" rtl="0">
               <a:spcBef>
                 <a:spcPts val="0"/>
               </a:spcBef>
@@ -7503,7 +7659,7 @@
             <a:endParaRPr/>
           </a:p>
           <a:p>
-            <a:pPr indent="-342900" lvl="0" marL="457200" rtl="0" algn="l">
+            <a:pPr marL="457200" lvl="0" indent="-342900" algn="l" rtl="0">
               <a:spcBef>
                 <a:spcPts val="0"/>
               </a:spcBef>
@@ -7520,7 +7676,7 @@
             <a:endParaRPr/>
           </a:p>
           <a:p>
-            <a:pPr indent="-317500" lvl="1" marL="914400" rtl="0" algn="l">
+            <a:pPr marL="914400" lvl="1" indent="-317500" algn="l" rtl="0">
               <a:spcBef>
                 <a:spcPts val="0"/>
               </a:spcBef>
@@ -7537,7 +7693,7 @@
             <a:endParaRPr/>
           </a:p>
           <a:p>
-            <a:pPr indent="-342900" lvl="0" marL="457200" rtl="0" algn="l">
+            <a:pPr marL="457200" lvl="0" indent="-342900" algn="l" rtl="0">
               <a:spcBef>
                 <a:spcPts val="0"/>
               </a:spcBef>
@@ -7554,7 +7710,7 @@
             <a:endParaRPr/>
           </a:p>
           <a:p>
-            <a:pPr indent="-317500" lvl="1" marL="914400" rtl="0" algn="l">
+            <a:pPr marL="914400" lvl="1" indent="-317500" algn="l" rtl="0">
               <a:spcBef>
                 <a:spcPts val="0"/>
               </a:spcBef>
@@ -7571,7 +7727,7 @@
             <a:endParaRPr/>
           </a:p>
           <a:p>
-            <a:pPr indent="-342900" lvl="0" marL="457200" rtl="0" algn="l">
+            <a:pPr marL="457200" lvl="0" indent="-342900" algn="l" rtl="0">
               <a:spcBef>
                 <a:spcPts val="0"/>
               </a:spcBef>
@@ -7588,7 +7744,7 @@
             <a:endParaRPr/>
           </a:p>
           <a:p>
-            <a:pPr indent="-317500" lvl="1" marL="914400" rtl="0" algn="l">
+            <a:pPr marL="914400" lvl="1" indent="-317500" algn="l" rtl="0">
               <a:spcBef>
                 <a:spcPts val="0"/>
               </a:spcBef>
@@ -7615,11 +7771,11 @@
 </file>
 
 <file path=ppt/slides/slide4.xml><?xml version="1.0" encoding="utf-8"?>
-<p:sld xmlns:a="http://schemas.openxmlformats.org/drawingml/2006/main" xmlns:r="http://schemas.openxmlformats.org/officeDocument/2006/relationships" xmlns:mc="http://schemas.openxmlformats.org/markup-compatibility/2006" xmlns:mv="urn:schemas-microsoft-com:mac:vml" xmlns:p="http://schemas.openxmlformats.org/presentationml/2006/main" xmlns:c="http://schemas.openxmlformats.org/drawingml/2006/chart" xmlns:dgm="http://schemas.openxmlformats.org/drawingml/2006/diagram" xmlns:o="urn:schemas-microsoft-com:office:office" xmlns:v="urn:schemas-microsoft-com:vml" xmlns:pvml="urn:schemas-microsoft-com:office:powerpoint" xmlns:com="http://schemas.openxmlformats.org/drawingml/2006/compatibility" xmlns:p14="http://schemas.microsoft.com/office/powerpoint/2010/main" xmlns:p15="http://schemas.microsoft.com/office/powerpoint/2012/main" xmlns:ahyp="http://schemas.microsoft.com/office/drawing/2018/hyperlinkcolor">
+<p:sld xmlns:a="http://schemas.openxmlformats.org/drawingml/2006/main" xmlns:r="http://schemas.openxmlformats.org/officeDocument/2006/relationships" xmlns:p="http://schemas.openxmlformats.org/presentationml/2006/main">
   <p:cSld>
     <p:spTree>
       <p:nvGrpSpPr>
-        <p:cNvPr id="77" name="Shape 77"/>
+        <p:cNvPr id="1" name="Shape 77"/>
         <p:cNvGrpSpPr/>
         <p:nvPr/>
       </p:nvGrpSpPr>
@@ -7634,7 +7790,9 @@
       <p:sp>
         <p:nvSpPr>
           <p:cNvPr id="78" name="Google Shape;78;p16"/>
-          <p:cNvSpPr txBox="1"/>
+          <p:cNvSpPr txBox="1">
+            <a:spLocks noGrp="1"/>
+          </p:cNvSpPr>
           <p:nvPr>
             <p:ph type="title"/>
           </p:nvPr>
@@ -7649,12 +7807,12 @@
           </a:prstGeom>
         </p:spPr>
         <p:txBody>
-          <a:bodyPr anchorCtr="0" anchor="t" bIns="91425" lIns="91425" spcFirstLastPara="1" rIns="91425" wrap="square" tIns="91425">
+          <a:bodyPr spcFirstLastPara="1" wrap="square" lIns="91425" tIns="91425" rIns="91425" bIns="91425" anchor="t" anchorCtr="0">
             <a:normAutofit fontScale="90000"/>
           </a:bodyPr>
           <a:lstStyle/>
           <a:p>
-            <a:pPr indent="0" lvl="0" marL="0" rtl="0" algn="l">
+            <a:pPr marL="0" lvl="0" indent="0" algn="l" rtl="0">
               <a:spcBef>
                 <a:spcPts val="0"/>
               </a:spcBef>
@@ -7674,9 +7832,11 @@
       <p:sp>
         <p:nvSpPr>
           <p:cNvPr id="79" name="Google Shape;79;p16"/>
-          <p:cNvSpPr txBox="1"/>
+          <p:cNvSpPr txBox="1">
+            <a:spLocks noGrp="1"/>
+          </p:cNvSpPr>
           <p:nvPr>
-            <p:ph idx="1" type="body"/>
+            <p:ph type="body" idx="1"/>
           </p:nvPr>
         </p:nvSpPr>
         <p:spPr>
@@ -7689,12 +7849,12 @@
           </a:prstGeom>
         </p:spPr>
         <p:txBody>
-          <a:bodyPr anchorCtr="0" anchor="t" bIns="91425" lIns="91425" spcFirstLastPara="1" rIns="91425" wrap="square" tIns="91425">
+          <a:bodyPr spcFirstLastPara="1" wrap="square" lIns="91425" tIns="91425" rIns="91425" bIns="91425" anchor="t" anchorCtr="0">
             <a:normAutofit/>
           </a:bodyPr>
           <a:lstStyle/>
           <a:p>
-            <a:pPr indent="-342900" lvl="0" marL="457200" rtl="0" algn="l">
+            <a:pPr marL="457200" lvl="0" indent="-342900" algn="l" rtl="0">
               <a:spcBef>
                 <a:spcPts val="0"/>
               </a:spcBef>
@@ -7705,13 +7865,13 @@
               <a:buAutoNum type="arabicPeriod"/>
             </a:pPr>
             <a:r>
-              <a:rPr lang="en"/>
+              <a:rPr lang="en" dirty="0"/>
               <a:t>User Authentication</a:t>
             </a:r>
-            <a:endParaRPr/>
-          </a:p>
-          <a:p>
-            <a:pPr indent="-342900" lvl="0" marL="457200" rtl="0" algn="l">
+            <a:endParaRPr dirty="0"/>
+          </a:p>
+          <a:p>
+            <a:pPr marL="457200" lvl="0" indent="-342900" algn="l" rtl="0">
               <a:spcBef>
                 <a:spcPts val="0"/>
               </a:spcBef>
@@ -7722,13 +7882,13 @@
               <a:buAutoNum type="arabicPeriod"/>
             </a:pPr>
             <a:r>
-              <a:rPr lang="en"/>
+              <a:rPr lang="en" dirty="0"/>
               <a:t>Joystick Input</a:t>
             </a:r>
-            <a:endParaRPr/>
-          </a:p>
-          <a:p>
-            <a:pPr indent="-342900" lvl="0" marL="457200" rtl="0" algn="l">
+            <a:endParaRPr dirty="0"/>
+          </a:p>
+          <a:p>
+            <a:pPr marL="457200" lvl="0" indent="-342900" algn="l" rtl="0">
               <a:spcBef>
                 <a:spcPts val="0"/>
               </a:spcBef>
@@ -7739,13 +7899,13 @@
               <a:buAutoNum type="arabicPeriod"/>
             </a:pPr>
             <a:r>
-              <a:rPr lang="en"/>
+              <a:rPr lang="en" dirty="0"/>
               <a:t>Game Logic</a:t>
             </a:r>
-            <a:endParaRPr/>
-          </a:p>
-          <a:p>
-            <a:pPr indent="-342900" lvl="0" marL="457200" rtl="0" algn="l">
+            <a:endParaRPr dirty="0"/>
+          </a:p>
+          <a:p>
+            <a:pPr marL="457200" lvl="0" indent="-342900" algn="l" rtl="0">
               <a:spcBef>
                 <a:spcPts val="0"/>
               </a:spcBef>
@@ -7756,13 +7916,13 @@
               <a:buAutoNum type="arabicPeriod"/>
             </a:pPr>
             <a:r>
-              <a:rPr lang="en"/>
+              <a:rPr lang="en" dirty="0"/>
               <a:t>Display Output</a:t>
             </a:r>
-            <a:endParaRPr/>
-          </a:p>
-          <a:p>
-            <a:pPr indent="-342900" lvl="0" marL="457200" rtl="0" algn="l">
+            <a:endParaRPr dirty="0"/>
+          </a:p>
+          <a:p>
+            <a:pPr marL="457200" lvl="0" indent="-342900" algn="l" rtl="0">
               <a:spcBef>
                 <a:spcPts val="0"/>
               </a:spcBef>
@@ -7776,23 +7936,7 @@
               <a:rPr lang="en"/>
               <a:t>Audio Feedback</a:t>
             </a:r>
-            <a:endParaRPr/>
-          </a:p>
-          <a:p>
-            <a:pPr indent="0" lvl="0" marL="0" rtl="0" algn="l">
-              <a:spcBef>
-                <a:spcPts val="1200"/>
-              </a:spcBef>
-              <a:spcAft>
-                <a:spcPts val="1200"/>
-              </a:spcAft>
-              <a:buNone/>
-            </a:pPr>
-            <a:r>
-              <a:rPr lang="en"/>
-              <a:t>Note: Ball Logic is constantly updating through the system flow.</a:t>
-            </a:r>
-            <a:endParaRPr/>
+            <a:endParaRPr dirty="0"/>
           </a:p>
         </p:txBody>
       </p:sp>
@@ -7805,11 +7949,11 @@
 </file>
 
 <file path=ppt/slides/slide5.xml><?xml version="1.0" encoding="utf-8"?>
-<p:sld xmlns:a="http://schemas.openxmlformats.org/drawingml/2006/main" xmlns:r="http://schemas.openxmlformats.org/officeDocument/2006/relationships" xmlns:mc="http://schemas.openxmlformats.org/markup-compatibility/2006" xmlns:mv="urn:schemas-microsoft-com:mac:vml" xmlns:p="http://schemas.openxmlformats.org/presentationml/2006/main" xmlns:c="http://schemas.openxmlformats.org/drawingml/2006/chart" xmlns:dgm="http://schemas.openxmlformats.org/drawingml/2006/diagram" xmlns:o="urn:schemas-microsoft-com:office:office" xmlns:v="urn:schemas-microsoft-com:vml" xmlns:pvml="urn:schemas-microsoft-com:office:powerpoint" xmlns:com="http://schemas.openxmlformats.org/drawingml/2006/compatibility" xmlns:p14="http://schemas.microsoft.com/office/powerpoint/2010/main" xmlns:p15="http://schemas.microsoft.com/office/powerpoint/2012/main" xmlns:ahyp="http://schemas.microsoft.com/office/drawing/2018/hyperlinkcolor">
+<p:sld xmlns:a="http://schemas.openxmlformats.org/drawingml/2006/main" xmlns:r="http://schemas.openxmlformats.org/officeDocument/2006/relationships" xmlns:p="http://schemas.openxmlformats.org/presentationml/2006/main">
   <p:cSld>
     <p:spTree>
       <p:nvGrpSpPr>
-        <p:cNvPr id="83" name="Shape 83"/>
+        <p:cNvPr id="1" name="Shape 83"/>
         <p:cNvGrpSpPr/>
         <p:nvPr/>
       </p:nvGrpSpPr>
@@ -7824,7 +7968,9 @@
       <p:sp>
         <p:nvSpPr>
           <p:cNvPr id="84" name="Google Shape;84;p17"/>
-          <p:cNvSpPr txBox="1"/>
+          <p:cNvSpPr txBox="1">
+            <a:spLocks noGrp="1"/>
+          </p:cNvSpPr>
           <p:nvPr>
             <p:ph type="title"/>
           </p:nvPr>
@@ -7839,12 +7985,12 @@
           </a:prstGeom>
         </p:spPr>
         <p:txBody>
-          <a:bodyPr anchorCtr="0" anchor="t" bIns="91425" lIns="91425" spcFirstLastPara="1" rIns="91425" wrap="square" tIns="91425">
+          <a:bodyPr spcFirstLastPara="1" wrap="square" lIns="91425" tIns="91425" rIns="91425" bIns="91425" anchor="t" anchorCtr="0">
             <a:normAutofit fontScale="90000"/>
           </a:bodyPr>
           <a:lstStyle/>
           <a:p>
-            <a:pPr indent="0" lvl="0" marL="0" rtl="0" algn="l">
+            <a:pPr marL="0" lvl="0" indent="0" algn="l" rtl="0">
               <a:spcBef>
                 <a:spcPts val="0"/>
               </a:spcBef>
@@ -7864,9 +8010,11 @@
       <p:sp>
         <p:nvSpPr>
           <p:cNvPr id="85" name="Google Shape;85;p17"/>
-          <p:cNvSpPr txBox="1"/>
+          <p:cNvSpPr txBox="1">
+            <a:spLocks noGrp="1"/>
+          </p:cNvSpPr>
           <p:nvPr>
-            <p:ph idx="1" type="body"/>
+            <p:ph type="body" idx="1"/>
           </p:nvPr>
         </p:nvSpPr>
         <p:spPr>
@@ -7879,12 +8027,12 @@
           </a:prstGeom>
         </p:spPr>
         <p:txBody>
-          <a:bodyPr anchorCtr="0" anchor="t" bIns="91425" lIns="91425" spcFirstLastPara="1" rIns="91425" wrap="square" tIns="91425">
+          <a:bodyPr spcFirstLastPara="1" wrap="square" lIns="91425" tIns="91425" rIns="91425" bIns="91425" anchor="t" anchorCtr="0">
             <a:normAutofit lnSpcReduction="10000"/>
           </a:bodyPr>
           <a:lstStyle/>
           <a:p>
-            <a:pPr indent="0" lvl="0" marL="0" rtl="0" algn="l">
+            <a:pPr marL="0" lvl="0" indent="0" algn="l" rtl="0">
               <a:spcBef>
                 <a:spcPts val="0"/>
               </a:spcBef>
@@ -7900,7 +8048,7 @@
             <a:endParaRPr/>
           </a:p>
           <a:p>
-            <a:pPr indent="-342900" lvl="0" marL="457200" rtl="0" algn="l">
+            <a:pPr marL="457200" lvl="0" indent="-342900" algn="l" rtl="0">
               <a:spcBef>
                 <a:spcPts val="0"/>
               </a:spcBef>
@@ -7917,7 +8065,7 @@
             <a:endParaRPr/>
           </a:p>
           <a:p>
-            <a:pPr indent="-317500" lvl="1" marL="914400" rtl="0" algn="l">
+            <a:pPr marL="914400" lvl="1" indent="-317500" algn="l" rtl="0">
               <a:spcBef>
                 <a:spcPts val="0"/>
               </a:spcBef>
@@ -7934,7 +8082,7 @@
             <a:endParaRPr/>
           </a:p>
           <a:p>
-            <a:pPr indent="-317500" lvl="1" marL="914400" rtl="0" algn="l">
+            <a:pPr marL="914400" lvl="1" indent="-317500" algn="l" rtl="0">
               <a:spcBef>
                 <a:spcPts val="0"/>
               </a:spcBef>
@@ -7951,7 +8099,7 @@
             <a:endParaRPr/>
           </a:p>
           <a:p>
-            <a:pPr indent="-342900" lvl="0" marL="457200" rtl="0" algn="l">
+            <a:pPr marL="457200" lvl="0" indent="-342900" algn="l" rtl="0">
               <a:spcBef>
                 <a:spcPts val="0"/>
               </a:spcBef>
@@ -7963,28 +8111,12 @@
             </a:pPr>
             <a:r>
               <a:rPr lang="en"/>
-              <a:t>8x32 LED Matrices will be a visual </a:t>
+              <a:t>8x32 LED Matrices will be a visual implementation of driving LEDs high from an input received from the joysticks.</a:t>
             </a:r>
-            <a:r>
-              <a:rPr lang="en"/>
-              <a:t>implementation</a:t>
-            </a:r>
-            <a:r>
-              <a:rPr lang="en"/>
-              <a:t> of </a:t>
-            </a:r>
-            <a:r>
-              <a:rPr lang="en"/>
-              <a:t>driving</a:t>
-            </a:r>
-            <a:r>
-              <a:rPr lang="en"/>
-              <a:t> LEDs high from an input received from the joysticks.</a:t>
-            </a:r>
-            <a:endParaRPr/>
-          </a:p>
-          <a:p>
-            <a:pPr indent="0" lvl="0" marL="0" rtl="0" algn="l">
+            <a:endParaRPr/>
+          </a:p>
+          <a:p>
+            <a:pPr marL="0" lvl="0" indent="0" algn="l" rtl="0">
               <a:spcBef>
                 <a:spcPts val="0"/>
               </a:spcBef>
@@ -8000,7 +8132,7 @@
             <a:endParaRPr/>
           </a:p>
           <a:p>
-            <a:pPr indent="-342900" lvl="0" marL="457200" rtl="0" algn="l">
+            <a:pPr marL="457200" lvl="0" indent="-342900" algn="l" rtl="0">
               <a:spcBef>
                 <a:spcPts val="0"/>
               </a:spcBef>
@@ -8017,7 +8149,7 @@
             <a:endParaRPr/>
           </a:p>
           <a:p>
-            <a:pPr indent="-342900" lvl="0" marL="457200" rtl="0" algn="l">
+            <a:pPr marL="457200" lvl="0" indent="-342900" algn="l" rtl="0">
               <a:spcBef>
                 <a:spcPts val="0"/>
               </a:spcBef>
@@ -8029,15 +8161,7 @@
             </a:pPr>
             <a:r>
               <a:rPr lang="en"/>
-              <a:t>RFID Reader detects and reads the tag and sends a signal to the other board to </a:t>
-            </a:r>
-            <a:r>
-              <a:rPr lang="en"/>
-              <a:t>authenticate</a:t>
-            </a:r>
-            <a:r>
-              <a:rPr lang="en"/>
-              <a:t> the start of the game.</a:t>
+              <a:t>RFID Reader detects and reads the tag and sends a signal to the other board to authenticate the start of the game.</a:t>
             </a:r>
             <a:endParaRPr/>
           </a:p>
@@ -8052,11 +8176,11 @@
 </file>
 
 <file path=ppt/slides/slide6.xml><?xml version="1.0" encoding="utf-8"?>
-<p:sld xmlns:a="http://schemas.openxmlformats.org/drawingml/2006/main" xmlns:r="http://schemas.openxmlformats.org/officeDocument/2006/relationships" xmlns:mc="http://schemas.openxmlformats.org/markup-compatibility/2006" xmlns:mv="urn:schemas-microsoft-com:mac:vml" xmlns:p="http://schemas.openxmlformats.org/presentationml/2006/main" xmlns:c="http://schemas.openxmlformats.org/drawingml/2006/chart" xmlns:dgm="http://schemas.openxmlformats.org/drawingml/2006/diagram" xmlns:o="urn:schemas-microsoft-com:office:office" xmlns:v="urn:schemas-microsoft-com:vml" xmlns:pvml="urn:schemas-microsoft-com:office:powerpoint" xmlns:com="http://schemas.openxmlformats.org/drawingml/2006/compatibility" xmlns:p14="http://schemas.microsoft.com/office/powerpoint/2010/main" xmlns:p15="http://schemas.microsoft.com/office/powerpoint/2012/main" xmlns:ahyp="http://schemas.microsoft.com/office/drawing/2018/hyperlinkcolor">
+<p:sld xmlns:a="http://schemas.openxmlformats.org/drawingml/2006/main" xmlns:r="http://schemas.openxmlformats.org/officeDocument/2006/relationships" xmlns:p="http://schemas.openxmlformats.org/presentationml/2006/main">
   <p:cSld>
     <p:spTree>
       <p:nvGrpSpPr>
-        <p:cNvPr id="89" name="Shape 89"/>
+        <p:cNvPr id="1" name="Shape 89"/>
         <p:cNvGrpSpPr/>
         <p:nvPr/>
       </p:nvGrpSpPr>
@@ -8071,7 +8195,9 @@
       <p:sp>
         <p:nvSpPr>
           <p:cNvPr id="90" name="Google Shape;90;p18"/>
-          <p:cNvSpPr txBox="1"/>
+          <p:cNvSpPr txBox="1">
+            <a:spLocks noGrp="1"/>
+          </p:cNvSpPr>
           <p:nvPr>
             <p:ph type="title"/>
           </p:nvPr>
@@ -8086,12 +8212,12 @@
           </a:prstGeom>
         </p:spPr>
         <p:txBody>
-          <a:bodyPr anchorCtr="0" anchor="t" bIns="91425" lIns="91425" spcFirstLastPara="1" rIns="91425" wrap="square" tIns="91425">
+          <a:bodyPr spcFirstLastPara="1" wrap="square" lIns="91425" tIns="91425" rIns="91425" bIns="91425" anchor="t" anchorCtr="0">
             <a:normAutofit fontScale="90000"/>
           </a:bodyPr>
           <a:lstStyle/>
           <a:p>
-            <a:pPr indent="0" lvl="0" marL="0" rtl="0" algn="l">
+            <a:pPr marL="0" lvl="0" indent="0" algn="l" rtl="0">
               <a:spcBef>
                 <a:spcPts val="0"/>
               </a:spcBef>
@@ -8111,9 +8237,11 @@
       <p:sp>
         <p:nvSpPr>
           <p:cNvPr id="91" name="Google Shape;91;p18"/>
-          <p:cNvSpPr txBox="1"/>
+          <p:cNvSpPr txBox="1">
+            <a:spLocks noGrp="1"/>
+          </p:cNvSpPr>
           <p:nvPr>
-            <p:ph idx="1" type="body"/>
+            <p:ph type="body" idx="1"/>
           </p:nvPr>
         </p:nvSpPr>
         <p:spPr>
@@ -8126,12 +8254,12 @@
           </a:prstGeom>
         </p:spPr>
         <p:txBody>
-          <a:bodyPr anchorCtr="0" anchor="t" bIns="91425" lIns="91425" spcFirstLastPara="1" rIns="91425" wrap="square" tIns="91425">
+          <a:bodyPr spcFirstLastPara="1" wrap="square" lIns="91425" tIns="91425" rIns="91425" bIns="91425" anchor="t" anchorCtr="0">
             <a:normAutofit fontScale="85000" lnSpcReduction="20000"/>
           </a:bodyPr>
           <a:lstStyle/>
           <a:p>
-            <a:pPr indent="-325755" lvl="0" marL="457200" rtl="0" algn="l">
+            <a:pPr marL="457200" lvl="0" indent="-325755" algn="l" rtl="0">
               <a:spcBef>
                 <a:spcPts val="0"/>
               </a:spcBef>
@@ -8148,7 +8276,7 @@
             <a:endParaRPr/>
           </a:p>
           <a:p>
-            <a:pPr indent="-304165" lvl="1" marL="914400" rtl="0" algn="l">
+            <a:pPr marL="914400" lvl="1" indent="-304165" algn="l" rtl="0">
               <a:spcBef>
                 <a:spcPts val="0"/>
               </a:spcBef>
@@ -8160,20 +8288,12 @@
             </a:pPr>
             <a:r>
               <a:rPr lang="en"/>
-              <a:t>Ball Movement: Ball position (x, y) updated based on diagonal </a:t>
+              <a:t>Ball Movement: Ball position (x, y) updated based on diagonal direction movement (dx, dy)</a:t>
             </a:r>
-            <a:r>
-              <a:rPr lang="en"/>
-              <a:t>direction movement</a:t>
-            </a:r>
-            <a:r>
-              <a:rPr lang="en"/>
-              <a:t> (dx, dy)</a:t>
-            </a:r>
-            <a:endParaRPr/>
-          </a:p>
-          <a:p>
-            <a:pPr indent="-304164" lvl="2" marL="1371600" rtl="0" algn="l">
+            <a:endParaRPr/>
+          </a:p>
+          <a:p>
+            <a:pPr marL="1371600" lvl="2" indent="-304164" algn="l" rtl="0">
               <a:spcBef>
                 <a:spcPts val="0"/>
               </a:spcBef>
@@ -8190,7 +8310,7 @@
             <a:endParaRPr/>
           </a:p>
           <a:p>
-            <a:pPr indent="-304164" lvl="2" marL="1371600" rtl="0" algn="l">
+            <a:pPr marL="1371600" lvl="2" indent="-304164" algn="l" rtl="0">
               <a:spcBef>
                 <a:spcPts val="0"/>
               </a:spcBef>
@@ -8207,7 +8327,7 @@
             <a:endParaRPr/>
           </a:p>
           <a:p>
-            <a:pPr indent="-325755" lvl="0" marL="457200" rtl="0" algn="l">
+            <a:pPr marL="457200" lvl="0" indent="-325755" algn="l" rtl="0">
               <a:spcBef>
                 <a:spcPts val="0"/>
               </a:spcBef>
@@ -8224,7 +8344,7 @@
             <a:endParaRPr/>
           </a:p>
           <a:p>
-            <a:pPr indent="-304165" lvl="1" marL="914400" rtl="0" algn="l">
+            <a:pPr marL="914400" lvl="1" indent="-304165" algn="l" rtl="0">
               <a:spcBef>
                 <a:spcPts val="0"/>
               </a:spcBef>
@@ -8236,20 +8356,12 @@
             </a:pPr>
             <a:r>
               <a:rPr lang="en"/>
-              <a:t>Player 1 and 2: Joystick reading </a:t>
+              <a:t>Player 1 and 2: Joystick reading determine paddle movement (y position)</a:t>
             </a:r>
-            <a:r>
-              <a:rPr lang="en"/>
-              <a:t>determine</a:t>
-            </a:r>
-            <a:r>
-              <a:rPr lang="en"/>
-              <a:t> paddle movement (y position)</a:t>
-            </a:r>
-            <a:endParaRPr/>
-          </a:p>
-          <a:p>
-            <a:pPr indent="-304165" lvl="1" marL="914400" rtl="0" algn="l">
+            <a:endParaRPr/>
+          </a:p>
+          <a:p>
+            <a:pPr marL="914400" lvl="1" indent="-304165" algn="l" rtl="0">
               <a:spcBef>
                 <a:spcPts val="0"/>
               </a:spcBef>
@@ -8266,7 +8378,7 @@
             <a:endParaRPr/>
           </a:p>
           <a:p>
-            <a:pPr indent="-325755" lvl="0" marL="457200" rtl="0" algn="l">
+            <a:pPr marL="457200" lvl="0" indent="-325755" algn="l" rtl="0">
               <a:spcBef>
                 <a:spcPts val="0"/>
               </a:spcBef>
@@ -8283,7 +8395,7 @@
             <a:endParaRPr/>
           </a:p>
           <a:p>
-            <a:pPr indent="-304165" lvl="1" marL="914400" rtl="0" algn="l">
+            <a:pPr marL="914400" lvl="1" indent="-304165" algn="l" rtl="0">
               <a:spcBef>
                 <a:spcPts val="0"/>
               </a:spcBef>
@@ -8295,36 +8407,12 @@
             </a:pPr>
             <a:r>
               <a:rPr lang="en"/>
-              <a:t>Display Buffers: There are two different display buffers that are being used to hold onto changes made to the </a:t>
+              <a:t>Display Buffers: There are two different display buffers that are being used to hold onto changes made to the player data and game area. This implementation created a safety net for making sure we are not overwriting data. </a:t>
             </a:r>
-            <a:r>
-              <a:rPr lang="en"/>
-              <a:t>player</a:t>
-            </a:r>
-            <a:r>
-              <a:rPr lang="en"/>
-              <a:t> data and game area. This </a:t>
-            </a:r>
-            <a:r>
-              <a:rPr lang="en"/>
-              <a:t>implementation</a:t>
-            </a:r>
-            <a:r>
-              <a:rPr lang="en"/>
-              <a:t> created a safety net for making sure we are not </a:t>
-            </a:r>
-            <a:r>
-              <a:rPr lang="en"/>
-              <a:t>overwriting</a:t>
-            </a:r>
-            <a:r>
-              <a:rPr lang="en"/>
-              <a:t> data. </a:t>
-            </a:r>
-            <a:endParaRPr/>
-          </a:p>
-          <a:p>
-            <a:pPr indent="-325755" lvl="0" marL="457200" rtl="0" algn="l">
+            <a:endParaRPr/>
+          </a:p>
+          <a:p>
+            <a:pPr marL="457200" lvl="0" indent="-325755" algn="l" rtl="0">
               <a:spcBef>
                 <a:spcPts val="0"/>
               </a:spcBef>
@@ -8341,7 +8429,7 @@
             <a:endParaRPr/>
           </a:p>
           <a:p>
-            <a:pPr indent="-304165" lvl="1" marL="914400" rtl="0" algn="l">
+            <a:pPr marL="914400" lvl="1" indent="-304165" algn="l" rtl="0">
               <a:spcBef>
                 <a:spcPts val="0"/>
               </a:spcBef>
@@ -8358,7 +8446,7 @@
             <a:endParaRPr/>
           </a:p>
           <a:p>
-            <a:pPr indent="-304165" lvl="1" marL="914400" rtl="0" algn="l">
+            <a:pPr marL="914400" lvl="1" indent="-304165" algn="l" rtl="0">
               <a:spcBef>
                 <a:spcPts val="0"/>
               </a:spcBef>
@@ -8370,16 +8458,12 @@
             </a:pPr>
             <a:r>
               <a:rPr lang="en"/>
-              <a:t>Flashing Score: flashScore() </a:t>
+              <a:t>Flashing Score: flashScore() creates a flashing effect when a point is scored.</a:t>
             </a:r>
-            <a:r>
-              <a:rPr lang="en"/>
-              <a:t>creates a flashing effect when a point is scored.</a:t>
-            </a:r>
-            <a:endParaRPr/>
-          </a:p>
-          <a:p>
-            <a:pPr indent="-325755" lvl="0" marL="457200" rtl="0" algn="l">
+            <a:endParaRPr/>
+          </a:p>
+          <a:p>
+            <a:pPr marL="457200" lvl="0" indent="-325755" algn="l" rtl="0">
               <a:spcBef>
                 <a:spcPts val="0"/>
               </a:spcBef>
@@ -8396,7 +8480,7 @@
             <a:endParaRPr/>
           </a:p>
           <a:p>
-            <a:pPr indent="-304165" lvl="1" marL="914400" rtl="0" algn="l">
+            <a:pPr marL="914400" lvl="1" indent="-304165" algn="l" rtl="0">
               <a:spcBef>
                 <a:spcPts val="0"/>
               </a:spcBef>
@@ -8413,7 +8497,7 @@
             <a:endParaRPr/>
           </a:p>
           <a:p>
-            <a:pPr indent="-304165" lvl="1" marL="914400" rtl="0" algn="l">
+            <a:pPr marL="914400" lvl="1" indent="-304165" algn="l" rtl="0">
               <a:spcBef>
                 <a:spcPts val="0"/>
               </a:spcBef>
@@ -8440,11 +8524,11 @@
 </file>
 
 <file path=ppt/slides/slide7.xml><?xml version="1.0" encoding="utf-8"?>
-<p:sld xmlns:a="http://schemas.openxmlformats.org/drawingml/2006/main" xmlns:r="http://schemas.openxmlformats.org/officeDocument/2006/relationships" xmlns:mc="http://schemas.openxmlformats.org/markup-compatibility/2006" xmlns:mv="urn:schemas-microsoft-com:mac:vml" xmlns:p="http://schemas.openxmlformats.org/presentationml/2006/main" xmlns:c="http://schemas.openxmlformats.org/drawingml/2006/chart" xmlns:dgm="http://schemas.openxmlformats.org/drawingml/2006/diagram" xmlns:o="urn:schemas-microsoft-com:office:office" xmlns:v="urn:schemas-microsoft-com:vml" xmlns:pvml="urn:schemas-microsoft-com:office:powerpoint" xmlns:com="http://schemas.openxmlformats.org/drawingml/2006/compatibility" xmlns:p14="http://schemas.microsoft.com/office/powerpoint/2010/main" xmlns:p15="http://schemas.microsoft.com/office/powerpoint/2012/main" xmlns:ahyp="http://schemas.microsoft.com/office/drawing/2018/hyperlinkcolor">
+<p:sld xmlns:a="http://schemas.openxmlformats.org/drawingml/2006/main" xmlns:r="http://schemas.openxmlformats.org/officeDocument/2006/relationships" xmlns:p="http://schemas.openxmlformats.org/presentationml/2006/main">
   <p:cSld>
     <p:spTree>
       <p:nvGrpSpPr>
-        <p:cNvPr id="95" name="Shape 95"/>
+        <p:cNvPr id="1" name="Shape 95"/>
         <p:cNvGrpSpPr/>
         <p:nvPr/>
       </p:nvGrpSpPr>
@@ -8459,7 +8543,9 @@
       <p:sp>
         <p:nvSpPr>
           <p:cNvPr id="96" name="Google Shape;96;p19"/>
-          <p:cNvSpPr txBox="1"/>
+          <p:cNvSpPr txBox="1">
+            <a:spLocks noGrp="1"/>
+          </p:cNvSpPr>
           <p:nvPr>
             <p:ph type="title"/>
           </p:nvPr>
@@ -8474,12 +8560,12 @@
           </a:prstGeom>
         </p:spPr>
         <p:txBody>
-          <a:bodyPr anchorCtr="0" anchor="t" bIns="91425" lIns="91425" spcFirstLastPara="1" rIns="91425" wrap="square" tIns="91425">
+          <a:bodyPr spcFirstLastPara="1" wrap="square" lIns="91425" tIns="91425" rIns="91425" bIns="91425" anchor="t" anchorCtr="0">
             <a:normAutofit fontScale="90000"/>
           </a:bodyPr>
           <a:lstStyle/>
           <a:p>
-            <a:pPr indent="0" lvl="0" marL="0" rtl="0" algn="l">
+            <a:pPr marL="0" lvl="0" indent="0" algn="l" rtl="0">
               <a:spcBef>
                 <a:spcPts val="0"/>
               </a:spcBef>
@@ -8499,9 +8585,11 @@
       <p:sp>
         <p:nvSpPr>
           <p:cNvPr id="97" name="Google Shape;97;p19"/>
-          <p:cNvSpPr txBox="1"/>
+          <p:cNvSpPr txBox="1">
+            <a:spLocks noGrp="1"/>
+          </p:cNvSpPr>
           <p:nvPr>
-            <p:ph idx="1" type="body"/>
+            <p:ph type="body" idx="1"/>
           </p:nvPr>
         </p:nvSpPr>
         <p:spPr>
@@ -8514,12 +8602,12 @@
           </a:prstGeom>
         </p:spPr>
         <p:txBody>
-          <a:bodyPr anchorCtr="0" anchor="t" bIns="91425" lIns="91425" spcFirstLastPara="1" rIns="91425" wrap="square" tIns="91425">
+          <a:bodyPr spcFirstLastPara="1" wrap="square" lIns="91425" tIns="91425" rIns="91425" bIns="91425" anchor="t" anchorCtr="0">
             <a:normAutofit fontScale="92500" lnSpcReduction="20000"/>
           </a:bodyPr>
           <a:lstStyle/>
           <a:p>
-            <a:pPr indent="-334327" lvl="0" marL="457200" rtl="0" algn="l">
+            <a:pPr marL="457200" lvl="0" indent="-334327" algn="l" rtl="0">
               <a:spcBef>
                 <a:spcPts val="0"/>
               </a:spcBef>
@@ -8536,7 +8624,7 @@
             <a:endParaRPr/>
           </a:p>
           <a:p>
-            <a:pPr indent="-310832" lvl="1" marL="914400" rtl="0" algn="l">
+            <a:pPr marL="914400" lvl="1" indent="-310832" algn="l" rtl="0">
               <a:spcBef>
                 <a:spcPts val="0"/>
               </a:spcBef>
@@ -8548,20 +8636,12 @@
             </a:pPr>
             <a:r>
               <a:rPr lang="en"/>
-              <a:t>References to this </a:t>
+              <a:t>References to this implementation were hard to find, if any.</a:t>
             </a:r>
-            <a:r>
-              <a:rPr lang="en"/>
-              <a:t>implementation</a:t>
-            </a:r>
-            <a:r>
-              <a:rPr lang="en"/>
-              <a:t> were hard to find, if any.</a:t>
-            </a:r>
-            <a:endParaRPr/>
-          </a:p>
-          <a:p>
-            <a:pPr indent="-310832" lvl="1" marL="914400" rtl="0" algn="l">
+            <a:endParaRPr/>
+          </a:p>
+          <a:p>
+            <a:pPr marL="914400" lvl="1" indent="-310832" algn="l" rtl="0">
               <a:spcBef>
                 <a:spcPts val="0"/>
               </a:spcBef>
@@ -8578,7 +8658,7 @@
             <a:endParaRPr/>
           </a:p>
           <a:p>
-            <a:pPr indent="-310832" lvl="1" marL="914400" rtl="0" algn="l">
+            <a:pPr marL="914400" lvl="1" indent="-310832" algn="l" rtl="0">
               <a:spcBef>
                 <a:spcPts val="0"/>
               </a:spcBef>
@@ -8595,7 +8675,7 @@
             <a:endParaRPr/>
           </a:p>
           <a:p>
-            <a:pPr indent="-310832" lvl="1" marL="914400" rtl="0" algn="l">
+            <a:pPr marL="914400" lvl="1" indent="-310832" algn="l" rtl="0">
               <a:spcBef>
                 <a:spcPts val="0"/>
               </a:spcBef>
@@ -8612,7 +8692,7 @@
             <a:endParaRPr/>
           </a:p>
           <a:p>
-            <a:pPr indent="-334327" lvl="0" marL="457200" rtl="0" algn="l">
+            <a:pPr marL="457200" lvl="0" indent="-334327" algn="l" rtl="0">
               <a:spcBef>
                 <a:spcPts val="0"/>
               </a:spcBef>
@@ -8629,7 +8709,7 @@
             <a:endParaRPr/>
           </a:p>
           <a:p>
-            <a:pPr indent="-310832" lvl="1" marL="914400" rtl="0" algn="l">
+            <a:pPr marL="914400" lvl="1" indent="-310832" algn="l" rtl="0">
               <a:spcBef>
                 <a:spcPts val="0"/>
               </a:spcBef>
@@ -8646,7 +8726,7 @@
             <a:endParaRPr/>
           </a:p>
           <a:p>
-            <a:pPr indent="-310832" lvl="1" marL="914400" rtl="0" algn="l">
+            <a:pPr marL="914400" lvl="1" indent="-310832" algn="l" rtl="0">
               <a:spcBef>
                 <a:spcPts val="0"/>
               </a:spcBef>
@@ -8658,24 +8738,12 @@
             </a:pPr>
             <a:r>
               <a:rPr lang="en"/>
-              <a:t>We split the displays into the game area and the player information. This helped with </a:t>
+              <a:t>We split the displays into the game area and the player information. This helped with splitting up the updates and we were no longer accidentally overwriting player data or the game area incorrectly.</a:t>
             </a:r>
-            <a:r>
-              <a:rPr lang="en"/>
-              <a:t>splitting</a:t>
-            </a:r>
-            <a:r>
-              <a:rPr lang="en"/>
-              <a:t> up the updates and we were no longer accidentally overwriting player data or the game area </a:t>
-            </a:r>
-            <a:r>
-              <a:rPr lang="en"/>
-              <a:t>incorrectly.</a:t>
-            </a:r>
-            <a:endParaRPr/>
-          </a:p>
-          <a:p>
-            <a:pPr indent="-334327" lvl="0" marL="457200" rtl="0" algn="l">
+            <a:endParaRPr/>
+          </a:p>
+          <a:p>
+            <a:pPr marL="457200" lvl="0" indent="-334327" algn="l" rtl="0">
               <a:spcBef>
                 <a:spcPts val="0"/>
               </a:spcBef>
@@ -8692,7 +8760,7 @@
             <a:endParaRPr/>
           </a:p>
           <a:p>
-            <a:pPr indent="-310832" lvl="1" marL="914400" rtl="0" algn="l">
+            <a:pPr marL="914400" lvl="1" indent="-310832" algn="l" rtl="0">
               <a:spcBef>
                 <a:spcPts val="0"/>
               </a:spcBef>
@@ -8704,20 +8772,12 @@
             </a:pPr>
             <a:r>
               <a:rPr lang="en"/>
-              <a:t>Paddle tracking was difficult due to finding a specific point to track to make things easier to detect boundaries. Currently, the </a:t>
+              <a:t>Paddle tracking was difficult due to finding a specific point to track to make things easier to detect boundaries. Currently, the implementation is tracking the top most LED of the paddle.</a:t>
             </a:r>
-            <a:r>
-              <a:rPr lang="en"/>
-              <a:t>implementation</a:t>
-            </a:r>
-            <a:r>
-              <a:rPr lang="en"/>
-              <a:t> is tracking the top most LED of the paddle.</a:t>
-            </a:r>
-            <a:endParaRPr/>
-          </a:p>
-          <a:p>
-            <a:pPr indent="-310832" lvl="1" marL="914400" rtl="0" algn="l">
+            <a:endParaRPr/>
+          </a:p>
+          <a:p>
+            <a:pPr marL="914400" lvl="1" indent="-310832" algn="l" rtl="0">
               <a:spcBef>
                 <a:spcPts val="0"/>
               </a:spcBef>
@@ -8744,11 +8804,11 @@
 </file>
 
 <file path=ppt/slides/slide8.xml><?xml version="1.0" encoding="utf-8"?>
-<p:sld xmlns:a="http://schemas.openxmlformats.org/drawingml/2006/main" xmlns:r="http://schemas.openxmlformats.org/officeDocument/2006/relationships" xmlns:mc="http://schemas.openxmlformats.org/markup-compatibility/2006" xmlns:mv="urn:schemas-microsoft-com:mac:vml" xmlns:p="http://schemas.openxmlformats.org/presentationml/2006/main" xmlns:c="http://schemas.openxmlformats.org/drawingml/2006/chart" xmlns:dgm="http://schemas.openxmlformats.org/drawingml/2006/diagram" xmlns:o="urn:schemas-microsoft-com:office:office" xmlns:v="urn:schemas-microsoft-com:vml" xmlns:pvml="urn:schemas-microsoft-com:office:powerpoint" xmlns:com="http://schemas.openxmlformats.org/drawingml/2006/compatibility" xmlns:p14="http://schemas.microsoft.com/office/powerpoint/2010/main" xmlns:p15="http://schemas.microsoft.com/office/powerpoint/2012/main" xmlns:ahyp="http://schemas.microsoft.com/office/drawing/2018/hyperlinkcolor">
+<p:sld xmlns:a="http://schemas.openxmlformats.org/drawingml/2006/main" xmlns:r="http://schemas.openxmlformats.org/officeDocument/2006/relationships" xmlns:p="http://schemas.openxmlformats.org/presentationml/2006/main">
   <p:cSld>
     <p:spTree>
       <p:nvGrpSpPr>
-        <p:cNvPr id="101" name="Shape 101"/>
+        <p:cNvPr id="1" name="Shape 101"/>
         <p:cNvGrpSpPr/>
         <p:nvPr/>
       </p:nvGrpSpPr>
@@ -8763,7 +8823,9 @@
       <p:sp>
         <p:nvSpPr>
           <p:cNvPr id="102" name="Google Shape;102;p20"/>
-          <p:cNvSpPr txBox="1"/>
+          <p:cNvSpPr txBox="1">
+            <a:spLocks noGrp="1"/>
+          </p:cNvSpPr>
           <p:nvPr>
             <p:ph type="title"/>
           </p:nvPr>
@@ -8778,12 +8840,12 @@
           </a:prstGeom>
         </p:spPr>
         <p:txBody>
-          <a:bodyPr anchorCtr="0" anchor="t" bIns="91425" lIns="91425" spcFirstLastPara="1" rIns="91425" wrap="square" tIns="91425">
+          <a:bodyPr spcFirstLastPara="1" wrap="square" lIns="91425" tIns="91425" rIns="91425" bIns="91425" anchor="t" anchorCtr="0">
             <a:normAutofit fontScale="90000"/>
           </a:bodyPr>
           <a:lstStyle/>
           <a:p>
-            <a:pPr indent="0" lvl="0" marL="0" rtl="0" algn="ctr">
+            <a:pPr marL="0" lvl="0" indent="0" algn="ctr" rtl="0">
               <a:spcBef>
                 <a:spcPts val="0"/>
               </a:spcBef>
@@ -8809,7 +8871,288 @@
 </file>
 
 <file path=ppt/theme/theme1.xml><?xml version="1.0" encoding="utf-8"?>
-<a:theme xmlns:a="http://schemas.openxmlformats.org/drawingml/2006/main" xmlns:r="http://schemas.openxmlformats.org/officeDocument/2006/relationships">
+<a:theme xmlns:a="http://schemas.openxmlformats.org/drawingml/2006/main" name="Paperback">
+  <a:themeElements>
+    <a:clrScheme name="Paperback">
+      <a:dk1>
+        <a:srgbClr val="000000"/>
+      </a:dk1>
+      <a:lt1>
+        <a:srgbClr val="FFFFFF"/>
+      </a:lt1>
+      <a:dk2>
+        <a:srgbClr val="00695C"/>
+      </a:dk2>
+      <a:lt2>
+        <a:srgbClr val="26A69A"/>
+      </a:lt2>
+      <a:accent1>
+        <a:srgbClr val="FFFBF0"/>
+      </a:accent1>
+      <a:accent2>
+        <a:srgbClr val="B7B7B7"/>
+      </a:accent2>
+      <a:accent3>
+        <a:srgbClr val="FB8C00"/>
+      </a:accent3>
+      <a:accent4>
+        <a:srgbClr val="80CBC4"/>
+      </a:accent4>
+      <a:accent5>
+        <a:srgbClr val="AF4345"/>
+      </a:accent5>
+      <a:accent6>
+        <a:srgbClr val="F58F8F"/>
+      </a:accent6>
+      <a:hlink>
+        <a:srgbClr val="AF4345"/>
+      </a:hlink>
+      <a:folHlink>
+        <a:srgbClr val="AF4345"/>
+      </a:folHlink>
+    </a:clrScheme>
+    <a:fontScheme name="Office">
+      <a:majorFont>
+        <a:latin typeface="Arial"/>
+        <a:ea typeface=""/>
+        <a:cs typeface=""/>
+        <a:font script="Jpan" typeface="ＭＳ Ｐゴシック"/>
+        <a:font script="Hang" typeface="맑은 고딕"/>
+        <a:font script="Hans" typeface="宋体"/>
+        <a:font script="Hant" typeface="新細明體"/>
+        <a:font script="Arab" typeface="Times New Roman"/>
+        <a:font script="Hebr" typeface="Times New Roman"/>
+        <a:font script="Thai" typeface="Angsana New"/>
+        <a:font script="Ethi" typeface="Nyala"/>
+        <a:font script="Beng" typeface="Vrinda"/>
+        <a:font script="Gujr" typeface="Shruti"/>
+        <a:font script="Khmr" typeface="MoolBoran"/>
+        <a:font script="Knda" typeface="Tunga"/>
+        <a:font script="Guru" typeface="Raavi"/>
+        <a:font script="Cans" typeface="Euphemia"/>
+        <a:font script="Cher" typeface="Plantagenet Cherokee"/>
+        <a:font script="Yiii" typeface="Microsoft Yi Baiti"/>
+        <a:font script="Tibt" typeface="Microsoft Himalaya"/>
+        <a:font script="Thaa" typeface="MV Boli"/>
+        <a:font script="Deva" typeface="Mangal"/>
+        <a:font script="Telu" typeface="Gautami"/>
+        <a:font script="Taml" typeface="Latha"/>
+        <a:font script="Syrc" typeface="Estrangelo Edessa"/>
+        <a:font script="Orya" typeface="Kalinga"/>
+        <a:font script="Mlym" typeface="Kartika"/>
+        <a:font script="Laoo" typeface="DokChampa"/>
+        <a:font script="Sinh" typeface="Iskoola Pota"/>
+        <a:font script="Mong" typeface="Mongolian Baiti"/>
+        <a:font script="Viet" typeface="Times New Roman"/>
+        <a:font script="Uigh" typeface="Microsoft Uighur"/>
+        <a:font script="Geor" typeface="Sylfaen"/>
+      </a:majorFont>
+      <a:minorFont>
+        <a:latin typeface="Arial"/>
+        <a:ea typeface=""/>
+        <a:cs typeface=""/>
+        <a:font script="Jpan" typeface="ＭＳ Ｐゴシック"/>
+        <a:font script="Hang" typeface="맑은 고딕"/>
+        <a:font script="Hans" typeface="宋体"/>
+        <a:font script="Hant" typeface="新細明體"/>
+        <a:font script="Arab" typeface="Arial"/>
+        <a:font script="Hebr" typeface="Arial"/>
+        <a:font script="Thai" typeface="Cordia New"/>
+        <a:font script="Ethi" typeface="Nyala"/>
+        <a:font script="Beng" typeface="Vrinda"/>
+        <a:font script="Gujr" typeface="Shruti"/>
+        <a:font script="Khmr" typeface="DaunPenh"/>
+        <a:font script="Knda" typeface="Tunga"/>
+        <a:font script="Guru" typeface="Raavi"/>
+        <a:font script="Cans" typeface="Euphemia"/>
+        <a:font script="Cher" typeface="Plantagenet Cherokee"/>
+        <a:font script="Yiii" typeface="Microsoft Yi Baiti"/>
+        <a:font script="Tibt" typeface="Microsoft Himalaya"/>
+        <a:font script="Thaa" typeface="MV Boli"/>
+        <a:font script="Deva" typeface="Mangal"/>
+        <a:font script="Telu" typeface="Gautami"/>
+        <a:font script="Taml" typeface="Latha"/>
+        <a:font script="Syrc" typeface="Estrangelo Edessa"/>
+        <a:font script="Orya" typeface="Kalinga"/>
+        <a:font script="Mlym" typeface="Kartika"/>
+        <a:font script="Laoo" typeface="DokChampa"/>
+        <a:font script="Sinh" typeface="Iskoola Pota"/>
+        <a:font script="Mong" typeface="Mongolian Baiti"/>
+        <a:font script="Viet" typeface="Arial"/>
+        <a:font script="Uigh" typeface="Microsoft Uighur"/>
+        <a:font script="Geor" typeface="Sylfaen"/>
+      </a:minorFont>
+    </a:fontScheme>
+    <a:fmtScheme name="Office">
+      <a:fillStyleLst>
+        <a:solidFill>
+          <a:schemeClr val="phClr"/>
+        </a:solidFill>
+        <a:gradFill rotWithShape="1">
+          <a:gsLst>
+            <a:gs pos="0">
+              <a:schemeClr val="phClr">
+                <a:tint val="50000"/>
+                <a:satMod val="300000"/>
+              </a:schemeClr>
+            </a:gs>
+            <a:gs pos="35000">
+              <a:schemeClr val="phClr">
+                <a:tint val="37000"/>
+                <a:satMod val="300000"/>
+              </a:schemeClr>
+            </a:gs>
+            <a:gs pos="100000">
+              <a:schemeClr val="phClr">
+                <a:tint val="15000"/>
+                <a:satMod val="350000"/>
+              </a:schemeClr>
+            </a:gs>
+          </a:gsLst>
+          <a:lin ang="16200000" scaled="1"/>
+        </a:gradFill>
+        <a:gradFill rotWithShape="1">
+          <a:gsLst>
+            <a:gs pos="0">
+              <a:schemeClr val="phClr">
+                <a:tint val="100000"/>
+                <a:shade val="100000"/>
+                <a:satMod val="130000"/>
+              </a:schemeClr>
+            </a:gs>
+            <a:gs pos="100000">
+              <a:schemeClr val="phClr">
+                <a:tint val="50000"/>
+                <a:shade val="100000"/>
+                <a:satMod val="350000"/>
+              </a:schemeClr>
+            </a:gs>
+          </a:gsLst>
+          <a:lin ang="16200000" scaled="0"/>
+        </a:gradFill>
+      </a:fillStyleLst>
+      <a:lnStyleLst>
+        <a:ln w="9525" cap="flat" cmpd="sng" algn="ctr">
+          <a:solidFill>
+            <a:schemeClr val="phClr">
+              <a:shade val="95000"/>
+              <a:satMod val="105000"/>
+            </a:schemeClr>
+          </a:solidFill>
+          <a:prstDash val="solid"/>
+        </a:ln>
+        <a:ln w="25400" cap="flat" cmpd="sng" algn="ctr">
+          <a:solidFill>
+            <a:schemeClr val="phClr"/>
+          </a:solidFill>
+          <a:prstDash val="solid"/>
+        </a:ln>
+        <a:ln w="38100" cap="flat" cmpd="sng" algn="ctr">
+          <a:solidFill>
+            <a:schemeClr val="phClr"/>
+          </a:solidFill>
+          <a:prstDash val="solid"/>
+        </a:ln>
+      </a:lnStyleLst>
+      <a:effectStyleLst>
+        <a:effectStyle>
+          <a:effectLst>
+            <a:outerShdw blurRad="40000" dist="20000" dir="5400000" rotWithShape="0">
+              <a:srgbClr val="000000">
+                <a:alpha val="38000"/>
+              </a:srgbClr>
+            </a:outerShdw>
+          </a:effectLst>
+        </a:effectStyle>
+        <a:effectStyle>
+          <a:effectLst>
+            <a:outerShdw blurRad="40000" dist="23000" dir="5400000" rotWithShape="0">
+              <a:srgbClr val="000000">
+                <a:alpha val="35000"/>
+              </a:srgbClr>
+            </a:outerShdw>
+          </a:effectLst>
+        </a:effectStyle>
+        <a:effectStyle>
+          <a:effectLst>
+            <a:outerShdw blurRad="40000" dist="23000" dir="5400000" rotWithShape="0">
+              <a:srgbClr val="000000">
+                <a:alpha val="35000"/>
+              </a:srgbClr>
+            </a:outerShdw>
+          </a:effectLst>
+          <a:scene3d>
+            <a:camera prst="orthographicFront">
+              <a:rot lat="0" lon="0" rev="0"/>
+            </a:camera>
+            <a:lightRig rig="threePt" dir="t">
+              <a:rot lat="0" lon="0" rev="1200000"/>
+            </a:lightRig>
+          </a:scene3d>
+          <a:sp3d>
+            <a:bevelT w="63500" h="25400"/>
+          </a:sp3d>
+        </a:effectStyle>
+      </a:effectStyleLst>
+      <a:bgFillStyleLst>
+        <a:solidFill>
+          <a:schemeClr val="phClr"/>
+        </a:solidFill>
+        <a:gradFill rotWithShape="1">
+          <a:gsLst>
+            <a:gs pos="0">
+              <a:schemeClr val="phClr">
+                <a:tint val="40000"/>
+                <a:satMod val="350000"/>
+              </a:schemeClr>
+            </a:gs>
+            <a:gs pos="40000">
+              <a:schemeClr val="phClr">
+                <a:tint val="45000"/>
+                <a:shade val="99000"/>
+                <a:satMod val="350000"/>
+              </a:schemeClr>
+            </a:gs>
+            <a:gs pos="100000">
+              <a:schemeClr val="phClr">
+                <a:shade val="20000"/>
+                <a:satMod val="255000"/>
+              </a:schemeClr>
+            </a:gs>
+          </a:gsLst>
+          <a:path path="circle">
+            <a:fillToRect l="50000" t="-80000" r="50000" b="180000"/>
+          </a:path>
+        </a:gradFill>
+        <a:gradFill rotWithShape="1">
+          <a:gsLst>
+            <a:gs pos="0">
+              <a:schemeClr val="phClr">
+                <a:tint val="80000"/>
+                <a:satMod val="300000"/>
+              </a:schemeClr>
+            </a:gs>
+            <a:gs pos="100000">
+              <a:schemeClr val="phClr">
+                <a:shade val="30000"/>
+                <a:satMod val="200000"/>
+              </a:schemeClr>
+            </a:gs>
+          </a:gsLst>
+          <a:path path="circle">
+            <a:fillToRect l="50000" t="50000" r="50000" b="50000"/>
+          </a:path>
+        </a:gradFill>
+      </a:bgFillStyleLst>
+    </a:fmtScheme>
+  </a:themeElements>
+  <a:objectDefaults/>
+  <a:extraClrSchemeLst/>
+</a:theme>
+</file>
+
+<file path=ppt/theme/theme2.xml><?xml version="1.0" encoding="utf-8"?>
+<a:theme xmlns:a="http://schemas.openxmlformats.org/drawingml/2006/main">
   <a:themeElements>
     <a:clrScheme name="Default">
       <a:dk1>
@@ -9084,284 +9427,7 @@
       </a:bgFillStyleLst>
     </a:fmtScheme>
   </a:themeElements>
-</a:theme>
-</file>
-
-<file path=ppt/theme/theme2.xml><?xml version="1.0" encoding="utf-8"?>
-<a:theme xmlns:a="http://schemas.openxmlformats.org/drawingml/2006/main" xmlns:r="http://schemas.openxmlformats.org/officeDocument/2006/relationships" name="Paperback">
-  <a:themeElements>
-    <a:clrScheme name="Paperback">
-      <a:dk1>
-        <a:srgbClr val="000000"/>
-      </a:dk1>
-      <a:lt1>
-        <a:srgbClr val="FFFFFF"/>
-      </a:lt1>
-      <a:dk2>
-        <a:srgbClr val="00695C"/>
-      </a:dk2>
-      <a:lt2>
-        <a:srgbClr val="26A69A"/>
-      </a:lt2>
-      <a:accent1>
-        <a:srgbClr val="FFFBF0"/>
-      </a:accent1>
-      <a:accent2>
-        <a:srgbClr val="B7B7B7"/>
-      </a:accent2>
-      <a:accent3>
-        <a:srgbClr val="FB8C00"/>
-      </a:accent3>
-      <a:accent4>
-        <a:srgbClr val="80CBC4"/>
-      </a:accent4>
-      <a:accent5>
-        <a:srgbClr val="AF4345"/>
-      </a:accent5>
-      <a:accent6>
-        <a:srgbClr val="F58F8F"/>
-      </a:accent6>
-      <a:hlink>
-        <a:srgbClr val="AF4345"/>
-      </a:hlink>
-      <a:folHlink>
-        <a:srgbClr val="AF4345"/>
-      </a:folHlink>
-    </a:clrScheme>
-    <a:fontScheme name="Office">
-      <a:majorFont>
-        <a:latin typeface="Arial"/>
-        <a:ea typeface=""/>
-        <a:cs typeface=""/>
-        <a:font script="Jpan" typeface="ＭＳ Ｐゴシック"/>
-        <a:font script="Hang" typeface="맑은 고딕"/>
-        <a:font script="Hans" typeface="宋体"/>
-        <a:font script="Hant" typeface="新細明體"/>
-        <a:font script="Arab" typeface="Times New Roman"/>
-        <a:font script="Hebr" typeface="Times New Roman"/>
-        <a:font script="Thai" typeface="Angsana New"/>
-        <a:font script="Ethi" typeface="Nyala"/>
-        <a:font script="Beng" typeface="Vrinda"/>
-        <a:font script="Gujr" typeface="Shruti"/>
-        <a:font script="Khmr" typeface="MoolBoran"/>
-        <a:font script="Knda" typeface="Tunga"/>
-        <a:font script="Guru" typeface="Raavi"/>
-        <a:font script="Cans" typeface="Euphemia"/>
-        <a:font script="Cher" typeface="Plantagenet Cherokee"/>
-        <a:font script="Yiii" typeface="Microsoft Yi Baiti"/>
-        <a:font script="Tibt" typeface="Microsoft Himalaya"/>
-        <a:font script="Thaa" typeface="MV Boli"/>
-        <a:font script="Deva" typeface="Mangal"/>
-        <a:font script="Telu" typeface="Gautami"/>
-        <a:font script="Taml" typeface="Latha"/>
-        <a:font script="Syrc" typeface="Estrangelo Edessa"/>
-        <a:font script="Orya" typeface="Kalinga"/>
-        <a:font script="Mlym" typeface="Kartika"/>
-        <a:font script="Laoo" typeface="DokChampa"/>
-        <a:font script="Sinh" typeface="Iskoola Pota"/>
-        <a:font script="Mong" typeface="Mongolian Baiti"/>
-        <a:font script="Viet" typeface="Times New Roman"/>
-        <a:font script="Uigh" typeface="Microsoft Uighur"/>
-        <a:font script="Geor" typeface="Sylfaen"/>
-      </a:majorFont>
-      <a:minorFont>
-        <a:latin typeface="Arial"/>
-        <a:ea typeface=""/>
-        <a:cs typeface=""/>
-        <a:font script="Jpan" typeface="ＭＳ Ｐゴシック"/>
-        <a:font script="Hang" typeface="맑은 고딕"/>
-        <a:font script="Hans" typeface="宋体"/>
-        <a:font script="Hant" typeface="新細明體"/>
-        <a:font script="Arab" typeface="Arial"/>
-        <a:font script="Hebr" typeface="Arial"/>
-        <a:font script="Thai" typeface="Cordia New"/>
-        <a:font script="Ethi" typeface="Nyala"/>
-        <a:font script="Beng" typeface="Vrinda"/>
-        <a:font script="Gujr" typeface="Shruti"/>
-        <a:font script="Khmr" typeface="DaunPenh"/>
-        <a:font script="Knda" typeface="Tunga"/>
-        <a:font script="Guru" typeface="Raavi"/>
-        <a:font script="Cans" typeface="Euphemia"/>
-        <a:font script="Cher" typeface="Plantagenet Cherokee"/>
-        <a:font script="Yiii" typeface="Microsoft Yi Baiti"/>
-        <a:font script="Tibt" typeface="Microsoft Himalaya"/>
-        <a:font script="Thaa" typeface="MV Boli"/>
-        <a:font script="Deva" typeface="Mangal"/>
-        <a:font script="Telu" typeface="Gautami"/>
-        <a:font script="Taml" typeface="Latha"/>
-        <a:font script="Syrc" typeface="Estrangelo Edessa"/>
-        <a:font script="Orya" typeface="Kalinga"/>
-        <a:font script="Mlym" typeface="Kartika"/>
-        <a:font script="Laoo" typeface="DokChampa"/>
-        <a:font script="Sinh" typeface="Iskoola Pota"/>
-        <a:font script="Mong" typeface="Mongolian Baiti"/>
-        <a:font script="Viet" typeface="Arial"/>
-        <a:font script="Uigh" typeface="Microsoft Uighur"/>
-        <a:font script="Geor" typeface="Sylfaen"/>
-      </a:minorFont>
-    </a:fontScheme>
-    <a:fmtScheme name="Office">
-      <a:fillStyleLst>
-        <a:solidFill>
-          <a:schemeClr val="phClr"/>
-        </a:solidFill>
-        <a:gradFill rotWithShape="1">
-          <a:gsLst>
-            <a:gs pos="0">
-              <a:schemeClr val="phClr">
-                <a:tint val="50000"/>
-                <a:satMod val="300000"/>
-              </a:schemeClr>
-            </a:gs>
-            <a:gs pos="35000">
-              <a:schemeClr val="phClr">
-                <a:tint val="37000"/>
-                <a:satMod val="300000"/>
-              </a:schemeClr>
-            </a:gs>
-            <a:gs pos="100000">
-              <a:schemeClr val="phClr">
-                <a:tint val="15000"/>
-                <a:satMod val="350000"/>
-              </a:schemeClr>
-            </a:gs>
-          </a:gsLst>
-          <a:lin ang="16200000" scaled="1"/>
-        </a:gradFill>
-        <a:gradFill rotWithShape="1">
-          <a:gsLst>
-            <a:gs pos="0">
-              <a:schemeClr val="phClr">
-                <a:tint val="100000"/>
-                <a:shade val="100000"/>
-                <a:satMod val="130000"/>
-              </a:schemeClr>
-            </a:gs>
-            <a:gs pos="100000">
-              <a:schemeClr val="phClr">
-                <a:tint val="50000"/>
-                <a:shade val="100000"/>
-                <a:satMod val="350000"/>
-              </a:schemeClr>
-            </a:gs>
-          </a:gsLst>
-          <a:lin ang="16200000" scaled="0"/>
-        </a:gradFill>
-      </a:fillStyleLst>
-      <a:lnStyleLst>
-        <a:ln w="9525" cap="flat" cmpd="sng" algn="ctr">
-          <a:solidFill>
-            <a:schemeClr val="phClr">
-              <a:shade val="95000"/>
-              <a:satMod val="105000"/>
-            </a:schemeClr>
-          </a:solidFill>
-          <a:prstDash val="solid"/>
-        </a:ln>
-        <a:ln w="25400" cap="flat" cmpd="sng" algn="ctr">
-          <a:solidFill>
-            <a:schemeClr val="phClr"/>
-          </a:solidFill>
-          <a:prstDash val="solid"/>
-        </a:ln>
-        <a:ln w="38100" cap="flat" cmpd="sng" algn="ctr">
-          <a:solidFill>
-            <a:schemeClr val="phClr"/>
-          </a:solidFill>
-          <a:prstDash val="solid"/>
-        </a:ln>
-      </a:lnStyleLst>
-      <a:effectStyleLst>
-        <a:effectStyle>
-          <a:effectLst>
-            <a:outerShdw blurRad="40000" dist="20000" dir="5400000" rotWithShape="0">
-              <a:srgbClr val="000000">
-                <a:alpha val="38000"/>
-              </a:srgbClr>
-            </a:outerShdw>
-          </a:effectLst>
-        </a:effectStyle>
-        <a:effectStyle>
-          <a:effectLst>
-            <a:outerShdw blurRad="40000" dist="23000" dir="5400000" rotWithShape="0">
-              <a:srgbClr val="000000">
-                <a:alpha val="35000"/>
-              </a:srgbClr>
-            </a:outerShdw>
-          </a:effectLst>
-        </a:effectStyle>
-        <a:effectStyle>
-          <a:effectLst>
-            <a:outerShdw blurRad="40000" dist="23000" dir="5400000" rotWithShape="0">
-              <a:srgbClr val="000000">
-                <a:alpha val="35000"/>
-              </a:srgbClr>
-            </a:outerShdw>
-          </a:effectLst>
-          <a:scene3d>
-            <a:camera prst="orthographicFront">
-              <a:rot lat="0" lon="0" rev="0"/>
-            </a:camera>
-            <a:lightRig rig="threePt" dir="t">
-              <a:rot lat="0" lon="0" rev="1200000"/>
-            </a:lightRig>
-          </a:scene3d>
-          <a:sp3d>
-            <a:bevelT w="63500" h="25400"/>
-          </a:sp3d>
-        </a:effectStyle>
-      </a:effectStyleLst>
-      <a:bgFillStyleLst>
-        <a:solidFill>
-          <a:schemeClr val="phClr"/>
-        </a:solidFill>
-        <a:gradFill rotWithShape="1">
-          <a:gsLst>
-            <a:gs pos="0">
-              <a:schemeClr val="phClr">
-                <a:tint val="40000"/>
-                <a:satMod val="350000"/>
-              </a:schemeClr>
-            </a:gs>
-            <a:gs pos="40000">
-              <a:schemeClr val="phClr">
-                <a:tint val="45000"/>
-                <a:shade val="99000"/>
-                <a:satMod val="350000"/>
-              </a:schemeClr>
-            </a:gs>
-            <a:gs pos="100000">
-              <a:schemeClr val="phClr">
-                <a:shade val="20000"/>
-                <a:satMod val="255000"/>
-              </a:schemeClr>
-            </a:gs>
-          </a:gsLst>
-          <a:path path="circle">
-            <a:fillToRect l="50000" t="-80000" r="50000" b="180000"/>
-          </a:path>
-        </a:gradFill>
-        <a:gradFill rotWithShape="1">
-          <a:gsLst>
-            <a:gs pos="0">
-              <a:schemeClr val="phClr">
-                <a:tint val="80000"/>
-                <a:satMod val="300000"/>
-              </a:schemeClr>
-            </a:gs>
-            <a:gs pos="100000">
-              <a:schemeClr val="phClr">
-                <a:shade val="30000"/>
-                <a:satMod val="200000"/>
-              </a:schemeClr>
-            </a:gs>
-          </a:gsLst>
-          <a:path path="circle">
-            <a:fillToRect l="50000" t="50000" r="50000" b="50000"/>
-          </a:path>
-        </a:gradFill>
-      </a:bgFillStyleLst>
-    </a:fmtScheme>
-  </a:themeElements>
+  <a:objectDefaults/>
+  <a:extraClrSchemeLst/>
 </a:theme>
 </file>